--- a/DocAssistIQ_Architecture_Presentation.pptx
+++ b/DocAssistIQ_Architecture_Presentation.pptx
@@ -8,6 +8,27 @@
     <p:sldId id="256" r:id="rId7"/>
     <p:sldId id="257" r:id="rId8"/>
     <p:sldId id="258" r:id="rId9"/>
+    <p:sldId id="259" r:id="rId10"/>
+    <p:sldId id="260" r:id="rId11"/>
+    <p:sldId id="261" r:id="rId12"/>
+    <p:sldId id="262" r:id="rId13"/>
+    <p:sldId id="263" r:id="rId14"/>
+    <p:sldId id="264" r:id="rId15"/>
+    <p:sldId id="265" r:id="rId16"/>
+    <p:sldId id="266" r:id="rId17"/>
+    <p:sldId id="267" r:id="rId18"/>
+    <p:sldId id="268" r:id="rId19"/>
+    <p:sldId id="269" r:id="rId20"/>
+    <p:sldId id="270" r:id="rId21"/>
+    <p:sldId id="271" r:id="rId22"/>
+    <p:sldId id="272" r:id="rId23"/>
+    <p:sldId id="273" r:id="rId24"/>
+    <p:sldId id="274" r:id="rId25"/>
+    <p:sldId id="275" r:id="rId26"/>
+    <p:sldId id="276" r:id="rId27"/>
+    <p:sldId id="277" r:id="rId28"/>
+    <p:sldId id="278" r:id="rId29"/>
+    <p:sldId id="279" r:id="rId30"/>
   </p:sldIdLst>
   <p:sldSz cx="12191695" cy="6858000" type="screen4x3"/>
   <p:notesSz cx="6858000" cy="9144000"/>
@@ -3105,12 +3126,10 @@
             <a:avLst/>
           </a:prstGeom>
           <a:solidFill>
-            <a:srgbClr val="0F2942"/>
+            <a:srgbClr val="0A192F"/>
           </a:solidFill>
           <a:ln>
-            <a:solidFill>
-              <a:srgbClr val="0F2942"/>
-            </a:solidFill>
+            <a:noFill/>
           </a:ln>
         </p:spPr>
         <p:style>
@@ -3137,13 +3156,56 @@
       </p:sp>
       <p:sp>
         <p:nvSpPr>
-          <p:cNvPr id="3" name="TextBox 2"/>
+          <p:cNvPr id="3" name="Rectangle 2"/>
+          <p:cNvSpPr/>
+          <p:nvPr/>
+        </p:nvSpPr>
+        <p:spPr>
+          <a:xfrm>
+            <a:off x="0" y="0"/>
+            <a:ext cx="12191695" cy="109728"/>
+          </a:xfrm>
+          <a:prstGeom prst="rect">
+            <a:avLst/>
+          </a:prstGeom>
+          <a:solidFill>
+            <a:srgbClr val="38BDF8"/>
+          </a:solidFill>
+          <a:ln>
+            <a:noFill/>
+          </a:ln>
+        </p:spPr>
+        <p:style>
+          <a:lnRef idx="1">
+            <a:schemeClr val="accent1"/>
+          </a:lnRef>
+          <a:fillRef idx="3">
+            <a:schemeClr val="accent1"/>
+          </a:fillRef>
+          <a:effectRef idx="2">
+            <a:schemeClr val="accent1"/>
+          </a:effectRef>
+          <a:fontRef idx="minor">
+            <a:schemeClr val="lt1"/>
+          </a:fontRef>
+        </p:style>
+        <p:txBody>
+          <a:bodyPr rtlCol="0" anchor="ctr"/>
+          <a:lstStyle/>
+          <a:p>
+            <a:pPr algn="ctr"/>
+          </a:p>
+        </p:txBody>
+      </p:sp>
+      <p:sp>
+        <p:nvSpPr>
+          <p:cNvPr id="4" name="TextBox 3"/>
           <p:cNvSpPr txBox="1"/>
           <p:nvPr/>
         </p:nvSpPr>
         <p:spPr>
           <a:xfrm>
-            <a:off x="914400" y="2011680"/>
+            <a:off x="914400" y="1645920"/>
             <a:ext cx="10362895" cy="2926080"/>
           </a:xfrm>
           <a:prstGeom prst="rect">
@@ -3158,7 +3220,7 @@
           <a:lstStyle/>
           <a:p>
             <a:pPr>
-              <a:defRPr sz="5400" b="1">
+              <a:defRPr sz="5600" b="1">
                 <a:solidFill>
                   <a:srgbClr val="FFFFFF"/>
                 </a:solidFill>
@@ -3167,6 +3229,426 @@
             </a:pPr>
             <a:r>
               <a:t>DocAssistIQ</a:t>
+            </a:r>
+          </a:p>
+          <a:p>
+            <a:pPr>
+              <a:spcBef>
+                <a:spcPts val="800"/>
+              </a:spcBef>
+              <a:defRPr sz="2200" b="1">
+                <a:solidFill>
+                  <a:srgbClr val="38BDF8"/>
+                </a:solidFill>
+                <a:latin typeface="Calibri"/>
+              </a:defRPr>
+            </a:pPr>
+            <a:r>
+              <a:t>Autonomous-Grade Clinical Decision Support System &amp; Ambient Voice Intelligence</a:t>
+            </a:r>
+          </a:p>
+          <a:p>
+            <a:pPr>
+              <a:spcBef>
+                <a:spcPts val="1000"/>
+              </a:spcBef>
+              <a:defRPr sz="1400">
+                <a:solidFill>
+                  <a:srgbClr val="94A3B8"/>
+                </a:solidFill>
+                <a:latin typeface="Calibri"/>
+              </a:defRPr>
+            </a:pPr>
+            <a:r>
+              <a:t>Comprehensive 4-Person Master Project Presentation &amp; Faculty Viva Defense Deck</a:t>
+            </a:r>
+          </a:p>
+        </p:txBody>
+      </p:sp>
+      <p:sp>
+        <p:nvSpPr>
+          <p:cNvPr id="5" name="Rounded Rectangle 4"/>
+          <p:cNvSpPr/>
+          <p:nvPr/>
+        </p:nvSpPr>
+        <p:spPr>
+          <a:xfrm>
+            <a:off x="914400" y="4937760"/>
+            <a:ext cx="2468880" cy="822960"/>
+          </a:xfrm>
+          <a:prstGeom prst="roundRect">
+            <a:avLst/>
+          </a:prstGeom>
+          <a:solidFill>
+            <a:srgbClr val="0F2942"/>
+          </a:solidFill>
+          <a:ln w="19050">
+            <a:solidFill>
+              <a:srgbClr val="0284C7"/>
+            </a:solidFill>
+          </a:ln>
+        </p:spPr>
+        <p:style>
+          <a:lnRef idx="1">
+            <a:schemeClr val="accent1"/>
+          </a:lnRef>
+          <a:fillRef idx="3">
+            <a:schemeClr val="accent1"/>
+          </a:fillRef>
+          <a:effectRef idx="2">
+            <a:schemeClr val="accent1"/>
+          </a:effectRef>
+          <a:fontRef idx="minor">
+            <a:schemeClr val="lt1"/>
+          </a:fontRef>
+        </p:style>
+        <p:txBody>
+          <a:bodyPr rtlCol="0" anchor="ctr"/>
+          <a:lstStyle/>
+          <a:p>
+            <a:pPr algn="ctr">
+              <a:defRPr sz="1100" b="1">
+                <a:solidFill>
+                  <a:srgbClr val="FFFFFF"/>
+                </a:solidFill>
+                <a:latin typeface="Calibri"/>
+              </a:defRPr>
+            </a:pPr>
+            <a:r>
+              <a:t>Sub-30ms Real-Time Inference</a:t>
+            </a:r>
+          </a:p>
+        </p:txBody>
+      </p:sp>
+      <p:sp>
+        <p:nvSpPr>
+          <p:cNvPr id="6" name="Rounded Rectangle 5"/>
+          <p:cNvSpPr/>
+          <p:nvPr/>
+        </p:nvSpPr>
+        <p:spPr>
+          <a:xfrm>
+            <a:off x="3520440" y="4937760"/>
+            <a:ext cx="2468880" cy="822960"/>
+          </a:xfrm>
+          <a:prstGeom prst="roundRect">
+            <a:avLst/>
+          </a:prstGeom>
+          <a:solidFill>
+            <a:srgbClr val="0F2942"/>
+          </a:solidFill>
+          <a:ln w="19050">
+            <a:solidFill>
+              <a:srgbClr val="0D9488"/>
+            </a:solidFill>
+          </a:ln>
+        </p:spPr>
+        <p:style>
+          <a:lnRef idx="1">
+            <a:schemeClr val="accent1"/>
+          </a:lnRef>
+          <a:fillRef idx="3">
+            <a:schemeClr val="accent1"/>
+          </a:fillRef>
+          <a:effectRef idx="2">
+            <a:schemeClr val="accent1"/>
+          </a:effectRef>
+          <a:fontRef idx="minor">
+            <a:schemeClr val="lt1"/>
+          </a:fontRef>
+        </p:style>
+        <p:txBody>
+          <a:bodyPr rtlCol="0" anchor="ctr"/>
+          <a:lstStyle/>
+          <a:p>
+            <a:pPr algn="ctr">
+              <a:defRPr sz="1100" b="1">
+                <a:solidFill>
+                  <a:srgbClr val="FFFFFF"/>
+                </a:solidFill>
+                <a:latin typeface="Calibri"/>
+              </a:defRPr>
+            </a:pPr>
+            <a:r>
+              <a:t>Faster-Whisper &amp; Diarization</a:t>
+            </a:r>
+          </a:p>
+        </p:txBody>
+      </p:sp>
+      <p:sp>
+        <p:nvSpPr>
+          <p:cNvPr id="7" name="Rounded Rectangle 6"/>
+          <p:cNvSpPr/>
+          <p:nvPr/>
+        </p:nvSpPr>
+        <p:spPr>
+          <a:xfrm>
+            <a:off x="6126480" y="4937760"/>
+            <a:ext cx="2468880" cy="822960"/>
+          </a:xfrm>
+          <a:prstGeom prst="roundRect">
+            <a:avLst/>
+          </a:prstGeom>
+          <a:solidFill>
+            <a:srgbClr val="0F2942"/>
+          </a:solidFill>
+          <a:ln w="19050">
+            <a:solidFill>
+              <a:srgbClr val="8B5CF6"/>
+            </a:solidFill>
+          </a:ln>
+        </p:spPr>
+        <p:style>
+          <a:lnRef idx="1">
+            <a:schemeClr val="accent1"/>
+          </a:lnRef>
+          <a:fillRef idx="3">
+            <a:schemeClr val="accent1"/>
+          </a:fillRef>
+          <a:effectRef idx="2">
+            <a:schemeClr val="accent1"/>
+          </a:effectRef>
+          <a:fontRef idx="minor">
+            <a:schemeClr val="lt1"/>
+          </a:fontRef>
+        </p:style>
+        <p:txBody>
+          <a:bodyPr rtlCol="0" anchor="ctr"/>
+          <a:lstStyle/>
+          <a:p>
+            <a:pPr algn="ctr">
+              <a:defRPr sz="1100" b="1">
+                <a:solidFill>
+                  <a:srgbClr val="FFFFFF"/>
+                </a:solidFill>
+                <a:latin typeface="Calibri"/>
+              </a:defRPr>
+            </a:pPr>
+            <a:r>
+              <a:t>1,500+ Open-Domain KB &amp; Outbreak Radar</a:t>
+            </a:r>
+          </a:p>
+        </p:txBody>
+      </p:sp>
+      <p:sp>
+        <p:nvSpPr>
+          <p:cNvPr id="8" name="Rounded Rectangle 7"/>
+          <p:cNvSpPr/>
+          <p:nvPr/>
+        </p:nvSpPr>
+        <p:spPr>
+          <a:xfrm>
+            <a:off x="8732520" y="4937760"/>
+            <a:ext cx="2468880" cy="822960"/>
+          </a:xfrm>
+          <a:prstGeom prst="roundRect">
+            <a:avLst/>
+          </a:prstGeom>
+          <a:solidFill>
+            <a:srgbClr val="0F2942"/>
+          </a:solidFill>
+          <a:ln w="19050">
+            <a:solidFill>
+              <a:srgbClr val="10B981"/>
+            </a:solidFill>
+          </a:ln>
+        </p:spPr>
+        <p:style>
+          <a:lnRef idx="1">
+            <a:schemeClr val="accent1"/>
+          </a:lnRef>
+          <a:fillRef idx="3">
+            <a:schemeClr val="accent1"/>
+          </a:fillRef>
+          <a:effectRef idx="2">
+            <a:schemeClr val="accent1"/>
+          </a:effectRef>
+          <a:fontRef idx="minor">
+            <a:schemeClr val="lt1"/>
+          </a:fontRef>
+        </p:style>
+        <p:txBody>
+          <a:bodyPr rtlCol="0" anchor="ctr"/>
+          <a:lstStyle/>
+          <a:p>
+            <a:pPr algn="ctr">
+              <a:defRPr sz="1100" b="1">
+                <a:solidFill>
+                  <a:srgbClr val="FFFFFF"/>
+                </a:solidFill>
+                <a:latin typeface="Calibri"/>
+              </a:defRPr>
+            </a:pPr>
+            <a:r>
+              <a:t>Next.js 16 &amp; SHA-256 Provenance</a:t>
+            </a:r>
+          </a:p>
+        </p:txBody>
+      </p:sp>
+    </p:spTree>
+  </p:cSld>
+  <p:clrMapOvr>
+    <a:masterClrMapping/>
+  </p:clrMapOvr>
+</p:sld>
+</file>
+
+<file path=ppt/slides/slide10.xml><?xml version="1.0" encoding="utf-8"?>
+<p:sld xmlns:a="http://schemas.openxmlformats.org/drawingml/2006/main" xmlns:p="http://schemas.openxmlformats.org/presentationml/2006/main" xmlns:r="http://schemas.openxmlformats.org/officeDocument/2006/relationships">
+  <p:cSld>
+    <p:spTree>
+      <p:nvGrpSpPr>
+        <p:cNvPr id="1" name=""/>
+        <p:cNvGrpSpPr/>
+        <p:nvPr/>
+      </p:nvGrpSpPr>
+      <p:grpSpPr/>
+      <p:sp>
+        <p:nvSpPr>
+          <p:cNvPr id="2" name="Rectangle 1"/>
+          <p:cNvSpPr/>
+          <p:nvPr/>
+        </p:nvSpPr>
+        <p:spPr>
+          <a:xfrm>
+            <a:off x="0" y="0"/>
+            <a:ext cx="12191695" cy="6858000"/>
+          </a:xfrm>
+          <a:prstGeom prst="rect">
+            <a:avLst/>
+          </a:prstGeom>
+          <a:solidFill>
+            <a:srgbClr val="FFFFFF"/>
+          </a:solidFill>
+          <a:ln>
+            <a:noFill/>
+          </a:ln>
+        </p:spPr>
+        <p:style>
+          <a:lnRef idx="1">
+            <a:schemeClr val="accent1"/>
+          </a:lnRef>
+          <a:fillRef idx="3">
+            <a:schemeClr val="accent1"/>
+          </a:fillRef>
+          <a:effectRef idx="2">
+            <a:schemeClr val="accent1"/>
+          </a:effectRef>
+          <a:fontRef idx="minor">
+            <a:schemeClr val="lt1"/>
+          </a:fontRef>
+        </p:style>
+        <p:txBody>
+          <a:bodyPr rtlCol="0" anchor="ctr"/>
+          <a:lstStyle/>
+          <a:p>
+            <a:pPr algn="ctr"/>
+          </a:p>
+        </p:txBody>
+      </p:sp>
+      <p:sp>
+        <p:nvSpPr>
+          <p:cNvPr id="3" name="TextBox 2"/>
+          <p:cNvSpPr txBox="1"/>
+          <p:nvPr/>
+        </p:nvSpPr>
+        <p:spPr>
+          <a:xfrm>
+            <a:off x="731520" y="365760"/>
+            <a:ext cx="10728655" cy="822960"/>
+          </a:xfrm>
+          <a:prstGeom prst="rect">
+            <a:avLst/>
+          </a:prstGeom>
+          <a:noFill/>
+        </p:spPr>
+        <p:txBody>
+          <a:bodyPr wrap="square" lIns="0" tIns="0" rIns="0" bIns="0">
+            <a:spAutoFit/>
+          </a:bodyPr>
+          <a:lstStyle/>
+          <a:p>
+            <a:pPr>
+              <a:defRPr sz="1000" b="1">
+                <a:solidFill>
+                  <a:srgbClr val="0284C7"/>
+                </a:solidFill>
+                <a:latin typeface="Calibri"/>
+              </a:defRPr>
+            </a:pPr>
+            <a:r>
+              <a:t>CLINICAL TEXT PARSING</a:t>
+            </a:r>
+          </a:p>
+          <a:p>
+            <a:pPr>
+              <a:spcBef>
+                <a:spcPts val="300"/>
+              </a:spcBef>
+              <a:defRPr sz="2400" b="1">
+                <a:solidFill>
+                  <a:srgbClr val="0F2942"/>
+                </a:solidFill>
+                <a:latin typeface="Calibri"/>
+              </a:defRPr>
+            </a:pPr>
+            <a:r>
+              <a:t>Person 2: Clinical NLP — Shorthand Expansion &amp; Clause-Level Negation</a:t>
+            </a:r>
+          </a:p>
+        </p:txBody>
+      </p:sp>
+      <p:sp>
+        <p:nvSpPr>
+          <p:cNvPr id="4" name="Rounded Rectangle 3"/>
+          <p:cNvSpPr/>
+          <p:nvPr/>
+        </p:nvSpPr>
+        <p:spPr>
+          <a:xfrm>
+            <a:off x="731520" y="1463040"/>
+            <a:ext cx="5212080" cy="4754880"/>
+          </a:xfrm>
+          <a:prstGeom prst="roundRect">
+            <a:avLst/>
+          </a:prstGeom>
+          <a:solidFill>
+            <a:srgbClr val="F8FAFC"/>
+          </a:solidFill>
+          <a:ln w="19050">
+            <a:solidFill>
+              <a:srgbClr val="0284C7"/>
+            </a:solidFill>
+          </a:ln>
+        </p:spPr>
+        <p:style>
+          <a:lnRef idx="1">
+            <a:schemeClr val="accent1"/>
+          </a:lnRef>
+          <a:fillRef idx="3">
+            <a:schemeClr val="accent1"/>
+          </a:fillRef>
+          <a:effectRef idx="2">
+            <a:schemeClr val="accent1"/>
+          </a:effectRef>
+          <a:fontRef idx="minor">
+            <a:schemeClr val="lt1"/>
+          </a:fontRef>
+        </p:style>
+        <p:txBody>
+          <a:bodyPr rtlCol="0" anchor="ctr" wrap="square"/>
+          <a:lstStyle/>
+          <a:p>
+            <a:pPr algn="ctr">
+              <a:defRPr sz="1500" b="1">
+                <a:solidFill>
+                  <a:srgbClr val="0284C7"/>
+                </a:solidFill>
+                <a:latin typeface="Calibri"/>
+              </a:defRPr>
+            </a:pPr>
+            <a:r>
+              <a:t>Deterministic Shorthand Expansion (CLINICAL_SHORTHANDS)</a:t>
             </a:r>
           </a:p>
           <a:p>
@@ -3174,31 +3656,3032 @@
               <a:spcBef>
                 <a:spcPts val="1200"/>
               </a:spcBef>
-              <a:defRPr sz="2400">
-                <a:solidFill>
-                  <a:srgbClr val="38BDF8"/>
-                </a:solidFill>
-                <a:latin typeface="Calibri"/>
-              </a:defRPr>
-            </a:pPr>
-            <a:r>
-              <a:t>System Architecture &amp; Clinical Decision Support Engineering</a:t>
+              <a:defRPr sz="1200">
+                <a:solidFill>
+                  <a:srgbClr val="334155"/>
+                </a:solidFill>
+                <a:latin typeface="Calibri"/>
+              </a:defRPr>
+            </a:pPr>
+            <a:r>
+              <a:t>• Rapid Expansion Dictionary in clinical_note_parser.py (&lt;1ms):</a:t>
+            </a:r>
+            <a:br/>
+            <a:r>
+              <a:t>  - SOB  -&gt; 'shortness of breath'</a:t>
+            </a:r>
+            <a:br/>
+            <a:r>
+              <a:t>  - DOE  -&gt; 'dyspnea on exertion'</a:t>
+            </a:r>
+            <a:br/>
+            <a:r>
+              <a:t>  - PMH  -&gt; 'past medical history'</a:t>
+            </a:r>
+            <a:br/>
+            <a:r>
+              <a:t>  - c/o  -&gt; 'complaining of'</a:t>
+            </a:r>
+            <a:br/>
+            <a:r>
+              <a:t>  - k/c/o -&gt; 'known case of'</a:t>
+            </a:r>
+            <a:br/>
+            <a:r>
+              <a:t>  - N/V  -&gt; 'nausea and vomiting'</a:t>
+            </a:r>
+            <a:br/>
+            <a:r>
+              <a:t>  - HTN  -&gt; 'hypertension'</a:t>
+            </a:r>
+            <a:br/>
+            <a:r>
+              <a:t>  - T2DM -&gt; 'type 2 diabetes mellitus'</a:t>
+            </a:r>
+            <a:br/>
+            <a:br/>
+            <a:r>
+              <a:t>• Eliminates NLP Ambiguity: Standardizes messy physician typing into canonical terms prior to entity linking.</a:t>
+            </a:r>
+          </a:p>
+        </p:txBody>
+      </p:sp>
+      <p:sp>
+        <p:nvSpPr>
+          <p:cNvPr id="5" name="Rounded Rectangle 4"/>
+          <p:cNvSpPr/>
+          <p:nvPr/>
+        </p:nvSpPr>
+        <p:spPr>
+          <a:xfrm>
+            <a:off x="6217920" y="1463040"/>
+            <a:ext cx="5212080" cy="4754880"/>
+          </a:xfrm>
+          <a:prstGeom prst="roundRect">
+            <a:avLst/>
+          </a:prstGeom>
+          <a:solidFill>
+            <a:srgbClr val="F8FAFC"/>
+          </a:solidFill>
+          <a:ln w="19050">
+            <a:solidFill>
+              <a:srgbClr val="8B5CF6"/>
+            </a:solidFill>
+          </a:ln>
+        </p:spPr>
+        <p:style>
+          <a:lnRef idx="1">
+            <a:schemeClr val="accent1"/>
+          </a:lnRef>
+          <a:fillRef idx="3">
+            <a:schemeClr val="accent1"/>
+          </a:fillRef>
+          <a:effectRef idx="2">
+            <a:schemeClr val="accent1"/>
+          </a:effectRef>
+          <a:fontRef idx="minor">
+            <a:schemeClr val="lt1"/>
+          </a:fontRef>
+        </p:style>
+        <p:txBody>
+          <a:bodyPr rtlCol="0" anchor="ctr" wrap="square"/>
+          <a:lstStyle/>
+          <a:p>
+            <a:pPr algn="ctr">
+              <a:defRPr sz="1500" b="1">
+                <a:solidFill>
+                  <a:srgbClr val="8B5CF6"/>
+                </a:solidFill>
+                <a:latin typeface="Calibri"/>
+              </a:defRPr>
+            </a:pPr>
+            <a:r>
+              <a:t>Clause-Level Negation Resolution (NEGATION_PATTERNS)</a:t>
             </a:r>
           </a:p>
           <a:p>
             <a:pPr>
               <a:spcBef>
-                <a:spcPts val="1800"/>
+                <a:spcPts val="1200"/>
               </a:spcBef>
-              <a:defRPr sz="1400">
-                <a:solidFill>
-                  <a:srgbClr val="94A3B8"/>
-                </a:solidFill>
-                <a:latin typeface="Calibri"/>
-              </a:defRPr>
-            </a:pPr>
-            <a:r>
-              <a:t>Neuro-Symbolic Architecture • Real-Time Ambient Voice • Deterministic Safety • Local GPU Inference</a:t>
+              <a:defRPr sz="1200">
+                <a:solidFill>
+                  <a:srgbClr val="334155"/>
+                </a:solidFill>
+                <a:latin typeface="Calibri"/>
+              </a:defRPr>
+            </a:pPr>
+            <a:r>
+              <a:t>• The Clinical Negation Challenge:</a:t>
+            </a:r>
+            <a:br/>
+            <a:r>
+              <a:t>  Raw keyword search misinterprets: 'Patient has productive cough; denies chest pain or shortness of breath' as positive for chest pain.</a:t>
+            </a:r>
+            <a:br/>
+            <a:br/>
+            <a:r>
+              <a:t>• DocAssistIQ Scope Resolution Algorithm:</a:t>
+            </a:r>
+            <a:br/>
+            <a:r>
+              <a:t>  1. Sentence &amp; Clause Boundary Splitting (periods, semicolons, conjunctions like 'but', 'however', 'denies').</a:t>
+            </a:r>
+            <a:br/>
+            <a:r>
+              <a:t>  2. Scopes negation triggers ('no', 'denies', 'negative for', 'ruled out', 'absence of') across 1 to 5 subsequent tokens.</a:t>
+            </a:r>
+            <a:br/>
+            <a:r>
+              <a:t>  3. Correctly categorizes findings into POSITIVE vs. NEGATED sets.</a:t>
+            </a:r>
+            <a:br/>
+            <a:r>
+              <a:t>  4. Negative findings actively apply mathematical penalties to competing candidate diseases.</a:t>
+            </a:r>
+          </a:p>
+        </p:txBody>
+      </p:sp>
+    </p:spTree>
+  </p:cSld>
+  <p:clrMapOvr>
+    <a:masterClrMapping/>
+  </p:clrMapOvr>
+</p:sld>
+</file>
+
+<file path=ppt/slides/slide11.xml><?xml version="1.0" encoding="utf-8"?>
+<p:sld xmlns:a="http://schemas.openxmlformats.org/drawingml/2006/main" xmlns:p="http://schemas.openxmlformats.org/presentationml/2006/main" xmlns:r="http://schemas.openxmlformats.org/officeDocument/2006/relationships">
+  <p:cSld>
+    <p:spTree>
+      <p:nvGrpSpPr>
+        <p:cNvPr id="1" name=""/>
+        <p:cNvGrpSpPr/>
+        <p:nvPr/>
+      </p:nvGrpSpPr>
+      <p:grpSpPr/>
+      <p:sp>
+        <p:nvSpPr>
+          <p:cNvPr id="2" name="Rectangle 1"/>
+          <p:cNvSpPr/>
+          <p:nvPr/>
+        </p:nvSpPr>
+        <p:spPr>
+          <a:xfrm>
+            <a:off x="0" y="0"/>
+            <a:ext cx="12191695" cy="6858000"/>
+          </a:xfrm>
+          <a:prstGeom prst="rect">
+            <a:avLst/>
+          </a:prstGeom>
+          <a:solidFill>
+            <a:srgbClr val="FFFFFF"/>
+          </a:solidFill>
+          <a:ln>
+            <a:noFill/>
+          </a:ln>
+        </p:spPr>
+        <p:style>
+          <a:lnRef idx="1">
+            <a:schemeClr val="accent1"/>
+          </a:lnRef>
+          <a:fillRef idx="3">
+            <a:schemeClr val="accent1"/>
+          </a:fillRef>
+          <a:effectRef idx="2">
+            <a:schemeClr val="accent1"/>
+          </a:effectRef>
+          <a:fontRef idx="minor">
+            <a:schemeClr val="lt1"/>
+          </a:fontRef>
+        </p:style>
+        <p:txBody>
+          <a:bodyPr rtlCol="0" anchor="ctr"/>
+          <a:lstStyle/>
+          <a:p>
+            <a:pPr algn="ctr"/>
+          </a:p>
+        </p:txBody>
+      </p:sp>
+      <p:sp>
+        <p:nvSpPr>
+          <p:cNvPr id="3" name="TextBox 2"/>
+          <p:cNvSpPr txBox="1"/>
+          <p:nvPr/>
+        </p:nvSpPr>
+        <p:spPr>
+          <a:xfrm>
+            <a:off x="731520" y="365760"/>
+            <a:ext cx="10728655" cy="822960"/>
+          </a:xfrm>
+          <a:prstGeom prst="rect">
+            <a:avLst/>
+          </a:prstGeom>
+          <a:noFill/>
+        </p:spPr>
+        <p:txBody>
+          <a:bodyPr wrap="square" lIns="0" tIns="0" rIns="0" bIns="0">
+            <a:spAutoFit/>
+          </a:bodyPr>
+          <a:lstStyle/>
+          <a:p>
+            <a:pPr>
+              <a:defRPr sz="1000" b="1">
+                <a:solidFill>
+                  <a:srgbClr val="0284C7"/>
+                </a:solidFill>
+                <a:latin typeface="Calibri"/>
+              </a:defRPr>
+            </a:pPr>
+            <a:r>
+              <a:t>STANDARDIZATION &amp; CLINICAL GOVERNANCE</a:t>
+            </a:r>
+          </a:p>
+          <a:p>
+            <a:pPr>
+              <a:spcBef>
+                <a:spcPts val="300"/>
+              </a:spcBef>
+              <a:defRPr sz="2400" b="1">
+                <a:solidFill>
+                  <a:srgbClr val="0F2942"/>
+                </a:solidFill>
+                <a:latin typeface="Calibri"/>
+              </a:defRPr>
+            </a:pPr>
+            <a:r>
+              <a:t>Person 2: Terminology Normalization &amp; The Patient Consent Gate</a:t>
+            </a:r>
+          </a:p>
+        </p:txBody>
+      </p:sp>
+      <p:sp>
+        <p:nvSpPr>
+          <p:cNvPr id="4" name="Rounded Rectangle 3"/>
+          <p:cNvSpPr/>
+          <p:nvPr/>
+        </p:nvSpPr>
+        <p:spPr>
+          <a:xfrm>
+            <a:off x="731520" y="1463040"/>
+            <a:ext cx="5212080" cy="4754880"/>
+          </a:xfrm>
+          <a:prstGeom prst="roundRect">
+            <a:avLst/>
+          </a:prstGeom>
+          <a:solidFill>
+            <a:srgbClr val="F8FAFC"/>
+          </a:solidFill>
+          <a:ln w="19050">
+            <a:solidFill>
+              <a:srgbClr val="0D9488"/>
+            </a:solidFill>
+          </a:ln>
+        </p:spPr>
+        <p:style>
+          <a:lnRef idx="1">
+            <a:schemeClr val="accent1"/>
+          </a:lnRef>
+          <a:fillRef idx="3">
+            <a:schemeClr val="accent1"/>
+          </a:fillRef>
+          <a:effectRef idx="2">
+            <a:schemeClr val="accent1"/>
+          </a:effectRef>
+          <a:fontRef idx="minor">
+            <a:schemeClr val="lt1"/>
+          </a:fontRef>
+        </p:style>
+        <p:txBody>
+          <a:bodyPr rtlCol="0" anchor="ctr" wrap="square"/>
+          <a:lstStyle/>
+          <a:p>
+            <a:pPr algn="ctr">
+              <a:defRPr sz="1500" b="1">
+                <a:solidFill>
+                  <a:srgbClr val="0D9488"/>
+                </a:solidFill>
+                <a:latin typeface="Calibri"/>
+              </a:defRPr>
+            </a:pPr>
+            <a:r>
+              <a:t>Concept Normalization (concept_normalizer.py)</a:t>
+            </a:r>
+          </a:p>
+          <a:p>
+            <a:pPr>
+              <a:spcBef>
+                <a:spcPts val="1200"/>
+              </a:spcBef>
+              <a:defRPr sz="1200">
+                <a:solidFill>
+                  <a:srgbClr val="334155"/>
+                </a:solidFill>
+                <a:latin typeface="Calibri"/>
+              </a:defRPr>
+            </a:pPr>
+            <a:r>
+              <a:t>• International Ontology Cross-Walking:</a:t>
+            </a:r>
+            <a:br/>
+            <a:r>
+              <a:t>  Maps unstructured phrases to standardized medical vocabularies:</a:t>
+            </a:r>
+            <a:br/>
+            <a:r>
+              <a:t>  - SNOMED CT: Clinical findings, symptoms, anatomical sites.</a:t>
+            </a:r>
+            <a:br/>
+            <a:r>
+              <a:t>  - RxNorm: Active ingredients, pharmaceutical forms, strengths.</a:t>
+            </a:r>
+            <a:br/>
+            <a:r>
+              <a:t>  - ICD-10-CM / ICD-11: Standard international billing and mortality codes.</a:t>
+            </a:r>
+            <a:br/>
+            <a:br/>
+            <a:r>
+              <a:t>• Hybrid Normalization Pipeline:</a:t>
+            </a:r>
+            <a:br/>
+            <a:r>
+              <a:t>  1. Exact string match against curated concept dictionary.</a:t>
+            </a:r>
+            <a:br/>
+            <a:r>
+              <a:t>  2. Jaro-Winkler &amp; Levenshtein phonetic/distance matching for spelling typos.</a:t>
+            </a:r>
+            <a:br/>
+            <a:r>
+              <a:t>  3. Semantic embedding nearest-neighbor lookup for complex clinical synonyms.</a:t>
+            </a:r>
+          </a:p>
+        </p:txBody>
+      </p:sp>
+      <p:sp>
+        <p:nvSpPr>
+          <p:cNvPr id="5" name="Rounded Rectangle 4"/>
+          <p:cNvSpPr/>
+          <p:nvPr/>
+        </p:nvSpPr>
+        <p:spPr>
+          <a:xfrm>
+            <a:off x="6217920" y="1463040"/>
+            <a:ext cx="5212080" cy="4754880"/>
+          </a:xfrm>
+          <a:prstGeom prst="roundRect">
+            <a:avLst/>
+          </a:prstGeom>
+          <a:solidFill>
+            <a:srgbClr val="F8FAFC"/>
+          </a:solidFill>
+          <a:ln w="19050">
+            <a:solidFill>
+              <a:srgbClr val="E11D48"/>
+            </a:solidFill>
+          </a:ln>
+        </p:spPr>
+        <p:style>
+          <a:lnRef idx="1">
+            <a:schemeClr val="accent1"/>
+          </a:lnRef>
+          <a:fillRef idx="3">
+            <a:schemeClr val="accent1"/>
+          </a:fillRef>
+          <a:effectRef idx="2">
+            <a:schemeClr val="accent1"/>
+          </a:effectRef>
+          <a:fontRef idx="minor">
+            <a:schemeClr val="lt1"/>
+          </a:fontRef>
+        </p:style>
+        <p:txBody>
+          <a:bodyPr rtlCol="0" anchor="ctr" wrap="square"/>
+          <a:lstStyle/>
+          <a:p>
+            <a:pPr algn="ctr">
+              <a:defRPr sz="1500" b="1">
+                <a:solidFill>
+                  <a:srgbClr val="E11D48"/>
+                </a:solidFill>
+                <a:latin typeface="Calibri"/>
+              </a:defRPr>
+            </a:pPr>
+            <a:r>
+              <a:t>Mandatory Patient Consent Gate (consent.py)</a:t>
+            </a:r>
+          </a:p>
+          <a:p>
+            <a:pPr>
+              <a:spcBef>
+                <a:spcPts val="1200"/>
+              </a:spcBef>
+              <a:defRPr sz="1200">
+                <a:solidFill>
+                  <a:srgbClr val="334155"/>
+                </a:solidFill>
+                <a:latin typeface="Calibri"/>
+              </a:defRPr>
+            </a:pPr>
+            <a:r>
+              <a:t>• Ethical &amp; Legal Non-Negotiable Gate:</a:t>
+            </a:r>
+            <a:br/>
+            <a:r>
+              <a:t>  Consultation audio capture and clinical parsing are strictly blocked at the API middleware level until explicit patient consent is recorded.</a:t>
+            </a:r>
+            <a:br/>
+            <a:br/>
+            <a:r>
+              <a:t>• Audit Trail Recording (ConsentRecord Table):</a:t>
+            </a:r>
+            <a:br/>
+            <a:r>
+              <a:t>  - Stores consent type (Explicit Verbal, Written, Emergency Override).</a:t>
+            </a:r>
+            <a:br/>
+            <a:r>
+              <a:t>  - Captures clinician ID, patient session token, and ISO-8601 UTC timestamp.</a:t>
+            </a:r>
+            <a:br/>
+            <a:r>
+              <a:t>  - Cryptographically chained into the final consultation audit ledger.</a:t>
+            </a:r>
+            <a:br/>
+            <a:br/>
+            <a:r>
+              <a:t>• Emergency Exception Handling:</a:t>
+            </a:r>
+            <a:br/>
+            <a:r>
+              <a:t>  In life-threatening trauma/unconscious patients, attending clinicians can toggle Emergency Override with mandatory justification logging.</a:t>
+            </a:r>
+          </a:p>
+        </p:txBody>
+      </p:sp>
+    </p:spTree>
+  </p:cSld>
+  <p:clrMapOvr>
+    <a:masterClrMapping/>
+  </p:clrMapOvr>
+</p:sld>
+</file>
+
+<file path=ppt/slides/slide12.xml><?xml version="1.0" encoding="utf-8"?>
+<p:sld xmlns:a="http://schemas.openxmlformats.org/drawingml/2006/main" xmlns:p="http://schemas.openxmlformats.org/presentationml/2006/main" xmlns:r="http://schemas.openxmlformats.org/officeDocument/2006/relationships">
+  <p:cSld>
+    <p:spTree>
+      <p:nvGrpSpPr>
+        <p:cNvPr id="1" name=""/>
+        <p:cNvGrpSpPr/>
+        <p:nvPr/>
+      </p:nvGrpSpPr>
+      <p:grpSpPr/>
+      <p:sp>
+        <p:nvSpPr>
+          <p:cNvPr id="2" name="Rectangle 1"/>
+          <p:cNvSpPr/>
+          <p:nvPr/>
+        </p:nvSpPr>
+        <p:spPr>
+          <a:xfrm>
+            <a:off x="0" y="0"/>
+            <a:ext cx="12191695" cy="6858000"/>
+          </a:xfrm>
+          <a:prstGeom prst="rect">
+            <a:avLst/>
+          </a:prstGeom>
+          <a:solidFill>
+            <a:srgbClr val="FFFFFF"/>
+          </a:solidFill>
+          <a:ln>
+            <a:noFill/>
+          </a:ln>
+        </p:spPr>
+        <p:style>
+          <a:lnRef idx="1">
+            <a:schemeClr val="accent1"/>
+          </a:lnRef>
+          <a:fillRef idx="3">
+            <a:schemeClr val="accent1"/>
+          </a:fillRef>
+          <a:effectRef idx="2">
+            <a:schemeClr val="accent1"/>
+          </a:effectRef>
+          <a:fontRef idx="minor">
+            <a:schemeClr val="lt1"/>
+          </a:fontRef>
+        </p:style>
+        <p:txBody>
+          <a:bodyPr rtlCol="0" anchor="ctr"/>
+          <a:lstStyle/>
+          <a:p>
+            <a:pPr algn="ctr"/>
+          </a:p>
+        </p:txBody>
+      </p:sp>
+      <p:sp>
+        <p:nvSpPr>
+          <p:cNvPr id="3" name="TextBox 2"/>
+          <p:cNvSpPr txBox="1"/>
+          <p:nvPr/>
+        </p:nvSpPr>
+        <p:spPr>
+          <a:xfrm>
+            <a:off x="731520" y="365760"/>
+            <a:ext cx="10728655" cy="822960"/>
+          </a:xfrm>
+          <a:prstGeom prst="rect">
+            <a:avLst/>
+          </a:prstGeom>
+          <a:noFill/>
+        </p:spPr>
+        <p:txBody>
+          <a:bodyPr wrap="square" lIns="0" tIns="0" rIns="0" bIns="0">
+            <a:spAutoFit/>
+          </a:bodyPr>
+          <a:lstStyle/>
+          <a:p>
+            <a:pPr>
+              <a:defRPr sz="1000" b="1">
+                <a:solidFill>
+                  <a:srgbClr val="0284C7"/>
+                </a:solidFill>
+                <a:latin typeface="Calibri"/>
+              </a:defRPr>
+            </a:pPr>
+            <a:r>
+              <a:t>MATHEMATICAL DIAGNOSTIC INTELLIGENCE</a:t>
+            </a:r>
+          </a:p>
+          <a:p>
+            <a:pPr>
+              <a:spcBef>
+                <a:spcPts val="300"/>
+              </a:spcBef>
+              <a:defRPr sz="2400" b="1">
+                <a:solidFill>
+                  <a:srgbClr val="0F2942"/>
+                </a:solidFill>
+                <a:latin typeface="Calibri"/>
+              </a:defRPr>
+            </a:pPr>
+            <a:r>
+              <a:t>Person 3: Deterministic Diagnostic Scoring Formulation</a:t>
+            </a:r>
+          </a:p>
+        </p:txBody>
+      </p:sp>
+      <p:sp>
+        <p:nvSpPr>
+          <p:cNvPr id="4" name="Rounded Rectangle 3"/>
+          <p:cNvSpPr/>
+          <p:nvPr/>
+        </p:nvSpPr>
+        <p:spPr>
+          <a:xfrm>
+            <a:off x="731520" y="1463040"/>
+            <a:ext cx="10728655" cy="4754880"/>
+          </a:xfrm>
+          <a:prstGeom prst="roundRect">
+            <a:avLst/>
+          </a:prstGeom>
+          <a:solidFill>
+            <a:srgbClr val="F8FAFC"/>
+          </a:solidFill>
+          <a:ln w="25400">
+            <a:solidFill>
+              <a:srgbClr val="0284C7"/>
+            </a:solidFill>
+          </a:ln>
+        </p:spPr>
+        <p:style>
+          <a:lnRef idx="1">
+            <a:schemeClr val="accent1"/>
+          </a:lnRef>
+          <a:fillRef idx="3">
+            <a:schemeClr val="accent1"/>
+          </a:fillRef>
+          <a:effectRef idx="2">
+            <a:schemeClr val="accent1"/>
+          </a:effectRef>
+          <a:fontRef idx="minor">
+            <a:schemeClr val="lt1"/>
+          </a:fontRef>
+        </p:style>
+        <p:txBody>
+          <a:bodyPr rtlCol="0" anchor="ctr" wrap="square"/>
+          <a:lstStyle/>
+          <a:p>
+            <a:pPr algn="ctr">
+              <a:defRPr sz="1600" b="1">
+                <a:solidFill>
+                  <a:srgbClr val="0284C7"/>
+                </a:solidFill>
+                <a:latin typeface="Calibri"/>
+              </a:defRPr>
+            </a:pPr>
+            <a:r>
+              <a:t>The Multi-Factor Candidate Ranking Formulation (clinical_reasoning_engine.py)</a:t>
+            </a:r>
+          </a:p>
+          <a:p>
+            <a:pPr>
+              <a:spcBef>
+                <a:spcPts val="800"/>
+              </a:spcBef>
+              <a:defRPr sz="1500" b="1">
+                <a:solidFill>
+                  <a:srgbClr val="0F2942"/>
+                </a:solidFill>
+                <a:latin typeface="Consolas"/>
+              </a:defRPr>
+            </a:pPr>
+            <a:r>
+              <a:t>Score(d) = w_1·Prior(d) + w_2·Jaccard_weighted(S_patient, S_d) + w_3·RedFlag(d) - w_4·Penalty(d)</a:t>
+            </a:r>
+          </a:p>
+          <a:p>
+            <a:pPr>
+              <a:spcBef>
+                <a:spcPts val="1200"/>
+              </a:spcBef>
+              <a:defRPr sz="1200">
+                <a:solidFill>
+                  <a:srgbClr val="334155"/>
+                </a:solidFill>
+                <a:latin typeface="Calibri"/>
+              </a:defRPr>
+            </a:pPr>
+            <a:r>
+              <a:t>1. Bayesian Disease Prior [w_1 · Prior(d)]:</a:t>
+            </a:r>
+            <a:br/>
+            <a:r>
+              <a:t>   Base epidemiological incidence dynamically adjusted by patient age, sex, and geographic location.</a:t>
+            </a:r>
+            <a:br/>
+            <a:br/>
+            <a:r>
+              <a:t>2. Weighted Jaccard Overlap [w_2 · Jaccard_weighted]:</a:t>
+            </a:r>
+            <a:br/>
+            <a:r>
+              <a:t>   Calculates ratio of symptom intersections. Pathognomonic hallmark signs (e.g., Kayser-Fleischer rings in Wilson's, Janeway lesions in Endocarditis) carry 3x to 5x weights over non-specific symptoms (fever, fatigue).</a:t>
+            </a:r>
+            <a:br/>
+            <a:br/>
+            <a:r>
+              <a:t>3. Red-Flag &amp; Cluster Multiplier [w_3 · RedFlag(d)]:</a:t>
+            </a:r>
+            <a:br/>
+            <a:r>
+              <a:t>   Elevates acute life-threatening surgical emergencies and multi-system triads (fever + jaundice + acute hemorrhage).</a:t>
+            </a:r>
+            <a:br/>
+            <a:br/>
+            <a:r>
+              <a:t>4. Contraindication &amp; Negation Demotion [- w_4 · Penalty(d)]:</a:t>
+            </a:r>
+            <a:br/>
+            <a:r>
+              <a:t>   Subtracts mathematical penalty if the patient explicitly denies a hallmark sign (e.g., patient denies cough demotes Pneumonia).</a:t>
+            </a:r>
+          </a:p>
+        </p:txBody>
+      </p:sp>
+    </p:spTree>
+  </p:cSld>
+  <p:clrMapOvr>
+    <a:masterClrMapping/>
+  </p:clrMapOvr>
+</p:sld>
+</file>
+
+<file path=ppt/slides/slide13.xml><?xml version="1.0" encoding="utf-8"?>
+<p:sld xmlns:a="http://schemas.openxmlformats.org/drawingml/2006/main" xmlns:p="http://schemas.openxmlformats.org/presentationml/2006/main" xmlns:r="http://schemas.openxmlformats.org/officeDocument/2006/relationships">
+  <p:cSld>
+    <p:spTree>
+      <p:nvGrpSpPr>
+        <p:cNvPr id="1" name=""/>
+        <p:cNvGrpSpPr/>
+        <p:nvPr/>
+      </p:nvGrpSpPr>
+      <p:grpSpPr/>
+      <p:sp>
+        <p:nvSpPr>
+          <p:cNvPr id="2" name="Rectangle 1"/>
+          <p:cNvSpPr/>
+          <p:nvPr/>
+        </p:nvSpPr>
+        <p:spPr>
+          <a:xfrm>
+            <a:off x="0" y="0"/>
+            <a:ext cx="12191695" cy="6858000"/>
+          </a:xfrm>
+          <a:prstGeom prst="rect">
+            <a:avLst/>
+          </a:prstGeom>
+          <a:solidFill>
+            <a:srgbClr val="FFFFFF"/>
+          </a:solidFill>
+          <a:ln>
+            <a:noFill/>
+          </a:ln>
+        </p:spPr>
+        <p:style>
+          <a:lnRef idx="1">
+            <a:schemeClr val="accent1"/>
+          </a:lnRef>
+          <a:fillRef idx="3">
+            <a:schemeClr val="accent1"/>
+          </a:fillRef>
+          <a:effectRef idx="2">
+            <a:schemeClr val="accent1"/>
+          </a:effectRef>
+          <a:fontRef idx="minor">
+            <a:schemeClr val="lt1"/>
+          </a:fontRef>
+        </p:style>
+        <p:txBody>
+          <a:bodyPr rtlCol="0" anchor="ctr"/>
+          <a:lstStyle/>
+          <a:p>
+            <a:pPr algn="ctr"/>
+          </a:p>
+        </p:txBody>
+      </p:sp>
+      <p:sp>
+        <p:nvSpPr>
+          <p:cNvPr id="3" name="TextBox 2"/>
+          <p:cNvSpPr txBox="1"/>
+          <p:nvPr/>
+        </p:nvSpPr>
+        <p:spPr>
+          <a:xfrm>
+            <a:off x="731520" y="365760"/>
+            <a:ext cx="10728655" cy="822960"/>
+          </a:xfrm>
+          <a:prstGeom prst="rect">
+            <a:avLst/>
+          </a:prstGeom>
+          <a:noFill/>
+        </p:spPr>
+        <p:txBody>
+          <a:bodyPr wrap="square" lIns="0" tIns="0" rIns="0" bIns="0">
+            <a:spAutoFit/>
+          </a:bodyPr>
+          <a:lstStyle/>
+          <a:p>
+            <a:pPr>
+              <a:defRPr sz="1000" b="1">
+                <a:solidFill>
+                  <a:srgbClr val="0284C7"/>
+                </a:solidFill>
+                <a:latin typeface="Calibri"/>
+              </a:defRPr>
+            </a:pPr>
+            <a:r>
+              <a:t>KNOWLEDGE GENERALIZATION</a:t>
+            </a:r>
+          </a:p>
+          <a:p>
+            <a:pPr>
+              <a:spcBef>
+                <a:spcPts val="300"/>
+              </a:spcBef>
+              <a:defRPr sz="2400" b="1">
+                <a:solidFill>
+                  <a:srgbClr val="0F2942"/>
+                </a:solidFill>
+                <a:latin typeface="Calibri"/>
+              </a:defRPr>
+            </a:pPr>
+            <a:r>
+              <a:t>Person 3: Open-Domain Medical Engine (1,500+ Conditions &amp; Rare Diseases)</a:t>
+            </a:r>
+          </a:p>
+        </p:txBody>
+      </p:sp>
+      <p:sp>
+        <p:nvSpPr>
+          <p:cNvPr id="4" name="Rounded Rectangle 3"/>
+          <p:cNvSpPr/>
+          <p:nvPr/>
+        </p:nvSpPr>
+        <p:spPr>
+          <a:xfrm>
+            <a:off x="731520" y="1463040"/>
+            <a:ext cx="5212080" cy="4754880"/>
+          </a:xfrm>
+          <a:prstGeom prst="roundRect">
+            <a:avLst/>
+          </a:prstGeom>
+          <a:solidFill>
+            <a:srgbClr val="F8FAFC"/>
+          </a:solidFill>
+          <a:ln w="19050">
+            <a:solidFill>
+              <a:srgbClr val="0D9488"/>
+            </a:solidFill>
+          </a:ln>
+        </p:spPr>
+        <p:style>
+          <a:lnRef idx="1">
+            <a:schemeClr val="accent1"/>
+          </a:lnRef>
+          <a:fillRef idx="3">
+            <a:schemeClr val="accent1"/>
+          </a:fillRef>
+          <a:effectRef idx="2">
+            <a:schemeClr val="accent1"/>
+          </a:effectRef>
+          <a:fontRef idx="minor">
+            <a:schemeClr val="lt1"/>
+          </a:fontRef>
+        </p:style>
+        <p:txBody>
+          <a:bodyPr rtlCol="0" anchor="ctr" wrap="square"/>
+          <a:lstStyle/>
+          <a:p>
+            <a:pPr algn="ctr">
+              <a:defRPr sz="1500" b="1">
+                <a:solidFill>
+                  <a:srgbClr val="0D9488"/>
+                </a:solidFill>
+                <a:latin typeface="Calibri"/>
+              </a:defRPr>
+            </a:pPr>
+            <a:r>
+              <a:t>Overcoming Closed-World AI Limitations</a:t>
+            </a:r>
+          </a:p>
+          <a:p>
+            <a:pPr>
+              <a:spcBef>
+                <a:spcPts val="1200"/>
+              </a:spcBef>
+              <a:defRPr sz="1200">
+                <a:solidFill>
+                  <a:srgbClr val="334155"/>
+                </a:solidFill>
+                <a:latin typeface="Calibri"/>
+              </a:defRPr>
+            </a:pPr>
+            <a:r>
+              <a:t>• The Closed-World Problem: Typical medical models know only 50 to 100 textbook conditions, failing completely when faced with complex or rare diseases.</a:t>
+            </a:r>
+            <a:br/>
+            <a:br/>
+            <a:r>
+              <a:t>• 1,500+ Indexed Clinical Entities: Extensively covers metabolic, genetic, neurodegenerative, and autoimmune conditions.</a:t>
+            </a:r>
+            <a:br/>
+            <a:br/>
+            <a:r>
+              <a:t>• Built-In Rare Disease Coverage:</a:t>
+            </a:r>
+            <a:br/>
+            <a:r>
+              <a:t>  - Wilson's Disease: ATP7B mutation, copper toxic accumulation, Kayser-Fleischer rings, low ceruloplasmin.</a:t>
+            </a:r>
+            <a:br/>
+            <a:r>
+              <a:t>  - Friedreich's Ataxia: FXN GAA trinucleotide repeat, sensory neuropathy, hypertrophic cardiomyopathy.</a:t>
+            </a:r>
+            <a:br/>
+            <a:r>
+              <a:t>  - Ataxia-Telangiectasia: ATM mutation, progressive cerebellar ataxia, oculocutaneous telangiectasia, immunodeficiency.</a:t>
+            </a:r>
+          </a:p>
+        </p:txBody>
+      </p:sp>
+      <p:sp>
+        <p:nvSpPr>
+          <p:cNvPr id="5" name="Rounded Rectangle 4"/>
+          <p:cNvSpPr/>
+          <p:nvPr/>
+        </p:nvSpPr>
+        <p:spPr>
+          <a:xfrm>
+            <a:off x="6217920" y="1463040"/>
+            <a:ext cx="5212080" cy="4754880"/>
+          </a:xfrm>
+          <a:prstGeom prst="roundRect">
+            <a:avLst/>
+          </a:prstGeom>
+          <a:solidFill>
+            <a:srgbClr val="F8FAFC"/>
+          </a:solidFill>
+          <a:ln w="19050">
+            <a:solidFill>
+              <a:srgbClr val="0284C7"/>
+            </a:solidFill>
+          </a:ln>
+        </p:spPr>
+        <p:style>
+          <a:lnRef idx="1">
+            <a:schemeClr val="accent1"/>
+          </a:lnRef>
+          <a:fillRef idx="3">
+            <a:schemeClr val="accent1"/>
+          </a:fillRef>
+          <a:effectRef idx="2">
+            <a:schemeClr val="accent1"/>
+          </a:effectRef>
+          <a:fontRef idx="minor">
+            <a:schemeClr val="lt1"/>
+          </a:fontRef>
+        </p:style>
+        <p:txBody>
+          <a:bodyPr rtlCol="0" anchor="ctr" wrap="square"/>
+          <a:lstStyle/>
+          <a:p>
+            <a:pPr algn="ctr">
+              <a:defRPr sz="1500" b="1">
+                <a:solidFill>
+                  <a:srgbClr val="0284C7"/>
+                </a:solidFill>
+                <a:latin typeface="Calibri"/>
+              </a:defRPr>
+            </a:pPr>
+            <a:r>
+              <a:t>Tri-Source Live Fallback Resolution Pipeline</a:t>
+            </a:r>
+          </a:p>
+          <a:p>
+            <a:pPr>
+              <a:spcBef>
+                <a:spcPts val="1200"/>
+              </a:spcBef>
+              <a:defRPr sz="1200">
+                <a:solidFill>
+                  <a:srgbClr val="334155"/>
+                </a:solidFill>
+                <a:latin typeface="Calibri"/>
+              </a:defRPr>
+            </a:pPr>
+            <a:r>
+              <a:t>• Dynamic External Discovery for Out-of-Catalog Queries:</a:t>
+            </a:r>
+            <a:br/>
+            <a:r>
+              <a:t>  1. Local Knowledge Graph (Master catalog of 1,500+ conditions).</a:t>
+            </a:r>
+            <a:br/>
+            <a:r>
+              <a:t>  2. NIH NLM ClinicalTables API: Live lookup over 100,000+ conditions and ICD-10-CM codes with 2.0s timeout.</a:t>
+            </a:r>
+            <a:br/>
+            <a:r>
+              <a:t>  3. OpenFDA Drug &amp; Indications API: Live resolution of drug indications, boxed warnings, and adverse profiles.</a:t>
+            </a:r>
+            <a:br/>
+            <a:br/>
+            <a:r>
+              <a:t>• In-Memory Thread-Safe Cache (_LIVE_RESOLVED_CACHE):</a:t>
+            </a:r>
+            <a:br/>
+            <a:r>
+              <a:t>  Successfully resolved external conditions are cached in memory with LRU eviction, reducing subsequent query latency to &lt; 1 ms.</a:t>
+            </a:r>
+          </a:p>
+        </p:txBody>
+      </p:sp>
+    </p:spTree>
+  </p:cSld>
+  <p:clrMapOvr>
+    <a:masterClrMapping/>
+  </p:clrMapOvr>
+</p:sld>
+</file>
+
+<file path=ppt/slides/slide14.xml><?xml version="1.0" encoding="utf-8"?>
+<p:sld xmlns:a="http://schemas.openxmlformats.org/drawingml/2006/main" xmlns:p="http://schemas.openxmlformats.org/presentationml/2006/main" xmlns:r="http://schemas.openxmlformats.org/officeDocument/2006/relationships">
+  <p:cSld>
+    <p:spTree>
+      <p:nvGrpSpPr>
+        <p:cNvPr id="1" name=""/>
+        <p:cNvGrpSpPr/>
+        <p:nvPr/>
+      </p:nvGrpSpPr>
+      <p:grpSpPr/>
+      <p:sp>
+        <p:nvSpPr>
+          <p:cNvPr id="2" name="Rectangle 1"/>
+          <p:cNvSpPr/>
+          <p:nvPr/>
+        </p:nvSpPr>
+        <p:spPr>
+          <a:xfrm>
+            <a:off x="0" y="0"/>
+            <a:ext cx="12191695" cy="6858000"/>
+          </a:xfrm>
+          <a:prstGeom prst="rect">
+            <a:avLst/>
+          </a:prstGeom>
+          <a:solidFill>
+            <a:srgbClr val="FFFFFF"/>
+          </a:solidFill>
+          <a:ln>
+            <a:noFill/>
+          </a:ln>
+        </p:spPr>
+        <p:style>
+          <a:lnRef idx="1">
+            <a:schemeClr val="accent1"/>
+          </a:lnRef>
+          <a:fillRef idx="3">
+            <a:schemeClr val="accent1"/>
+          </a:fillRef>
+          <a:effectRef idx="2">
+            <a:schemeClr val="accent1"/>
+          </a:effectRef>
+          <a:fontRef idx="minor">
+            <a:schemeClr val="lt1"/>
+          </a:fontRef>
+        </p:style>
+        <p:txBody>
+          <a:bodyPr rtlCol="0" anchor="ctr"/>
+          <a:lstStyle/>
+          <a:p>
+            <a:pPr algn="ctr"/>
+          </a:p>
+        </p:txBody>
+      </p:sp>
+      <p:sp>
+        <p:nvSpPr>
+          <p:cNvPr id="3" name="TextBox 2"/>
+          <p:cNvSpPr txBox="1"/>
+          <p:nvPr/>
+        </p:nvSpPr>
+        <p:spPr>
+          <a:xfrm>
+            <a:off x="731520" y="365760"/>
+            <a:ext cx="10728655" cy="822960"/>
+          </a:xfrm>
+          <a:prstGeom prst="rect">
+            <a:avLst/>
+          </a:prstGeom>
+          <a:noFill/>
+        </p:spPr>
+        <p:txBody>
+          <a:bodyPr wrap="square" lIns="0" tIns="0" rIns="0" bIns="0">
+            <a:spAutoFit/>
+          </a:bodyPr>
+          <a:lstStyle/>
+          <a:p>
+            <a:pPr>
+              <a:defRPr sz="1000" b="1">
+                <a:solidFill>
+                  <a:srgbClr val="0284C7"/>
+                </a:solidFill>
+                <a:latin typeface="Calibri"/>
+              </a:defRPr>
+            </a:pPr>
+            <a:r>
+              <a:t>EPIDEMIOLOGICAL INTELLIGENCE</a:t>
+            </a:r>
+          </a:p>
+          <a:p>
+            <a:pPr>
+              <a:spcBef>
+                <a:spcPts val="300"/>
+              </a:spcBef>
+              <a:defRPr sz="2400" b="1">
+                <a:solidFill>
+                  <a:srgbClr val="0F2942"/>
+                </a:solidFill>
+                <a:latin typeface="Calibri"/>
+              </a:defRPr>
+            </a:pPr>
+            <a:r>
+              <a:t>Person 3: India Outbreak Surveillance Radar (28 States &amp; 8 UTs)</a:t>
+            </a:r>
+          </a:p>
+        </p:txBody>
+      </p:sp>
+      <p:sp>
+        <p:nvSpPr>
+          <p:cNvPr id="4" name="Rounded Rectangle 3"/>
+          <p:cNvSpPr/>
+          <p:nvPr/>
+        </p:nvSpPr>
+        <p:spPr>
+          <a:xfrm>
+            <a:off x="731520" y="1463040"/>
+            <a:ext cx="3474720" cy="4754880"/>
+          </a:xfrm>
+          <a:prstGeom prst="roundRect">
+            <a:avLst/>
+          </a:prstGeom>
+          <a:solidFill>
+            <a:srgbClr val="F8FAFC"/>
+          </a:solidFill>
+          <a:ln w="19050">
+            <a:solidFill>
+              <a:srgbClr val="8B5CF6"/>
+            </a:solidFill>
+          </a:ln>
+        </p:spPr>
+        <p:style>
+          <a:lnRef idx="1">
+            <a:schemeClr val="accent1"/>
+          </a:lnRef>
+          <a:fillRef idx="3">
+            <a:schemeClr val="accent1"/>
+          </a:fillRef>
+          <a:effectRef idx="2">
+            <a:schemeClr val="accent1"/>
+          </a:effectRef>
+          <a:fontRef idx="minor">
+            <a:schemeClr val="lt1"/>
+          </a:fontRef>
+        </p:style>
+        <p:txBody>
+          <a:bodyPr rtlCol="0" anchor="ctr" wrap="square"/>
+          <a:lstStyle/>
+          <a:p>
+            <a:pPr algn="ctr">
+              <a:defRPr sz="1500" b="1">
+                <a:solidFill>
+                  <a:srgbClr val="8B5CF6"/>
+                </a:solidFill>
+                <a:latin typeface="Calibri"/>
+              </a:defRPr>
+            </a:pPr>
+            <a:r>
+              <a:t>Regional Disease Vectors</a:t>
+            </a:r>
+          </a:p>
+          <a:p>
+            <a:pPr>
+              <a:spcBef>
+                <a:spcPts val="1200"/>
+              </a:spcBef>
+              <a:defRPr sz="1150">
+                <a:solidFill>
+                  <a:srgbClr val="334155"/>
+                </a:solidFill>
+                <a:latin typeface="Calibri"/>
+              </a:defRPr>
+            </a:pPr>
+            <a:r>
+              <a:t>• Kerala: Nipah Virus (Pteropus fruit bat vector), Leptospirosis (Weil's disease post-monsoon), KFD in border districts.</a:t>
+            </a:r>
+            <a:br/>
+            <a:br/>
+            <a:r>
+              <a:t>• Karnataka: Kyasanur Forest Disease (KFD / Flavivirus tick vector in Western Ghats), Dengue, Chikungunya.</a:t>
+            </a:r>
+            <a:br/>
+            <a:br/>
+            <a:r>
+              <a:t>• Gujarat: Chandipura Vesiculovirus (rapid pediatric encephalitis via sandflies), Crimean-Congo Hemorrhagic Fever.</a:t>
+            </a:r>
+            <a:br/>
+            <a:br/>
+            <a:r>
+              <a:t>• Maharashtra: Urban Leptospirosis during monsoon waterlogging, H1N1 Influenza.</a:t>
+            </a:r>
+            <a:br/>
+            <a:br/>
+            <a:r>
+              <a:t>• Himachal / Uttarakhand: Scrub Typhus (Orientia tsutsugamushi via chigger mites).</a:t>
+            </a:r>
+          </a:p>
+        </p:txBody>
+      </p:sp>
+      <p:sp>
+        <p:nvSpPr>
+          <p:cNvPr id="5" name="Rounded Rectangle 4"/>
+          <p:cNvSpPr/>
+          <p:nvPr/>
+        </p:nvSpPr>
+        <p:spPr>
+          <a:xfrm>
+            <a:off x="4343400" y="1463040"/>
+            <a:ext cx="3474720" cy="4754880"/>
+          </a:xfrm>
+          <a:prstGeom prst="roundRect">
+            <a:avLst/>
+          </a:prstGeom>
+          <a:solidFill>
+            <a:srgbClr val="F8FAFC"/>
+          </a:solidFill>
+          <a:ln w="19050">
+            <a:solidFill>
+              <a:srgbClr val="0284C7"/>
+            </a:solidFill>
+          </a:ln>
+        </p:spPr>
+        <p:style>
+          <a:lnRef idx="1">
+            <a:schemeClr val="accent1"/>
+          </a:lnRef>
+          <a:fillRef idx="3">
+            <a:schemeClr val="accent1"/>
+          </a:fillRef>
+          <a:effectRef idx="2">
+            <a:schemeClr val="accent1"/>
+          </a:effectRef>
+          <a:fontRef idx="minor">
+            <a:schemeClr val="lt1"/>
+          </a:fontRef>
+        </p:style>
+        <p:txBody>
+          <a:bodyPr rtlCol="0" anchor="ctr" wrap="square"/>
+          <a:lstStyle/>
+          <a:p>
+            <a:pPr algn="ctr">
+              <a:defRPr sz="1500" b="1">
+                <a:solidFill>
+                  <a:srgbClr val="0284C7"/>
+                </a:solidFill>
+                <a:latin typeface="Calibri"/>
+              </a:defRPr>
+            </a:pPr>
+            <a:r>
+              <a:t>Bayesian Prior Boosting</a:t>
+            </a:r>
+          </a:p>
+          <a:p>
+            <a:pPr>
+              <a:spcBef>
+                <a:spcPts val="1200"/>
+              </a:spcBef>
+              <a:defRPr sz="1150">
+                <a:solidFill>
+                  <a:srgbClr val="334155"/>
+                </a:solidFill>
+                <a:latin typeface="Calibri"/>
+              </a:defRPr>
+            </a:pPr>
+            <a:r>
+              <a:t>• Geo-Location Multiplier:</a:t>
+            </a:r>
+            <a:br/>
+            <a:r>
+              <a:t>  Prior_adjusted(d) = Prior_base(d) * Outbreak_multiplier(state, season)</a:t>
+            </a:r>
+            <a:br/>
+            <a:br/>
+            <a:r>
+              <a:t>• NCDC &amp; IDSP Modeling:</a:t>
+            </a:r>
+            <a:br/>
+            <a:r>
+              <a:t>  Incorporates weekly syndromic surveillance bulletins from the National Centre for Disease Control (NCDC) and Integrated Disease Surveillance Programme (IDSP).</a:t>
+            </a:r>
+            <a:br/>
+            <a:br/>
+            <a:r>
+              <a:t>• Prevents Tropical Misses:</a:t>
+            </a:r>
+            <a:br/>
+            <a:r>
+              <a:t>  Elevates regional hemorrhagic fevers and encephalitides that Western medical algorithms routinely miss.</a:t>
+            </a:r>
+          </a:p>
+        </p:txBody>
+      </p:sp>
+      <p:sp>
+        <p:nvSpPr>
+          <p:cNvPr id="6" name="Rounded Rectangle 5"/>
+          <p:cNvSpPr/>
+          <p:nvPr/>
+        </p:nvSpPr>
+        <p:spPr>
+          <a:xfrm>
+            <a:off x="7955280" y="1463040"/>
+            <a:ext cx="3474720" cy="4754880"/>
+          </a:xfrm>
+          <a:prstGeom prst="roundRect">
+            <a:avLst/>
+          </a:prstGeom>
+          <a:solidFill>
+            <a:srgbClr val="F8FAFC"/>
+          </a:solidFill>
+          <a:ln w="19050">
+            <a:solidFill>
+              <a:srgbClr val="10B981"/>
+            </a:solidFill>
+          </a:ln>
+        </p:spPr>
+        <p:style>
+          <a:lnRef idx="1">
+            <a:schemeClr val="accent1"/>
+          </a:lnRef>
+          <a:fillRef idx="3">
+            <a:schemeClr val="accent1"/>
+          </a:fillRef>
+          <a:effectRef idx="2">
+            <a:schemeClr val="accent1"/>
+          </a:effectRef>
+          <a:fontRef idx="minor">
+            <a:schemeClr val="lt1"/>
+          </a:fontRef>
+        </p:style>
+        <p:txBody>
+          <a:bodyPr rtlCol="0" anchor="ctr" wrap="square"/>
+          <a:lstStyle/>
+          <a:p>
+            <a:pPr algn="ctr">
+              <a:defRPr sz="1500" b="1">
+                <a:solidFill>
+                  <a:srgbClr val="10B981"/>
+                </a:solidFill>
+                <a:latin typeface="Calibri"/>
+              </a:defRPr>
+            </a:pPr>
+            <a:r>
+              <a:t>Discriminative Travel Questions</a:t>
+            </a:r>
+          </a:p>
+          <a:p>
+            <a:pPr>
+              <a:spcBef>
+                <a:spcPts val="1200"/>
+              </a:spcBef>
+              <a:defRPr sz="1150">
+                <a:solidFill>
+                  <a:srgbClr val="334155"/>
+                </a:solidFill>
+                <a:latin typeface="Calibri"/>
+              </a:defRPr>
+            </a:pPr>
+            <a:r>
+              <a:t>• Automated Bedside Prompts:</a:t>
+            </a:r>
+            <a:br/>
+            <a:r>
+              <a:t>  When a fever with thrombocytopenia is logged in Karnataka, the engine automatically prompts:</a:t>
+            </a:r>
+            <a:br/>
+            <a:r>
+              <a:t>  - 'Recent travel or trekking in Western Ghats forest areas?'</a:t>
+            </a:r>
+            <a:br/>
+            <a:r>
+              <a:t>  - 'History of tick bites or monkey deaths nearby?'</a:t>
+            </a:r>
+            <a:br/>
+            <a:br/>
+            <a:r>
+              <a:t>• Early Quarantine Protocols:</a:t>
+            </a:r>
+            <a:br/>
+            <a:r>
+              <a:t>  Alerts the hospital infection control officer immediately if Nipah or CCHF is suspected.</a:t>
+            </a:r>
+          </a:p>
+        </p:txBody>
+      </p:sp>
+    </p:spTree>
+  </p:cSld>
+  <p:clrMapOvr>
+    <a:masterClrMapping/>
+  </p:clrMapOvr>
+</p:sld>
+</file>
+
+<file path=ppt/slides/slide15.xml><?xml version="1.0" encoding="utf-8"?>
+<p:sld xmlns:a="http://schemas.openxmlformats.org/drawingml/2006/main" xmlns:p="http://schemas.openxmlformats.org/presentationml/2006/main" xmlns:r="http://schemas.openxmlformats.org/officeDocument/2006/relationships">
+  <p:cSld>
+    <p:spTree>
+      <p:nvGrpSpPr>
+        <p:cNvPr id="1" name=""/>
+        <p:cNvGrpSpPr/>
+        <p:nvPr/>
+      </p:nvGrpSpPr>
+      <p:grpSpPr/>
+      <p:sp>
+        <p:nvSpPr>
+          <p:cNvPr id="2" name="Rectangle 1"/>
+          <p:cNvSpPr/>
+          <p:nvPr/>
+        </p:nvSpPr>
+        <p:spPr>
+          <a:xfrm>
+            <a:off x="0" y="0"/>
+            <a:ext cx="12191695" cy="6858000"/>
+          </a:xfrm>
+          <a:prstGeom prst="rect">
+            <a:avLst/>
+          </a:prstGeom>
+          <a:solidFill>
+            <a:srgbClr val="FFFFFF"/>
+          </a:solidFill>
+          <a:ln>
+            <a:noFill/>
+          </a:ln>
+        </p:spPr>
+        <p:style>
+          <a:lnRef idx="1">
+            <a:schemeClr val="accent1"/>
+          </a:lnRef>
+          <a:fillRef idx="3">
+            <a:schemeClr val="accent1"/>
+          </a:fillRef>
+          <a:effectRef idx="2">
+            <a:schemeClr val="accent1"/>
+          </a:effectRef>
+          <a:fontRef idx="minor">
+            <a:schemeClr val="lt1"/>
+          </a:fontRef>
+        </p:style>
+        <p:txBody>
+          <a:bodyPr rtlCol="0" anchor="ctr"/>
+          <a:lstStyle/>
+          <a:p>
+            <a:pPr algn="ctr"/>
+          </a:p>
+        </p:txBody>
+      </p:sp>
+      <p:sp>
+        <p:nvSpPr>
+          <p:cNvPr id="3" name="TextBox 2"/>
+          <p:cNvSpPr txBox="1"/>
+          <p:nvPr/>
+        </p:nvSpPr>
+        <p:spPr>
+          <a:xfrm>
+            <a:off x="731520" y="365760"/>
+            <a:ext cx="10728655" cy="822960"/>
+          </a:xfrm>
+          <a:prstGeom prst="rect">
+            <a:avLst/>
+          </a:prstGeom>
+          <a:noFill/>
+        </p:spPr>
+        <p:txBody>
+          <a:bodyPr wrap="square" lIns="0" tIns="0" rIns="0" bIns="0">
+            <a:spAutoFit/>
+          </a:bodyPr>
+          <a:lstStyle/>
+          <a:p>
+            <a:pPr>
+              <a:defRPr sz="1000" b="1">
+                <a:solidFill>
+                  <a:srgbClr val="0284C7"/>
+                </a:solidFill>
+                <a:latin typeface="Calibri"/>
+              </a:defRPr>
+            </a:pPr>
+            <a:r>
+              <a:t>DIAGNOSTIC PRECISION</a:t>
+            </a:r>
+          </a:p>
+          <a:p>
+            <a:pPr>
+              <a:spcBef>
+                <a:spcPts val="300"/>
+              </a:spcBef>
+              <a:defRPr sz="2400" b="1">
+                <a:solidFill>
+                  <a:srgbClr val="0F2942"/>
+                </a:solidFill>
+                <a:latin typeface="Calibri"/>
+              </a:defRPr>
+            </a:pPr>
+            <a:r>
+              <a:t>Person 3: Discriminative Testing Engine &amp; Validated Clinical Criteria</a:t>
+            </a:r>
+          </a:p>
+        </p:txBody>
+      </p:sp>
+      <p:sp>
+        <p:nvSpPr>
+          <p:cNvPr id="4" name="Rounded Rectangle 3"/>
+          <p:cNvSpPr/>
+          <p:nvPr/>
+        </p:nvSpPr>
+        <p:spPr>
+          <a:xfrm>
+            <a:off x="731520" y="1463040"/>
+            <a:ext cx="5212080" cy="4754880"/>
+          </a:xfrm>
+          <a:prstGeom prst="roundRect">
+            <a:avLst/>
+          </a:prstGeom>
+          <a:solidFill>
+            <a:srgbClr val="F8FAFC"/>
+          </a:solidFill>
+          <a:ln w="19050">
+            <a:solidFill>
+              <a:srgbClr val="8B5CF6"/>
+            </a:solidFill>
+          </a:ln>
+        </p:spPr>
+        <p:style>
+          <a:lnRef idx="1">
+            <a:schemeClr val="accent1"/>
+          </a:lnRef>
+          <a:fillRef idx="3">
+            <a:schemeClr val="accent1"/>
+          </a:fillRef>
+          <a:effectRef idx="2">
+            <a:schemeClr val="accent1"/>
+          </a:effectRef>
+          <a:fontRef idx="minor">
+            <a:schemeClr val="lt1"/>
+          </a:fontRef>
+        </p:style>
+        <p:txBody>
+          <a:bodyPr rtlCol="0" anchor="ctr" wrap="square"/>
+          <a:lstStyle/>
+          <a:p>
+            <a:pPr algn="ctr">
+              <a:defRPr sz="1500" b="1">
+                <a:solidFill>
+                  <a:srgbClr val="8B5CF6"/>
+                </a:solidFill>
+                <a:latin typeface="Calibri"/>
+              </a:defRPr>
+            </a:pPr>
+            <a:r>
+              <a:t>Lookalike Pair Discriminative Tiebreaker Engine</a:t>
+            </a:r>
+          </a:p>
+          <a:p>
+            <a:pPr>
+              <a:spcBef>
+                <a:spcPts val="1200"/>
+              </a:spcBef>
+              <a:defRPr sz="1150">
+                <a:solidFill>
+                  <a:srgbClr val="334155"/>
+                </a:solidFill>
+                <a:latin typeface="Calibri"/>
+              </a:defRPr>
+            </a:pPr>
+            <a:r>
+              <a:t>• Automatically Breaks Diagnostic Ties:</a:t>
+            </a:r>
+            <a:br/>
+            <a:r>
+              <a:t>  - Chikungunya vs. Dengue:</a:t>
+            </a:r>
+            <a:br/>
+            <a:r>
+              <a:t>    Discriminative Test: Anti-CHIKV IgM ELISA vs. Dengue NS1 / Tourniquet Test.</a:t>
+            </a:r>
+            <a:br/>
+            <a:r>
+              <a:t>    Clinical Tiebreaker: Persistent symmetrical polyarthritis vs. severe plasma leakage / thrombocytopenia.</a:t>
+            </a:r>
+            <a:br/>
+            <a:br/>
+            <a:r>
+              <a:t>  - Bacterial Meningitis vs. Subarachnoid Hemorrhage:</a:t>
+            </a:r>
+            <a:br/>
+            <a:r>
+              <a:t>    Discriminative Test: Non-Contrast Head CT + Lumbar Puncture opening pressure/xanthochromia.</a:t>
+            </a:r>
+            <a:br/>
+            <a:r>
+              <a:t>    Clinical Tiebreaker: High fever/neutrophils vs. sudden thunderclap headache without initial fever.</a:t>
+            </a:r>
+            <a:br/>
+            <a:br/>
+            <a:r>
+              <a:t>  - Acute Intermittent Porphyria vs. Appendicitis:</a:t>
+            </a:r>
+            <a:br/>
+            <a:r>
+              <a:t>    Discriminative Test: Urinary Porphobilinogen (PBG) vs. Abdominal Sonography/CT.</a:t>
+            </a:r>
+          </a:p>
+        </p:txBody>
+      </p:sp>
+      <p:sp>
+        <p:nvSpPr>
+          <p:cNvPr id="5" name="Rounded Rectangle 4"/>
+          <p:cNvSpPr/>
+          <p:nvPr/>
+        </p:nvSpPr>
+        <p:spPr>
+          <a:xfrm>
+            <a:off x="6217920" y="1463040"/>
+            <a:ext cx="5212080" cy="4754880"/>
+          </a:xfrm>
+          <a:prstGeom prst="roundRect">
+            <a:avLst/>
+          </a:prstGeom>
+          <a:solidFill>
+            <a:srgbClr val="F8FAFC"/>
+          </a:solidFill>
+          <a:ln w="19050">
+            <a:solidFill>
+              <a:srgbClr val="0D9488"/>
+            </a:solidFill>
+          </a:ln>
+        </p:spPr>
+        <p:style>
+          <a:lnRef idx="1">
+            <a:schemeClr val="accent1"/>
+          </a:lnRef>
+          <a:fillRef idx="3">
+            <a:schemeClr val="accent1"/>
+          </a:fillRef>
+          <a:effectRef idx="2">
+            <a:schemeClr val="accent1"/>
+          </a:effectRef>
+          <a:fontRef idx="minor">
+            <a:schemeClr val="lt1"/>
+          </a:fontRef>
+        </p:style>
+        <p:txBody>
+          <a:bodyPr rtlCol="0" anchor="ctr" wrap="square"/>
+          <a:lstStyle/>
+          <a:p>
+            <a:pPr algn="ctr">
+              <a:defRPr sz="1500" b="1">
+                <a:solidFill>
+                  <a:srgbClr val="0D9488"/>
+                </a:solidFill>
+                <a:latin typeface="Calibri"/>
+              </a:defRPr>
+            </a:pPr>
+            <a:r>
+              <a:t>Deterministic Clinical Criteria Evaluators</a:t>
+            </a:r>
+          </a:p>
+          <a:p>
+            <a:pPr>
+              <a:spcBef>
+                <a:spcPts val="1200"/>
+              </a:spcBef>
+              <a:defRPr sz="1150">
+                <a:solidFill>
+                  <a:srgbClr val="334155"/>
+                </a:solidFill>
+                <a:latin typeface="Calibri"/>
+              </a:defRPr>
+            </a:pPr>
+            <a:r>
+              <a:t>• ACR/EULAR 2019 Criteria for SLE (Lupus):</a:t>
+            </a:r>
+            <a:br/>
+            <a:r>
+              <a:t>  - Mandatory Entry Criterion: ANA titer &gt;= 1:80.</a:t>
+            </a:r>
+            <a:br/>
+            <a:r>
+              <a:t>  - Additive Domains: Constitutional, Hematologic, Mucocutaneous, Serosal, Renal, Musculoskeletal.</a:t>
+            </a:r>
+            <a:br/>
+            <a:r>
+              <a:t>  - Score &gt;= 10 points classifies Systemic Lupus Erythematosus.</a:t>
+            </a:r>
+            <a:br/>
+            <a:br/>
+            <a:r>
+              <a:t>• Modified Duke Criteria for Infective Endocarditis:</a:t>
+            </a:r>
+            <a:br/>
+            <a:r>
+              <a:t>  - 2 Major Criteria (persistent typical bacteremia, positive echo vegetation/abscess).</a:t>
+            </a:r>
+            <a:br/>
+            <a:r>
+              <a:t>  - 5 Minor Criteria (predisposition, fever, vascular/Janeway, immunologic/Osler).</a:t>
+            </a:r>
+            <a:br/>
+            <a:br/>
+            <a:r>
+              <a:t>• Wells' Criteria for Pulmonary Embolism:</a:t>
+            </a:r>
+            <a:br/>
+            <a:r>
+              <a:t>  - Score &gt; 4.0: PE Likely -&gt; Stat CT Pulmonary Angiography.</a:t>
+            </a:r>
+            <a:br/>
+            <a:r>
+              <a:t>  - Score &lt;= 4.0: PE Unlikely -&gt; High-sensitivity D-Dimer rule-out.</a:t>
+            </a:r>
+          </a:p>
+        </p:txBody>
+      </p:sp>
+    </p:spTree>
+  </p:cSld>
+  <p:clrMapOvr>
+    <a:masterClrMapping/>
+  </p:clrMapOvr>
+</p:sld>
+</file>
+
+<file path=ppt/slides/slide16.xml><?xml version="1.0" encoding="utf-8"?>
+<p:sld xmlns:a="http://schemas.openxmlformats.org/drawingml/2006/main" xmlns:p="http://schemas.openxmlformats.org/presentationml/2006/main" xmlns:r="http://schemas.openxmlformats.org/officeDocument/2006/relationships">
+  <p:cSld>
+    <p:spTree>
+      <p:nvGrpSpPr>
+        <p:cNvPr id="1" name=""/>
+        <p:cNvGrpSpPr/>
+        <p:nvPr/>
+      </p:nvGrpSpPr>
+      <p:grpSpPr/>
+      <p:sp>
+        <p:nvSpPr>
+          <p:cNvPr id="2" name="Rectangle 1"/>
+          <p:cNvSpPr/>
+          <p:nvPr/>
+        </p:nvSpPr>
+        <p:spPr>
+          <a:xfrm>
+            <a:off x="0" y="0"/>
+            <a:ext cx="12191695" cy="6858000"/>
+          </a:xfrm>
+          <a:prstGeom prst="rect">
+            <a:avLst/>
+          </a:prstGeom>
+          <a:solidFill>
+            <a:srgbClr val="FFFFFF"/>
+          </a:solidFill>
+          <a:ln>
+            <a:noFill/>
+          </a:ln>
+        </p:spPr>
+        <p:style>
+          <a:lnRef idx="1">
+            <a:schemeClr val="accent1"/>
+          </a:lnRef>
+          <a:fillRef idx="3">
+            <a:schemeClr val="accent1"/>
+          </a:fillRef>
+          <a:effectRef idx="2">
+            <a:schemeClr val="accent1"/>
+          </a:effectRef>
+          <a:fontRef idx="minor">
+            <a:schemeClr val="lt1"/>
+          </a:fontRef>
+        </p:style>
+        <p:txBody>
+          <a:bodyPr rtlCol="0" anchor="ctr"/>
+          <a:lstStyle/>
+          <a:p>
+            <a:pPr algn="ctr"/>
+          </a:p>
+        </p:txBody>
+      </p:sp>
+      <p:sp>
+        <p:nvSpPr>
+          <p:cNvPr id="3" name="TextBox 2"/>
+          <p:cNvSpPr txBox="1"/>
+          <p:nvPr/>
+        </p:nvSpPr>
+        <p:spPr>
+          <a:xfrm>
+            <a:off x="731520" y="365760"/>
+            <a:ext cx="10728655" cy="822960"/>
+          </a:xfrm>
+          <a:prstGeom prst="rect">
+            <a:avLst/>
+          </a:prstGeom>
+          <a:noFill/>
+        </p:spPr>
+        <p:txBody>
+          <a:bodyPr wrap="square" lIns="0" tIns="0" rIns="0" bIns="0">
+            <a:spAutoFit/>
+          </a:bodyPr>
+          <a:lstStyle/>
+          <a:p>
+            <a:pPr>
+              <a:defRPr sz="1000" b="1">
+                <a:solidFill>
+                  <a:srgbClr val="0284C7"/>
+                </a:solidFill>
+                <a:latin typeface="Calibri"/>
+              </a:defRPr>
+            </a:pPr>
+            <a:r>
+              <a:t>CLINICAL SAFETY SAFEGUARDS</a:t>
+            </a:r>
+          </a:p>
+          <a:p>
+            <a:pPr>
+              <a:spcBef>
+                <a:spcPts val="300"/>
+              </a:spcBef>
+              <a:defRPr sz="2400" b="1">
+                <a:solidFill>
+                  <a:srgbClr val="0F2942"/>
+                </a:solidFill>
+                <a:latin typeface="Calibri"/>
+              </a:defRPr>
+            </a:pPr>
+            <a:r>
+              <a:t>Person 3: Polypharmacy Safety Citadel &amp; Regulatory Watermark</a:t>
+            </a:r>
+          </a:p>
+        </p:txBody>
+      </p:sp>
+      <p:sp>
+        <p:nvSpPr>
+          <p:cNvPr id="4" name="Rounded Rectangle 3"/>
+          <p:cNvSpPr/>
+          <p:nvPr/>
+        </p:nvSpPr>
+        <p:spPr>
+          <a:xfrm>
+            <a:off x="731520" y="1463040"/>
+            <a:ext cx="5212080" cy="4754880"/>
+          </a:xfrm>
+          <a:prstGeom prst="roundRect">
+            <a:avLst/>
+          </a:prstGeom>
+          <a:solidFill>
+            <a:srgbClr val="F8FAFC"/>
+          </a:solidFill>
+          <a:ln w="19050">
+            <a:solidFill>
+              <a:srgbClr val="E11D48"/>
+            </a:solidFill>
+          </a:ln>
+        </p:spPr>
+        <p:style>
+          <a:lnRef idx="1">
+            <a:schemeClr val="accent1"/>
+          </a:lnRef>
+          <a:fillRef idx="3">
+            <a:schemeClr val="accent1"/>
+          </a:fillRef>
+          <a:effectRef idx="2">
+            <a:schemeClr val="accent1"/>
+          </a:effectRef>
+          <a:fontRef idx="minor">
+            <a:schemeClr val="lt1"/>
+          </a:fontRef>
+        </p:style>
+        <p:txBody>
+          <a:bodyPr rtlCol="0" anchor="ctr" wrap="square"/>
+          <a:lstStyle/>
+          <a:p>
+            <a:pPr algn="ctr">
+              <a:defRPr sz="1500" b="1">
+                <a:solidFill>
+                  <a:srgbClr val="E11D48"/>
+                </a:solidFill>
+                <a:latin typeface="Calibri"/>
+              </a:defRPr>
+            </a:pPr>
+            <a:r>
+              <a:t>Deterministic Lethal Drug-Drug Interaction Matrix</a:t>
+            </a:r>
+          </a:p>
+          <a:p>
+            <a:pPr>
+              <a:spcBef>
+                <a:spcPts val="1200"/>
+              </a:spcBef>
+              <a:defRPr sz="1150">
+                <a:solidFill>
+                  <a:srgbClr val="334155"/>
+                </a:solidFill>
+                <a:latin typeface="Calibri"/>
+              </a:defRPr>
+            </a:pPr>
+            <a:r>
+              <a:t>• Hardcoded FDA Boxed Warning Enforcement:</a:t>
+            </a:r>
+            <a:br/>
+            <a:r>
+              <a:t>  - Warfarin + Aspirin/NSAIDs:</a:t>
+            </a:r>
+            <a:br/>
+            <a:r>
+              <a:t>    Severity: CRITICAL -&gt; Severe GI &amp; intracranial hemorrhage risk via combined antiplatelet/anticoagulant synergy.</a:t>
+            </a:r>
+            <a:br/>
+            <a:br/>
+            <a:r>
+              <a:t>  - Sildenafil + Nitroglycerin:</a:t>
+            </a:r>
+            <a:br/>
+            <a:r>
+              <a:t>    Severity: LETHAL -&gt; Synergistic cGMP accumulation causing profound, refractory systemic hypotension and cardiac arrest.</a:t>
+            </a:r>
+            <a:br/>
+            <a:br/>
+            <a:r>
+              <a:t>  - Lisinopril + Spironolactone:</a:t>
+            </a:r>
+            <a:br/>
+            <a:r>
+              <a:t>    Severity: HIGH -&gt; Dual potassium-sparing suppression causing fatal hyperkalemia and ventricular arrhythmias.</a:t>
+            </a:r>
+            <a:br/>
+            <a:br/>
+            <a:r>
+              <a:t>• Zero AI Bypass: Safety rules execute in hard Python code; no LLM can override or dismiss a critical drug contraindication.</a:t>
+            </a:r>
+          </a:p>
+        </p:txBody>
+      </p:sp>
+      <p:sp>
+        <p:nvSpPr>
+          <p:cNvPr id="5" name="Rounded Rectangle 4"/>
+          <p:cNvSpPr/>
+          <p:nvPr/>
+        </p:nvSpPr>
+        <p:spPr>
+          <a:xfrm>
+            <a:off x="6217920" y="1463040"/>
+            <a:ext cx="5212080" cy="4754880"/>
+          </a:xfrm>
+          <a:prstGeom prst="roundRect">
+            <a:avLst/>
+          </a:prstGeom>
+          <a:solidFill>
+            <a:srgbClr val="F8FAFC"/>
+          </a:solidFill>
+          <a:ln w="19050">
+            <a:solidFill>
+              <a:srgbClr val="F59E0B"/>
+            </a:solidFill>
+          </a:ln>
+        </p:spPr>
+        <p:style>
+          <a:lnRef idx="1">
+            <a:schemeClr val="accent1"/>
+          </a:lnRef>
+          <a:fillRef idx="3">
+            <a:schemeClr val="accent1"/>
+          </a:fillRef>
+          <a:effectRef idx="2">
+            <a:schemeClr val="accent1"/>
+          </a:effectRef>
+          <a:fontRef idx="minor">
+            <a:schemeClr val="lt1"/>
+          </a:fontRef>
+        </p:style>
+        <p:txBody>
+          <a:bodyPr rtlCol="0" anchor="ctr" wrap="square"/>
+          <a:lstStyle/>
+          <a:p>
+            <a:pPr algn="ctr">
+              <a:defRPr sz="1500" b="1">
+                <a:solidFill>
+                  <a:srgbClr val="F59E0B"/>
+                </a:solidFill>
+                <a:latin typeface="Calibri"/>
+              </a:defRPr>
+            </a:pPr>
+            <a:r>
+              <a:t>The Mandatory Legal Watermark &amp; Compliance</a:t>
+            </a:r>
+          </a:p>
+          <a:p>
+            <a:pPr>
+              <a:spcBef>
+                <a:spcPts val="1200"/>
+              </a:spcBef>
+              <a:defRPr sz="1200">
+                <a:solidFill>
+                  <a:srgbClr val="334155"/>
+                </a:solidFill>
+                <a:latin typeface="Calibri"/>
+              </a:defRPr>
+            </a:pPr>
+            <a:r>
+              <a:t>• Regulatory Governance &amp; Medico-Legal Safeguard:</a:t>
+            </a:r>
+            <a:br/>
+            <a:r>
+              <a:t>  Every single screen, JSON payload, and exported document is permanently stamped with:</a:t>
+            </a:r>
+            <a:br/>
+            <a:br/>
+            <a:r>
+              <a:t>  'REFERENCE INFORMATION — CLINICIAN REVIEW REQUIRED'</a:t>
+            </a:r>
+            <a:br/>
+            <a:br/>
+            <a:r>
+              <a:t>• Compliance Standards Met:</a:t>
+            </a:r>
+            <a:br/>
+            <a:r>
+              <a:t>  - US FDA CDSS Guidance (Clinical Decision Support Software exemption criteria).</a:t>
+            </a:r>
+            <a:br/>
+            <a:r>
+              <a:t>  - EU Medical Device Regulation (EU MDR 2017/745 Class IIa SaMD rules).</a:t>
+            </a:r>
+            <a:br/>
+            <a:r>
+              <a:t>  - Asserts that DocAssistIQ is an assistive decision-support tool, preserving ultimate clinical authority and liability with the licensed human practitioner.</a:t>
+            </a:r>
+          </a:p>
+        </p:txBody>
+      </p:sp>
+    </p:spTree>
+  </p:cSld>
+  <p:clrMapOvr>
+    <a:masterClrMapping/>
+  </p:clrMapOvr>
+</p:sld>
+</file>
+
+<file path=ppt/slides/slide17.xml><?xml version="1.0" encoding="utf-8"?>
+<p:sld xmlns:a="http://schemas.openxmlformats.org/drawingml/2006/main" xmlns:p="http://schemas.openxmlformats.org/presentationml/2006/main" xmlns:r="http://schemas.openxmlformats.org/officeDocument/2006/relationships">
+  <p:cSld>
+    <p:spTree>
+      <p:nvGrpSpPr>
+        <p:cNvPr id="1" name=""/>
+        <p:cNvGrpSpPr/>
+        <p:nvPr/>
+      </p:nvGrpSpPr>
+      <p:grpSpPr/>
+      <p:sp>
+        <p:nvSpPr>
+          <p:cNvPr id="2" name="Rectangle 1"/>
+          <p:cNvSpPr/>
+          <p:nvPr/>
+        </p:nvSpPr>
+        <p:spPr>
+          <a:xfrm>
+            <a:off x="0" y="0"/>
+            <a:ext cx="12191695" cy="6858000"/>
+          </a:xfrm>
+          <a:prstGeom prst="rect">
+            <a:avLst/>
+          </a:prstGeom>
+          <a:solidFill>
+            <a:srgbClr val="FFFFFF"/>
+          </a:solidFill>
+          <a:ln>
+            <a:noFill/>
+          </a:ln>
+        </p:spPr>
+        <p:style>
+          <a:lnRef idx="1">
+            <a:schemeClr val="accent1"/>
+          </a:lnRef>
+          <a:fillRef idx="3">
+            <a:schemeClr val="accent1"/>
+          </a:fillRef>
+          <a:effectRef idx="2">
+            <a:schemeClr val="accent1"/>
+          </a:effectRef>
+          <a:fontRef idx="minor">
+            <a:schemeClr val="lt1"/>
+          </a:fontRef>
+        </p:style>
+        <p:txBody>
+          <a:bodyPr rtlCol="0" anchor="ctr"/>
+          <a:lstStyle/>
+          <a:p>
+            <a:pPr algn="ctr"/>
+          </a:p>
+        </p:txBody>
+      </p:sp>
+      <p:sp>
+        <p:nvSpPr>
+          <p:cNvPr id="3" name="TextBox 2"/>
+          <p:cNvSpPr txBox="1"/>
+          <p:nvPr/>
+        </p:nvSpPr>
+        <p:spPr>
+          <a:xfrm>
+            <a:off x="731520" y="365760"/>
+            <a:ext cx="10728655" cy="822960"/>
+          </a:xfrm>
+          <a:prstGeom prst="rect">
+            <a:avLst/>
+          </a:prstGeom>
+          <a:noFill/>
+        </p:spPr>
+        <p:txBody>
+          <a:bodyPr wrap="square" lIns="0" tIns="0" rIns="0" bIns="0">
+            <a:spAutoFit/>
+          </a:bodyPr>
+          <a:lstStyle/>
+          <a:p>
+            <a:pPr>
+              <a:defRPr sz="1000" b="1">
+                <a:solidFill>
+                  <a:srgbClr val="0284C7"/>
+                </a:solidFill>
+                <a:latin typeface="Calibri"/>
+              </a:defRPr>
+            </a:pPr>
+            <a:r>
+              <a:t>FULL-STACK USER EXPERIENCE</a:t>
+            </a:r>
+          </a:p>
+          <a:p>
+            <a:pPr>
+              <a:spcBef>
+                <a:spcPts val="300"/>
+              </a:spcBef>
+              <a:defRPr sz="2400" b="1">
+                <a:solidFill>
+                  <a:srgbClr val="0F2942"/>
+                </a:solidFill>
+                <a:latin typeface="Calibri"/>
+              </a:defRPr>
+            </a:pPr>
+            <a:r>
+              <a:t>Person 4: Next.js 16 &amp; React 19 Modern Frontend Architecture</a:t>
+            </a:r>
+          </a:p>
+        </p:txBody>
+      </p:sp>
+      <p:sp>
+        <p:nvSpPr>
+          <p:cNvPr id="4" name="Rounded Rectangle 3"/>
+          <p:cNvSpPr/>
+          <p:nvPr/>
+        </p:nvSpPr>
+        <p:spPr>
+          <a:xfrm>
+            <a:off x="731520" y="1463040"/>
+            <a:ext cx="3474720" cy="4754880"/>
+          </a:xfrm>
+          <a:prstGeom prst="roundRect">
+            <a:avLst/>
+          </a:prstGeom>
+          <a:solidFill>
+            <a:srgbClr val="F8FAFC"/>
+          </a:solidFill>
+          <a:ln w="19050">
+            <a:solidFill>
+              <a:srgbClr val="0284C7"/>
+            </a:solidFill>
+          </a:ln>
+        </p:spPr>
+        <p:style>
+          <a:lnRef idx="1">
+            <a:schemeClr val="accent1"/>
+          </a:lnRef>
+          <a:fillRef idx="3">
+            <a:schemeClr val="accent1"/>
+          </a:fillRef>
+          <a:effectRef idx="2">
+            <a:schemeClr val="accent1"/>
+          </a:effectRef>
+          <a:fontRef idx="minor">
+            <a:schemeClr val="lt1"/>
+          </a:fontRef>
+        </p:style>
+        <p:txBody>
+          <a:bodyPr rtlCol="0" anchor="ctr" wrap="square"/>
+          <a:lstStyle/>
+          <a:p>
+            <a:pPr algn="ctr">
+              <a:defRPr sz="1500" b="1">
+                <a:solidFill>
+                  <a:srgbClr val="0284C7"/>
+                </a:solidFill>
+                <a:latin typeface="Calibri"/>
+              </a:defRPr>
+            </a:pPr>
+            <a:r>
+              <a:t>App Router &amp; Server Components</a:t>
+            </a:r>
+          </a:p>
+          <a:p>
+            <a:pPr>
+              <a:spcBef>
+                <a:spcPts val="1400"/>
+              </a:spcBef>
+              <a:defRPr sz="1200">
+                <a:solidFill>
+                  <a:srgbClr val="334155"/>
+                </a:solidFill>
+                <a:latin typeface="Calibri"/>
+              </a:defRPr>
+            </a:pPr>
+            <a:r>
+              <a:t>• Next.js 16.3.4 App Router: Nested layouts, server-side data fetching, and zero client JS bundle overhead for static tables.</a:t>
+            </a:r>
+            <a:br/>
+            <a:br/>
+            <a:r>
+              <a:t>• React 19.2.8 RSC Boundary: Clear separation between asynchronous Server Components and dynamic Client Components ('use client').</a:t>
+            </a:r>
+          </a:p>
+        </p:txBody>
+      </p:sp>
+      <p:sp>
+        <p:nvSpPr>
+          <p:cNvPr id="5" name="Rounded Rectangle 4"/>
+          <p:cNvSpPr/>
+          <p:nvPr/>
+        </p:nvSpPr>
+        <p:spPr>
+          <a:xfrm>
+            <a:off x="4343400" y="1463040"/>
+            <a:ext cx="3474720" cy="4754880"/>
+          </a:xfrm>
+          <a:prstGeom prst="roundRect">
+            <a:avLst/>
+          </a:prstGeom>
+          <a:solidFill>
+            <a:srgbClr val="F8FAFC"/>
+          </a:solidFill>
+          <a:ln w="19050">
+            <a:solidFill>
+              <a:srgbClr val="0D9488"/>
+            </a:solidFill>
+          </a:ln>
+        </p:spPr>
+        <p:style>
+          <a:lnRef idx="1">
+            <a:schemeClr val="accent1"/>
+          </a:lnRef>
+          <a:fillRef idx="3">
+            <a:schemeClr val="accent1"/>
+          </a:fillRef>
+          <a:effectRef idx="2">
+            <a:schemeClr val="accent1"/>
+          </a:effectRef>
+          <a:fontRef idx="minor">
+            <a:schemeClr val="lt1"/>
+          </a:fontRef>
+        </p:style>
+        <p:txBody>
+          <a:bodyPr rtlCol="0" anchor="ctr" wrap="square"/>
+          <a:lstStyle/>
+          <a:p>
+            <a:pPr algn="ctr">
+              <a:defRPr sz="1500" b="1">
+                <a:solidFill>
+                  <a:srgbClr val="0D9488"/>
+                </a:solidFill>
+                <a:latin typeface="Calibri"/>
+              </a:defRPr>
+            </a:pPr>
+            <a:r>
+              <a:t>Design System &amp; UI Library</a:t>
+            </a:r>
+          </a:p>
+          <a:p>
+            <a:pPr>
+              <a:spcBef>
+                <a:spcPts val="1400"/>
+              </a:spcBef>
+              <a:defRPr sz="1200">
+                <a:solidFill>
+                  <a:srgbClr val="334155"/>
+                </a:solidFill>
+                <a:latin typeface="Calibri"/>
+              </a:defRPr>
+            </a:pPr>
+            <a:r>
+              <a:t>• TailwindCSS v4: Modern utility-first CSS design with theme variables, achieving sub-100ms UI render times.</a:t>
+            </a:r>
+            <a:br/>
+            <a:br/>
+            <a:r>
+              <a:t>• Radix UI Primitives: Unstyled, accessible dialogs, tabs, and tooltips complying with W3C WAI-ARIA standards.</a:t>
+            </a:r>
+            <a:br/>
+            <a:br/>
+            <a:r>
+              <a:t>• Framer Motion: Hardware-accelerated smooth waveforms and alert transitions.</a:t>
+            </a:r>
+          </a:p>
+        </p:txBody>
+      </p:sp>
+      <p:sp>
+        <p:nvSpPr>
+          <p:cNvPr id="6" name="Rounded Rectangle 5"/>
+          <p:cNvSpPr/>
+          <p:nvPr/>
+        </p:nvSpPr>
+        <p:spPr>
+          <a:xfrm>
+            <a:off x="7955280" y="1463040"/>
+            <a:ext cx="3474720" cy="4754880"/>
+          </a:xfrm>
+          <a:prstGeom prst="roundRect">
+            <a:avLst/>
+          </a:prstGeom>
+          <a:solidFill>
+            <a:srgbClr val="F8FAFC"/>
+          </a:solidFill>
+          <a:ln w="19050">
+            <a:solidFill>
+              <a:srgbClr val="10B981"/>
+            </a:solidFill>
+          </a:ln>
+        </p:spPr>
+        <p:style>
+          <a:lnRef idx="1">
+            <a:schemeClr val="accent1"/>
+          </a:lnRef>
+          <a:fillRef idx="3">
+            <a:schemeClr val="accent1"/>
+          </a:fillRef>
+          <a:effectRef idx="2">
+            <a:schemeClr val="accent1"/>
+          </a:effectRef>
+          <a:fontRef idx="minor">
+            <a:schemeClr val="lt1"/>
+          </a:fontRef>
+        </p:style>
+        <p:txBody>
+          <a:bodyPr rtlCol="0" anchor="ctr" wrap="square"/>
+          <a:lstStyle/>
+          <a:p>
+            <a:pPr algn="ctr">
+              <a:defRPr sz="1500" b="1">
+                <a:solidFill>
+                  <a:srgbClr val="10B981"/>
+                </a:solidFill>
+                <a:latin typeface="Calibri"/>
+              </a:defRPr>
+            </a:pPr>
+            <a:r>
+              <a:t>State &amp; Optimistic Updates</a:t>
+            </a:r>
+          </a:p>
+          <a:p>
+            <a:pPr>
+              <a:spcBef>
+                <a:spcPts val="1400"/>
+              </a:spcBef>
+              <a:defRPr sz="1200">
+                <a:solidFill>
+                  <a:srgbClr val="334155"/>
+                </a:solidFill>
+                <a:latin typeface="Calibri"/>
+              </a:defRPr>
+            </a:pPr>
+            <a:r>
+              <a:t>• TanStack Query v5: Manages server-side cache invalidation, deduplication, and background polling.</a:t>
+            </a:r>
+            <a:br/>
+            <a:br/>
+            <a:r>
+              <a:t>• Optimistic Mutations: Medication and symptom edits reflect in the UI immediately before server ACK, rolling back gracefully if an error occurs.</a:t>
+            </a:r>
+          </a:p>
+        </p:txBody>
+      </p:sp>
+    </p:spTree>
+  </p:cSld>
+  <p:clrMapOvr>
+    <a:masterClrMapping/>
+  </p:clrMapOvr>
+</p:sld>
+</file>
+
+<file path=ppt/slides/slide18.xml><?xml version="1.0" encoding="utf-8"?>
+<p:sld xmlns:a="http://schemas.openxmlformats.org/drawingml/2006/main" xmlns:p="http://schemas.openxmlformats.org/presentationml/2006/main" xmlns:r="http://schemas.openxmlformats.org/officeDocument/2006/relationships">
+  <p:cSld>
+    <p:spTree>
+      <p:nvGrpSpPr>
+        <p:cNvPr id="1" name=""/>
+        <p:cNvGrpSpPr/>
+        <p:nvPr/>
+      </p:nvGrpSpPr>
+      <p:grpSpPr/>
+      <p:sp>
+        <p:nvSpPr>
+          <p:cNvPr id="2" name="Rectangle 1"/>
+          <p:cNvSpPr/>
+          <p:nvPr/>
+        </p:nvSpPr>
+        <p:spPr>
+          <a:xfrm>
+            <a:off x="0" y="0"/>
+            <a:ext cx="12191695" cy="6858000"/>
+          </a:xfrm>
+          <a:prstGeom prst="rect">
+            <a:avLst/>
+          </a:prstGeom>
+          <a:solidFill>
+            <a:srgbClr val="FFFFFF"/>
+          </a:solidFill>
+          <a:ln>
+            <a:noFill/>
+          </a:ln>
+        </p:spPr>
+        <p:style>
+          <a:lnRef idx="1">
+            <a:schemeClr val="accent1"/>
+          </a:lnRef>
+          <a:fillRef idx="3">
+            <a:schemeClr val="accent1"/>
+          </a:fillRef>
+          <a:effectRef idx="2">
+            <a:schemeClr val="accent1"/>
+          </a:effectRef>
+          <a:fontRef idx="minor">
+            <a:schemeClr val="lt1"/>
+          </a:fontRef>
+        </p:style>
+        <p:txBody>
+          <a:bodyPr rtlCol="0" anchor="ctr"/>
+          <a:lstStyle/>
+          <a:p>
+            <a:pPr algn="ctr"/>
+          </a:p>
+        </p:txBody>
+      </p:sp>
+      <p:sp>
+        <p:nvSpPr>
+          <p:cNvPr id="3" name="TextBox 2"/>
+          <p:cNvSpPr txBox="1"/>
+          <p:nvPr/>
+        </p:nvSpPr>
+        <p:spPr>
+          <a:xfrm>
+            <a:off x="731520" y="365760"/>
+            <a:ext cx="10728655" cy="822960"/>
+          </a:xfrm>
+          <a:prstGeom prst="rect">
+            <a:avLst/>
+          </a:prstGeom>
+          <a:noFill/>
+        </p:spPr>
+        <p:txBody>
+          <a:bodyPr wrap="square" lIns="0" tIns="0" rIns="0" bIns="0">
+            <a:spAutoFit/>
+          </a:bodyPr>
+          <a:lstStyle/>
+          <a:p>
+            <a:pPr>
+              <a:defRPr sz="1000" b="1">
+                <a:solidFill>
+                  <a:srgbClr val="0284C7"/>
+                </a:solidFill>
+                <a:latin typeface="Calibri"/>
+              </a:defRPr>
+            </a:pPr>
+            <a:r>
+              <a:t>FULL-STACK REAL-TIME PIPELINE</a:t>
+            </a:r>
+          </a:p>
+          <a:p>
+            <a:pPr>
+              <a:spcBef>
+                <a:spcPts val="300"/>
+              </a:spcBef>
+              <a:defRPr sz="2400" b="1">
+                <a:solidFill>
+                  <a:srgbClr val="0F2942"/>
+                </a:solidFill>
+                <a:latin typeface="Calibri"/>
+              </a:defRPr>
+            </a:pPr>
+            <a:r>
+              <a:t>Person 4: Full-Stack Integration — Typed REST &amp; Resilient WebSockets</a:t>
+            </a:r>
+          </a:p>
+        </p:txBody>
+      </p:sp>
+      <p:sp>
+        <p:nvSpPr>
+          <p:cNvPr id="4" name="Rounded Rectangle 3"/>
+          <p:cNvSpPr/>
+          <p:nvPr/>
+        </p:nvSpPr>
+        <p:spPr>
+          <a:xfrm>
+            <a:off x="731520" y="1463040"/>
+            <a:ext cx="5212080" cy="4754880"/>
+          </a:xfrm>
+          <a:prstGeom prst="roundRect">
+            <a:avLst/>
+          </a:prstGeom>
+          <a:solidFill>
+            <a:srgbClr val="F8FAFC"/>
+          </a:solidFill>
+          <a:ln w="19050">
+            <a:solidFill>
+              <a:srgbClr val="0284C7"/>
+            </a:solidFill>
+          </a:ln>
+        </p:spPr>
+        <p:style>
+          <a:lnRef idx="1">
+            <a:schemeClr val="accent1"/>
+          </a:lnRef>
+          <a:fillRef idx="3">
+            <a:schemeClr val="accent1"/>
+          </a:fillRef>
+          <a:effectRef idx="2">
+            <a:schemeClr val="accent1"/>
+          </a:effectRef>
+          <a:fontRef idx="minor">
+            <a:schemeClr val="lt1"/>
+          </a:fontRef>
+        </p:style>
+        <p:txBody>
+          <a:bodyPr rtlCol="0" anchor="ctr" wrap="square"/>
+          <a:lstStyle/>
+          <a:p>
+            <a:pPr algn="ctr">
+              <a:defRPr sz="1500" b="1">
+                <a:solidFill>
+                  <a:srgbClr val="0284C7"/>
+                </a:solidFill>
+                <a:latin typeface="Calibri"/>
+              </a:defRPr>
+            </a:pPr>
+            <a:r>
+              <a:t>Strongly-Typed REST API Client (lib/api.ts - 85KB)</a:t>
+            </a:r>
+          </a:p>
+          <a:p>
+            <a:pPr>
+              <a:spcBef>
+                <a:spcPts val="1200"/>
+              </a:spcBef>
+              <a:defRPr sz="1200">
+                <a:solidFill>
+                  <a:srgbClr val="334155"/>
+                </a:solidFill>
+                <a:latin typeface="Calibri"/>
+              </a:defRPr>
+            </a:pPr>
+            <a:r>
+              <a:t>• Enterprise TypeScript API Layer:</a:t>
+            </a:r>
+            <a:br/>
+            <a:r>
+              <a:t>  - 85 KB comprehensive client mapping over 50 backend FastAPI endpoints.</a:t>
+            </a:r>
+            <a:br/>
+            <a:r>
+              <a:t>  - Strict TypeScript interface typings mirroring backend Pydantic models.</a:t>
+            </a:r>
+            <a:br/>
+            <a:r>
+              <a:t>  - Centralized error interception, JWT bearer token refresh, and request correlation IDs.</a:t>
+            </a:r>
+            <a:br/>
+            <a:br/>
+            <a:r>
+              <a:t>• Covers All Major Workflows:</a:t>
+            </a:r>
+            <a:br/>
+            <a:r>
+              <a:t>  Authentication, Patient Profile lookup, Consultation state transitions, Differential queries, Document downloads, and Outbreak radar data.</a:t>
+            </a:r>
+          </a:p>
+        </p:txBody>
+      </p:sp>
+      <p:sp>
+        <p:nvSpPr>
+          <p:cNvPr id="5" name="Rounded Rectangle 4"/>
+          <p:cNvSpPr/>
+          <p:nvPr/>
+        </p:nvSpPr>
+        <p:spPr>
+          <a:xfrm>
+            <a:off x="6217920" y="1463040"/>
+            <a:ext cx="5212080" cy="4754880"/>
+          </a:xfrm>
+          <a:prstGeom prst="roundRect">
+            <a:avLst/>
+          </a:prstGeom>
+          <a:solidFill>
+            <a:srgbClr val="F8FAFC"/>
+          </a:solidFill>
+          <a:ln w="19050">
+            <a:solidFill>
+              <a:srgbClr val="8B5CF6"/>
+            </a:solidFill>
+          </a:ln>
+        </p:spPr>
+        <p:style>
+          <a:lnRef idx="1">
+            <a:schemeClr val="accent1"/>
+          </a:lnRef>
+          <a:fillRef idx="3">
+            <a:schemeClr val="accent1"/>
+          </a:fillRef>
+          <a:effectRef idx="2">
+            <a:schemeClr val="accent1"/>
+          </a:effectRef>
+          <a:fontRef idx="minor">
+            <a:schemeClr val="lt1"/>
+          </a:fontRef>
+        </p:style>
+        <p:txBody>
+          <a:bodyPr rtlCol="0" anchor="ctr" wrap="square"/>
+          <a:lstStyle/>
+          <a:p>
+            <a:pPr algn="ctr">
+              <a:defRPr sz="1500" b="1">
+                <a:solidFill>
+                  <a:srgbClr val="8B5CF6"/>
+                </a:solidFill>
+                <a:latin typeface="Calibri"/>
+              </a:defRPr>
+            </a:pPr>
+            <a:r>
+              <a:t>Resilient Full-Duplex WebSockets (lib/ws.ts)</a:t>
+            </a:r>
+          </a:p>
+          <a:p>
+            <a:pPr>
+              <a:spcBef>
+                <a:spcPts val="1200"/>
+              </a:spcBef>
+              <a:defRPr sz="1200">
+                <a:solidFill>
+                  <a:srgbClr val="334155"/>
+                </a:solidFill>
+                <a:latin typeface="Calibri"/>
+              </a:defRPr>
+            </a:pPr>
+            <a:r>
+              <a:t>• Bidirectional Low-Latency Tunnel:</a:t>
+            </a:r>
+            <a:br/>
+            <a:r>
+              <a:t>  Streams binary PCM audio chunks upstream and diarized transcript tokens + live differential predictions downstream.</a:t>
+            </a:r>
+            <a:br/>
+            <a:br/>
+            <a:r>
+              <a:t>• Jittered Exponential Backoff Reconnection:</a:t>
+            </a:r>
+            <a:br/>
+            <a:r>
+              <a:t>  If the hospital Wi-Fi drops, ws.ts automatically retries up to 10 times with randomized delay, preventing thundering herd server spikes.</a:t>
+            </a:r>
+            <a:br/>
+            <a:br/>
+            <a:r>
+              <a:t>• In-Memory Offline Message Buffer:</a:t>
+            </a:r>
+            <a:br/>
+            <a:r>
+              <a:t>  Clinician inputs made during network dropouts are queued in memory and replayed automatically upon reconnection.</a:t>
+            </a:r>
+            <a:br/>
+            <a:br/>
+            <a:r>
+              <a:t>• 30-Second Ping/Pong Heartbeats:</a:t>
+            </a:r>
+            <a:br/>
+            <a:r>
+              <a:t>  Actively detects and tears down silent half-open TCP connections.</a:t>
+            </a:r>
+          </a:p>
+        </p:txBody>
+      </p:sp>
+    </p:spTree>
+  </p:cSld>
+  <p:clrMapOvr>
+    <a:masterClrMapping/>
+  </p:clrMapOvr>
+</p:sld>
+</file>
+
+<file path=ppt/slides/slide19.xml><?xml version="1.0" encoding="utf-8"?>
+<p:sld xmlns:a="http://schemas.openxmlformats.org/drawingml/2006/main" xmlns:p="http://schemas.openxmlformats.org/presentationml/2006/main" xmlns:r="http://schemas.openxmlformats.org/officeDocument/2006/relationships">
+  <p:cSld>
+    <p:spTree>
+      <p:nvGrpSpPr>
+        <p:cNvPr id="1" name=""/>
+        <p:cNvGrpSpPr/>
+        <p:nvPr/>
+      </p:nvGrpSpPr>
+      <p:grpSpPr/>
+      <p:sp>
+        <p:nvSpPr>
+          <p:cNvPr id="2" name="Rectangle 1"/>
+          <p:cNvSpPr/>
+          <p:nvPr/>
+        </p:nvSpPr>
+        <p:spPr>
+          <a:xfrm>
+            <a:off x="0" y="0"/>
+            <a:ext cx="12191695" cy="6858000"/>
+          </a:xfrm>
+          <a:prstGeom prst="rect">
+            <a:avLst/>
+          </a:prstGeom>
+          <a:solidFill>
+            <a:srgbClr val="FFFFFF"/>
+          </a:solidFill>
+          <a:ln>
+            <a:noFill/>
+          </a:ln>
+        </p:spPr>
+        <p:style>
+          <a:lnRef idx="1">
+            <a:schemeClr val="accent1"/>
+          </a:lnRef>
+          <a:fillRef idx="3">
+            <a:schemeClr val="accent1"/>
+          </a:fillRef>
+          <a:effectRef idx="2">
+            <a:schemeClr val="accent1"/>
+          </a:effectRef>
+          <a:fontRef idx="minor">
+            <a:schemeClr val="lt1"/>
+          </a:fontRef>
+        </p:style>
+        <p:txBody>
+          <a:bodyPr rtlCol="0" anchor="ctr"/>
+          <a:lstStyle/>
+          <a:p>
+            <a:pPr algn="ctr"/>
+          </a:p>
+        </p:txBody>
+      </p:sp>
+      <p:sp>
+        <p:nvSpPr>
+          <p:cNvPr id="3" name="TextBox 2"/>
+          <p:cNvSpPr txBox="1"/>
+          <p:nvPr/>
+        </p:nvSpPr>
+        <p:spPr>
+          <a:xfrm>
+            <a:off x="731520" y="365760"/>
+            <a:ext cx="10728655" cy="822960"/>
+          </a:xfrm>
+          <a:prstGeom prst="rect">
+            <a:avLst/>
+          </a:prstGeom>
+          <a:noFill/>
+        </p:spPr>
+        <p:txBody>
+          <a:bodyPr wrap="square" lIns="0" tIns="0" rIns="0" bIns="0">
+            <a:spAutoFit/>
+          </a:bodyPr>
+          <a:lstStyle/>
+          <a:p>
+            <a:pPr>
+              <a:defRPr sz="1000" b="1">
+                <a:solidFill>
+                  <a:srgbClr val="0284C7"/>
+                </a:solidFill>
+                <a:latin typeface="Calibri"/>
+              </a:defRPr>
+            </a:pPr>
+            <a:r>
+              <a:t>DATA PERSISTENCE &amp; VECTOR SEARCH</a:t>
+            </a:r>
+          </a:p>
+          <a:p>
+            <a:pPr>
+              <a:spcBef>
+                <a:spcPts val="300"/>
+              </a:spcBef>
+              <a:defRPr sz="2400" b="1">
+                <a:solidFill>
+                  <a:srgbClr val="0F2942"/>
+                </a:solidFill>
+                <a:latin typeface="Calibri"/>
+              </a:defRPr>
+            </a:pPr>
+            <a:r>
+              <a:t>Person 4: Enterprise Data Infrastructure — PostgreSQL, pgvector &amp; Redis</a:t>
+            </a:r>
+          </a:p>
+        </p:txBody>
+      </p:sp>
+      <p:sp>
+        <p:nvSpPr>
+          <p:cNvPr id="4" name="Rounded Rectangle 3"/>
+          <p:cNvSpPr/>
+          <p:nvPr/>
+        </p:nvSpPr>
+        <p:spPr>
+          <a:xfrm>
+            <a:off x="731520" y="1463040"/>
+            <a:ext cx="3474720" cy="4754880"/>
+          </a:xfrm>
+          <a:prstGeom prst="roundRect">
+            <a:avLst/>
+          </a:prstGeom>
+          <a:solidFill>
+            <a:srgbClr val="F8FAFC"/>
+          </a:solidFill>
+          <a:ln w="19050">
+            <a:solidFill>
+              <a:srgbClr val="0284C7"/>
+            </a:solidFill>
+          </a:ln>
+        </p:spPr>
+        <p:style>
+          <a:lnRef idx="1">
+            <a:schemeClr val="accent1"/>
+          </a:lnRef>
+          <a:fillRef idx="3">
+            <a:schemeClr val="accent1"/>
+          </a:fillRef>
+          <a:effectRef idx="2">
+            <a:schemeClr val="accent1"/>
+          </a:effectRef>
+          <a:fontRef idx="minor">
+            <a:schemeClr val="lt1"/>
+          </a:fontRef>
+        </p:style>
+        <p:txBody>
+          <a:bodyPr rtlCol="0" anchor="ctr" wrap="square"/>
+          <a:lstStyle/>
+          <a:p>
+            <a:pPr algn="ctr">
+              <a:defRPr sz="1500" b="1">
+                <a:solidFill>
+                  <a:srgbClr val="0284C7"/>
+                </a:solidFill>
+                <a:latin typeface="Calibri"/>
+              </a:defRPr>
+            </a:pPr>
+            <a:r>
+              <a:t>Relational Core: PostgreSQL 16</a:t>
+            </a:r>
+          </a:p>
+          <a:p>
+            <a:pPr>
+              <a:spcBef>
+                <a:spcPts val="1400"/>
+              </a:spcBef>
+              <a:defRPr sz="1200">
+                <a:solidFill>
+                  <a:srgbClr val="334155"/>
+                </a:solidFill>
+                <a:latin typeface="Calibri"/>
+              </a:defRPr>
+            </a:pPr>
+            <a:r>
+              <a:t>• SQLAlchemy 2.0 Async Engine: Fully non-blocking database queries with asyncpg driver.</a:t>
+            </a:r>
+            <a:br/>
+            <a:br/>
+            <a:r>
+              <a:t>• Connection Pooling: pool_size=20 with max_overflow=10 for high-concurrency throughput.</a:t>
+            </a:r>
+            <a:br/>
+            <a:br/>
+            <a:r>
+              <a:t>• Normalized Relational Schema: Enforces ACID guarantees across Users, Doctors, PatientProfiles, Consultations, ClinicalNotes, Findings, and Audits.</a:t>
+            </a:r>
+          </a:p>
+        </p:txBody>
+      </p:sp>
+      <p:sp>
+        <p:nvSpPr>
+          <p:cNvPr id="5" name="Rounded Rectangle 4"/>
+          <p:cNvSpPr/>
+          <p:nvPr/>
+        </p:nvSpPr>
+        <p:spPr>
+          <a:xfrm>
+            <a:off x="4343400" y="1463040"/>
+            <a:ext cx="3474720" cy="4754880"/>
+          </a:xfrm>
+          <a:prstGeom prst="roundRect">
+            <a:avLst/>
+          </a:prstGeom>
+          <a:solidFill>
+            <a:srgbClr val="F8FAFC"/>
+          </a:solidFill>
+          <a:ln w="19050">
+            <a:solidFill>
+              <a:srgbClr val="0D9488"/>
+            </a:solidFill>
+          </a:ln>
+        </p:spPr>
+        <p:style>
+          <a:lnRef idx="1">
+            <a:schemeClr val="accent1"/>
+          </a:lnRef>
+          <a:fillRef idx="3">
+            <a:schemeClr val="accent1"/>
+          </a:fillRef>
+          <a:effectRef idx="2">
+            <a:schemeClr val="accent1"/>
+          </a:effectRef>
+          <a:fontRef idx="minor">
+            <a:schemeClr val="lt1"/>
+          </a:fontRef>
+        </p:style>
+        <p:txBody>
+          <a:bodyPr rtlCol="0" anchor="ctr" wrap="square"/>
+          <a:lstStyle/>
+          <a:p>
+            <a:pPr algn="ctr">
+              <a:defRPr sz="1500" b="1">
+                <a:solidFill>
+                  <a:srgbClr val="0D9488"/>
+                </a:solidFill>
+                <a:latin typeface="Calibri"/>
+              </a:defRPr>
+            </a:pPr>
+            <a:r>
+              <a:t>Semantic Vector Search: pgvector</a:t>
+            </a:r>
+          </a:p>
+          <a:p>
+            <a:pPr>
+              <a:spcBef>
+                <a:spcPts val="1400"/>
+              </a:spcBef>
+              <a:defRPr sz="1200">
+                <a:solidFill>
+                  <a:srgbClr val="334155"/>
+                </a:solidFill>
+                <a:latin typeface="Calibri"/>
+              </a:defRPr>
+            </a:pPr>
+            <a:r>
+              <a:t>• In-Database Vector Store: Native vector extension eliminating external Pinecone/Milvus overhead.</a:t>
+            </a:r>
+            <a:br/>
+            <a:br/>
+            <a:r>
+              <a:t>• HNSW Indexing: Hierarchical Navigable Small World index using cosine distance (&lt;=&gt;) for 768/1536-dim embeddings.</a:t>
+            </a:r>
+            <a:br/>
+            <a:br/>
+            <a:r>
+              <a:t>• Sub-15ms PMC Evidence RAG: Sub-linear nearest-neighbor search over thousands of medical research articles.</a:t>
+            </a:r>
+          </a:p>
+        </p:txBody>
+      </p:sp>
+      <p:sp>
+        <p:nvSpPr>
+          <p:cNvPr id="6" name="Rounded Rectangle 5"/>
+          <p:cNvSpPr/>
+          <p:nvPr/>
+        </p:nvSpPr>
+        <p:spPr>
+          <a:xfrm>
+            <a:off x="7955280" y="1463040"/>
+            <a:ext cx="3474720" cy="4754880"/>
+          </a:xfrm>
+          <a:prstGeom prst="roundRect">
+            <a:avLst/>
+          </a:prstGeom>
+          <a:solidFill>
+            <a:srgbClr val="F8FAFC"/>
+          </a:solidFill>
+          <a:ln w="19050">
+            <a:solidFill>
+              <a:srgbClr val="E11D48"/>
+            </a:solidFill>
+          </a:ln>
+        </p:spPr>
+        <p:style>
+          <a:lnRef idx="1">
+            <a:schemeClr val="accent1"/>
+          </a:lnRef>
+          <a:fillRef idx="3">
+            <a:schemeClr val="accent1"/>
+          </a:fillRef>
+          <a:effectRef idx="2">
+            <a:schemeClr val="accent1"/>
+          </a:effectRef>
+          <a:fontRef idx="minor">
+            <a:schemeClr val="lt1"/>
+          </a:fontRef>
+        </p:style>
+        <p:txBody>
+          <a:bodyPr rtlCol="0" anchor="ctr" wrap="square"/>
+          <a:lstStyle/>
+          <a:p>
+            <a:pPr algn="ctr">
+              <a:defRPr sz="1500" b="1">
+                <a:solidFill>
+                  <a:srgbClr val="E11D48"/>
+                </a:solidFill>
+                <a:latin typeface="Calibri"/>
+              </a:defRPr>
+            </a:pPr>
+            <a:r>
+              <a:t>In-Memory Engine: Redis 7</a:t>
+            </a:r>
+          </a:p>
+          <a:p>
+            <a:pPr>
+              <a:spcBef>
+                <a:spcPts val="1400"/>
+              </a:spcBef>
+              <a:defRPr sz="1200">
+                <a:solidFill>
+                  <a:srgbClr val="334155"/>
+                </a:solidFill>
+                <a:latin typeface="Calibri"/>
+              </a:defRPr>
+            </a:pPr>
+            <a:r>
+              <a:t>• Sub-Millisecond Cache: Stores live resolved NLM ClinicalTables and OpenFDA entities.</a:t>
+            </a:r>
+            <a:br/>
+            <a:br/>
+            <a:r>
+              <a:t>• Token-Bucket Rate Limiting: Restricts public verification endpoints to 60 req/min, preventing brute force.</a:t>
+            </a:r>
+            <a:br/>
+            <a:br/>
+            <a:r>
+              <a:t>• Pub/Sub Message Broker: Asynchronously dispatches consultation events to background workers.</a:t>
             </a:r>
           </a:p>
         </p:txBody>
@@ -3221,9 +6704,753 @@
         <p:nvPr/>
       </p:nvGrpSpPr>
       <p:grpSpPr/>
+      <p:sp>
+        <p:nvSpPr>
+          <p:cNvPr id="2" name="Rectangle 1"/>
+          <p:cNvSpPr/>
+          <p:nvPr/>
+        </p:nvSpPr>
+        <p:spPr>
+          <a:xfrm>
+            <a:off x="0" y="0"/>
+            <a:ext cx="12191695" cy="6858000"/>
+          </a:xfrm>
+          <a:prstGeom prst="rect">
+            <a:avLst/>
+          </a:prstGeom>
+          <a:solidFill>
+            <a:srgbClr val="FFFFFF"/>
+          </a:solidFill>
+          <a:ln>
+            <a:noFill/>
+          </a:ln>
+        </p:spPr>
+        <p:style>
+          <a:lnRef idx="1">
+            <a:schemeClr val="accent1"/>
+          </a:lnRef>
+          <a:fillRef idx="3">
+            <a:schemeClr val="accent1"/>
+          </a:fillRef>
+          <a:effectRef idx="2">
+            <a:schemeClr val="accent1"/>
+          </a:effectRef>
+          <a:fontRef idx="minor">
+            <a:schemeClr val="lt1"/>
+          </a:fontRef>
+        </p:style>
+        <p:txBody>
+          <a:bodyPr rtlCol="0" anchor="ctr"/>
+          <a:lstStyle/>
+          <a:p>
+            <a:pPr algn="ctr"/>
+          </a:p>
+        </p:txBody>
+      </p:sp>
+      <p:sp>
+        <p:nvSpPr>
+          <p:cNvPr id="3" name="TextBox 2"/>
+          <p:cNvSpPr txBox="1"/>
+          <p:nvPr/>
+        </p:nvSpPr>
+        <p:spPr>
+          <a:xfrm>
+            <a:off x="731520" y="365760"/>
+            <a:ext cx="10728655" cy="822960"/>
+          </a:xfrm>
+          <a:prstGeom prst="rect">
+            <a:avLst/>
+          </a:prstGeom>
+          <a:noFill/>
+        </p:spPr>
+        <p:txBody>
+          <a:bodyPr wrap="square" lIns="0" tIns="0" rIns="0" bIns="0">
+            <a:spAutoFit/>
+          </a:bodyPr>
+          <a:lstStyle/>
+          <a:p>
+            <a:pPr>
+              <a:defRPr sz="1000" b="1">
+                <a:solidFill>
+                  <a:srgbClr val="0284C7"/>
+                </a:solidFill>
+                <a:latin typeface="Calibri"/>
+              </a:defRPr>
+            </a:pPr>
+            <a:r>
+              <a:t>PROBLEM STATEMENT &amp; CLINICAL CONTEXT</a:t>
+            </a:r>
+          </a:p>
+          <a:p>
+            <a:pPr>
+              <a:spcBef>
+                <a:spcPts val="300"/>
+              </a:spcBef>
+              <a:defRPr sz="2400" b="1">
+                <a:solidFill>
+                  <a:srgbClr val="0F2942"/>
+                </a:solidFill>
+                <a:latin typeface="Calibri"/>
+              </a:defRPr>
+            </a:pPr>
+            <a:r>
+              <a:t>Clinical Crisis &amp; Project Motivation</a:t>
+            </a:r>
+          </a:p>
+        </p:txBody>
+      </p:sp>
+      <p:sp>
+        <p:nvSpPr>
+          <p:cNvPr id="4" name="Rounded Rectangle 3"/>
+          <p:cNvSpPr/>
+          <p:nvPr/>
+        </p:nvSpPr>
+        <p:spPr>
+          <a:xfrm>
+            <a:off x="731520" y="1463040"/>
+            <a:ext cx="3474720" cy="4754880"/>
+          </a:xfrm>
+          <a:prstGeom prst="roundRect">
+            <a:avLst/>
+          </a:prstGeom>
+          <a:solidFill>
+            <a:srgbClr val="F8FAFC"/>
+          </a:solidFill>
+          <a:ln w="25400">
+            <a:solidFill>
+              <a:srgbClr val="E11D48"/>
+            </a:solidFill>
+          </a:ln>
+        </p:spPr>
+        <p:style>
+          <a:lnRef idx="1">
+            <a:schemeClr val="accent1"/>
+          </a:lnRef>
+          <a:fillRef idx="3">
+            <a:schemeClr val="accent1"/>
+          </a:fillRef>
+          <a:effectRef idx="2">
+            <a:schemeClr val="accent1"/>
+          </a:effectRef>
+          <a:fontRef idx="minor">
+            <a:schemeClr val="lt1"/>
+          </a:fontRef>
+        </p:style>
+        <p:txBody>
+          <a:bodyPr rtlCol="0" anchor="ctr" wrap="square"/>
+          <a:lstStyle/>
+          <a:p>
+            <a:pPr algn="ctr">
+              <a:defRPr sz="1600" b="1">
+                <a:solidFill>
+                  <a:srgbClr val="E11D48"/>
+                </a:solidFill>
+                <a:latin typeface="Calibri"/>
+              </a:defRPr>
+            </a:pPr>
+            <a:r>
+              <a:t>Cognitive &amp; Documentation Overload</a:t>
+            </a:r>
+          </a:p>
+          <a:p>
+            <a:pPr>
+              <a:spcBef>
+                <a:spcPts val="1400"/>
+              </a:spcBef>
+              <a:defRPr sz="1200">
+                <a:solidFill>
+                  <a:srgbClr val="334155"/>
+                </a:solidFill>
+                <a:latin typeface="Calibri"/>
+              </a:defRPr>
+            </a:pPr>
+            <a:r>
+              <a:t>• Physicians spend over 2 hours on EHR data entry for every 1 hour of patient care.</a:t>
+            </a:r>
+            <a:br/>
+            <a:r>
+              <a:t>• Over 80% of clinical data is trapped in unstructured shorthand notes (SOB, DOE, PMH, c/o).</a:t>
+            </a:r>
+            <a:br/>
+            <a:r>
+              <a:t>• Severe physician burnout leading to rushed consultations and missed findings.</a:t>
+            </a:r>
+          </a:p>
+        </p:txBody>
+      </p:sp>
+      <p:sp>
+        <p:nvSpPr>
+          <p:cNvPr id="5" name="Rounded Rectangle 4"/>
+          <p:cNvSpPr/>
+          <p:nvPr/>
+        </p:nvSpPr>
+        <p:spPr>
+          <a:xfrm>
+            <a:off x="4343400" y="1463040"/>
+            <a:ext cx="3474720" cy="4754880"/>
+          </a:xfrm>
+          <a:prstGeom prst="roundRect">
+            <a:avLst/>
+          </a:prstGeom>
+          <a:solidFill>
+            <a:srgbClr val="F8FAFC"/>
+          </a:solidFill>
+          <a:ln w="25400">
+            <a:solidFill>
+              <a:srgbClr val="F59E0B"/>
+            </a:solidFill>
+          </a:ln>
+        </p:spPr>
+        <p:style>
+          <a:lnRef idx="1">
+            <a:schemeClr val="accent1"/>
+          </a:lnRef>
+          <a:fillRef idx="3">
+            <a:schemeClr val="accent1"/>
+          </a:fillRef>
+          <a:effectRef idx="2">
+            <a:schemeClr val="accent1"/>
+          </a:effectRef>
+          <a:fontRef idx="minor">
+            <a:schemeClr val="lt1"/>
+          </a:fontRef>
+        </p:style>
+        <p:txBody>
+          <a:bodyPr rtlCol="0" anchor="ctr" wrap="square"/>
+          <a:lstStyle/>
+          <a:p>
+            <a:pPr algn="ctr">
+              <a:defRPr sz="1600" b="1">
+                <a:solidFill>
+                  <a:srgbClr val="F59E0B"/>
+                </a:solidFill>
+                <a:latin typeface="Calibri"/>
+              </a:defRPr>
+            </a:pPr>
+            <a:r>
+              <a:t>Diagnostic Errors &amp; Anchoring Bias</a:t>
+            </a:r>
+          </a:p>
+          <a:p>
+            <a:pPr>
+              <a:spcBef>
+                <a:spcPts val="1400"/>
+              </a:spcBef>
+              <a:defRPr sz="1200">
+                <a:solidFill>
+                  <a:srgbClr val="334155"/>
+                </a:solidFill>
+                <a:latin typeface="Calibri"/>
+              </a:defRPr>
+            </a:pPr>
+            <a:r>
+              <a:t>• Over 800,000 Americans die or are permanently disabled annually from diagnostic error.</a:t>
+            </a:r>
+            <a:br/>
+            <a:r>
+              <a:t>• Clinicians under time pressure fall into cognitive anchoring bias—missing rare conditions, atypical presentations, and regional tropical outbreaks (Nipah, KFD, Dengue).</a:t>
+            </a:r>
+          </a:p>
+        </p:txBody>
+      </p:sp>
+      <p:sp>
+        <p:nvSpPr>
+          <p:cNvPr id="6" name="Rounded Rectangle 5"/>
+          <p:cNvSpPr/>
+          <p:nvPr/>
+        </p:nvSpPr>
+        <p:spPr>
+          <a:xfrm>
+            <a:off x="7955280" y="1463040"/>
+            <a:ext cx="3474720" cy="4754880"/>
+          </a:xfrm>
+          <a:prstGeom prst="roundRect">
+            <a:avLst/>
+          </a:prstGeom>
+          <a:solidFill>
+            <a:srgbClr val="F8FAFC"/>
+          </a:solidFill>
+          <a:ln w="25400">
+            <a:solidFill>
+              <a:srgbClr val="0284C7"/>
+            </a:solidFill>
+          </a:ln>
+        </p:spPr>
+        <p:style>
+          <a:lnRef idx="1">
+            <a:schemeClr val="accent1"/>
+          </a:lnRef>
+          <a:fillRef idx="3">
+            <a:schemeClr val="accent1"/>
+          </a:fillRef>
+          <a:effectRef idx="2">
+            <a:schemeClr val="accent1"/>
+          </a:effectRef>
+          <a:fontRef idx="minor">
+            <a:schemeClr val="lt1"/>
+          </a:fontRef>
+        </p:style>
+        <p:txBody>
+          <a:bodyPr rtlCol="0" anchor="ctr" wrap="square"/>
+          <a:lstStyle/>
+          <a:p>
+            <a:pPr algn="ctr">
+              <a:defRPr sz="1600" b="1">
+                <a:solidFill>
+                  <a:srgbClr val="0284C7"/>
+                </a:solidFill>
+                <a:latin typeface="Calibri"/>
+              </a:defRPr>
+            </a:pPr>
+            <a:r>
+              <a:t>The Dangers of Raw LLMs in Healthcare</a:t>
+            </a:r>
+          </a:p>
+          <a:p>
+            <a:pPr>
+              <a:spcBef>
+                <a:spcPts val="1400"/>
+              </a:spcBef>
+              <a:defRPr sz="1200">
+                <a:solidFill>
+                  <a:srgbClr val="334155"/>
+                </a:solidFill>
+                <a:latin typeface="Calibri"/>
+              </a:defRPr>
+            </a:pPr>
+            <a:r>
+              <a:t>• Generic chatbots (ChatGPT, Claude) hallucinate non-existent medical citations and dosages.</a:t>
+            </a:r>
+            <a:br/>
+            <a:r>
+              <a:t>• Stochastic variance violates medical determinism and reproducibility standards.</a:t>
+            </a:r>
+            <a:br/>
+            <a:r>
+              <a:t>• Cloud APIs transmit unencrypted Protected Health Information (PHI), violating HIPAA.</a:t>
+            </a:r>
+          </a:p>
+        </p:txBody>
+      </p:sp>
+    </p:spTree>
+  </p:cSld>
+  <p:clrMapOvr>
+    <a:masterClrMapping/>
+  </p:clrMapOvr>
+</p:sld>
+</file>
+
+<file path=ppt/slides/slide20.xml><?xml version="1.0" encoding="utf-8"?>
+<p:sld xmlns:a="http://schemas.openxmlformats.org/drawingml/2006/main" xmlns:p="http://schemas.openxmlformats.org/presentationml/2006/main" xmlns:r="http://schemas.openxmlformats.org/officeDocument/2006/relationships">
+  <p:cSld>
+    <p:spTree>
+      <p:nvGrpSpPr>
+        <p:cNvPr id="1" name=""/>
+        <p:cNvGrpSpPr/>
+        <p:nvPr/>
+      </p:nvGrpSpPr>
+      <p:grpSpPr/>
+      <p:sp>
+        <p:nvSpPr>
+          <p:cNvPr id="2" name="Rectangle 1"/>
+          <p:cNvSpPr/>
+          <p:nvPr/>
+        </p:nvSpPr>
+        <p:spPr>
+          <a:xfrm>
+            <a:off x="0" y="0"/>
+            <a:ext cx="12191695" cy="6858000"/>
+          </a:xfrm>
+          <a:prstGeom prst="rect">
+            <a:avLst/>
+          </a:prstGeom>
+          <a:solidFill>
+            <a:srgbClr val="FFFFFF"/>
+          </a:solidFill>
+          <a:ln>
+            <a:noFill/>
+          </a:ln>
+        </p:spPr>
+        <p:style>
+          <a:lnRef idx="1">
+            <a:schemeClr val="accent1"/>
+          </a:lnRef>
+          <a:fillRef idx="3">
+            <a:schemeClr val="accent1"/>
+          </a:fillRef>
+          <a:effectRef idx="2">
+            <a:schemeClr val="accent1"/>
+          </a:effectRef>
+          <a:fontRef idx="minor">
+            <a:schemeClr val="lt1"/>
+          </a:fontRef>
+        </p:style>
+        <p:txBody>
+          <a:bodyPr rtlCol="0" anchor="ctr"/>
+          <a:lstStyle/>
+          <a:p>
+            <a:pPr algn="ctr"/>
+          </a:p>
+        </p:txBody>
+      </p:sp>
+      <p:sp>
+        <p:nvSpPr>
+          <p:cNvPr id="3" name="TextBox 2"/>
+          <p:cNvSpPr txBox="1"/>
+          <p:nvPr/>
+        </p:nvSpPr>
+        <p:spPr>
+          <a:xfrm>
+            <a:off x="731520" y="365760"/>
+            <a:ext cx="10728655" cy="822960"/>
+          </a:xfrm>
+          <a:prstGeom prst="rect">
+            <a:avLst/>
+          </a:prstGeom>
+          <a:noFill/>
+        </p:spPr>
+        <p:txBody>
+          <a:bodyPr wrap="square" lIns="0" tIns="0" rIns="0" bIns="0">
+            <a:spAutoFit/>
+          </a:bodyPr>
+          <a:lstStyle/>
+          <a:p>
+            <a:pPr>
+              <a:defRPr sz="1000" b="1">
+                <a:solidFill>
+                  <a:srgbClr val="0284C7"/>
+                </a:solidFill>
+                <a:latin typeface="Calibri"/>
+              </a:defRPr>
+            </a:pPr>
+            <a:r>
+              <a:t>SECURITY &amp; LEGAL VERIFICATION</a:t>
+            </a:r>
+          </a:p>
+          <a:p>
+            <a:pPr>
+              <a:spcBef>
+                <a:spcPts val="300"/>
+              </a:spcBef>
+              <a:defRPr sz="2400" b="1">
+                <a:solidFill>
+                  <a:srgbClr val="0F2942"/>
+                </a:solidFill>
+                <a:latin typeface="Calibri"/>
+              </a:defRPr>
+            </a:pPr>
+            <a:r>
+              <a:t>Person 4: Cryptographic Provenance &amp; Public Tamper-Evident Portal</a:t>
+            </a:r>
+          </a:p>
+        </p:txBody>
+      </p:sp>
+      <p:sp>
+        <p:nvSpPr>
+          <p:cNvPr id="4" name="Rounded Rectangle 3"/>
+          <p:cNvSpPr/>
+          <p:nvPr/>
+        </p:nvSpPr>
+        <p:spPr>
+          <a:xfrm>
+            <a:off x="731520" y="1463040"/>
+            <a:ext cx="5212080" cy="4754880"/>
+          </a:xfrm>
+          <a:prstGeom prst="roundRect">
+            <a:avLst/>
+          </a:prstGeom>
+          <a:solidFill>
+            <a:srgbClr val="F8FAFC"/>
+          </a:solidFill>
+          <a:ln w="19050">
+            <a:solidFill>
+              <a:srgbClr val="10B981"/>
+            </a:solidFill>
+          </a:ln>
+        </p:spPr>
+        <p:style>
+          <a:lnRef idx="1">
+            <a:schemeClr val="accent1"/>
+          </a:lnRef>
+          <a:fillRef idx="3">
+            <a:schemeClr val="accent1"/>
+          </a:fillRef>
+          <a:effectRef idx="2">
+            <a:schemeClr val="accent1"/>
+          </a:effectRef>
+          <a:fontRef idx="minor">
+            <a:schemeClr val="lt1"/>
+          </a:fontRef>
+        </p:style>
+        <p:txBody>
+          <a:bodyPr rtlCol="0" anchor="ctr" wrap="square"/>
+          <a:lstStyle/>
+          <a:p>
+            <a:pPr algn="ctr">
+              <a:defRPr sz="1500" b="1">
+                <a:solidFill>
+                  <a:srgbClr val="10B981"/>
+                </a:solidFill>
+                <a:latin typeface="Calibri"/>
+              </a:defRPr>
+            </a:pPr>
+            <a:r>
+              <a:t>SHA-256 Canonical Hashing &amp; Document Generation</a:t>
+            </a:r>
+          </a:p>
+          <a:p>
+            <a:pPr>
+              <a:spcBef>
+                <a:spcPts val="1200"/>
+              </a:spcBef>
+              <a:defRPr sz="1200">
+                <a:solidFill>
+                  <a:srgbClr val="334155"/>
+                </a:solidFill>
+                <a:latin typeface="Calibri"/>
+              </a:defRPr>
+            </a:pPr>
+            <a:r>
+              <a:t>• Canonical JSON Normalization:</a:t>
+            </a:r>
+            <a:br/>
+            <a:r>
+              <a:t>  Keys are sorted alphabetically with compact delimiters before hashing, ensuring identical hashes regardless of formatting differences.</a:t>
+            </a:r>
+            <a:br/>
+            <a:br/>
+            <a:r>
+              <a:t>• Immutable SHA-256 Digital Signature:</a:t>
+            </a:r>
+            <a:br/>
+            <a:r>
+              <a:t>  hashlib.sha256(canonical_bytes).hexdigest() computes a 64-character tamper-evident digest permanently stored in the database.</a:t>
+            </a:r>
+            <a:br/>
+            <a:br/>
+            <a:r>
+              <a:t>• Certified PDF &amp; DOCX Generation:</a:t>
+            </a:r>
+            <a:br/>
+            <a:r>
+              <a:t>  - Hospital-grade PDFs generated via FPDF2 with clinician registration badges and QR codes.</a:t>
+            </a:r>
+            <a:br/>
+            <a:r>
+              <a:t>  - Formatted Microsoft Word DOCX exported via python-docx.</a:t>
+            </a:r>
+          </a:p>
+        </p:txBody>
+      </p:sp>
+      <p:sp>
+        <p:nvSpPr>
+          <p:cNvPr id="5" name="Rounded Rectangle 4"/>
+          <p:cNvSpPr/>
+          <p:nvPr/>
+        </p:nvSpPr>
+        <p:spPr>
+          <a:xfrm>
+            <a:off x="6217920" y="1463040"/>
+            <a:ext cx="5212080" cy="4754880"/>
+          </a:xfrm>
+          <a:prstGeom prst="roundRect">
+            <a:avLst/>
+          </a:prstGeom>
+          <a:solidFill>
+            <a:srgbClr val="F8FAFC"/>
+          </a:solidFill>
+          <a:ln w="19050">
+            <a:solidFill>
+              <a:srgbClr val="0284C7"/>
+            </a:solidFill>
+          </a:ln>
+        </p:spPr>
+        <p:style>
+          <a:lnRef idx="1">
+            <a:schemeClr val="accent1"/>
+          </a:lnRef>
+          <a:fillRef idx="3">
+            <a:schemeClr val="accent1"/>
+          </a:fillRef>
+          <a:effectRef idx="2">
+            <a:schemeClr val="accent1"/>
+          </a:effectRef>
+          <a:fontRef idx="minor">
+            <a:schemeClr val="lt1"/>
+          </a:fontRef>
+        </p:style>
+        <p:txBody>
+          <a:bodyPr rtlCol="0" anchor="ctr" wrap="square"/>
+          <a:lstStyle/>
+          <a:p>
+            <a:pPr algn="ctr">
+              <a:defRPr sz="1500" b="1">
+                <a:solidFill>
+                  <a:srgbClr val="0284C7"/>
+                </a:solidFill>
+                <a:latin typeface="Calibri"/>
+              </a:defRPr>
+            </a:pPr>
+            <a:r>
+              <a:t>Public Verification Portal (/verify/[code] &amp; /verify/hash)</a:t>
+            </a:r>
+          </a:p>
+          <a:p>
+            <a:pPr>
+              <a:spcBef>
+                <a:spcPts val="1200"/>
+              </a:spcBef>
+              <a:defRPr sz="1200">
+                <a:solidFill>
+                  <a:srgbClr val="334155"/>
+                </a:solidFill>
+                <a:latin typeface="Calibri"/>
+              </a:defRPr>
+            </a:pPr>
+            <a:r>
+              <a:t>• Instant Multi-Party Authenticity Check:</a:t>
+            </a:r>
+            <a:br/>
+            <a:r>
+              <a:t>  Pharmacists, insurers, or receiving hospitals visit the public portal at /verify/[code] or upload document hashes to verify origin.</a:t>
+            </a:r>
+            <a:br/>
+            <a:br/>
+            <a:r>
+              <a:t>• Zero-Trust Cryptographic Guarantee:</a:t>
+            </a:r>
+            <a:br/>
+            <a:r>
+              <a:t>  If an attacker alters even a single dosage or date in the note, the re-computed SHA-256 hash mismatches, flagging 'DOCUMENT COMPROMISED' immediately.</a:t>
+            </a:r>
+            <a:br/>
+            <a:br/>
+            <a:r>
+              <a:t>• Verified Clinical Ledger (verified_documents.json):</a:t>
+            </a:r>
+            <a:br/>
+            <a:r>
+              <a:t>  Backs the public registry with high-security verified document fingerprints.</a:t>
+            </a:r>
+          </a:p>
+        </p:txBody>
+      </p:sp>
+    </p:spTree>
+  </p:cSld>
+  <p:clrMapOvr>
+    <a:masterClrMapping/>
+  </p:clrMapOvr>
+</p:sld>
+</file>
+
+<file path=ppt/slides/slide21.xml><?xml version="1.0" encoding="utf-8"?>
+<p:sld xmlns:a="http://schemas.openxmlformats.org/drawingml/2006/main" xmlns:p="http://schemas.openxmlformats.org/presentationml/2006/main" xmlns:r="http://schemas.openxmlformats.org/officeDocument/2006/relationships">
+  <p:cSld>
+    <p:spTree>
+      <p:nvGrpSpPr>
+        <p:cNvPr id="1" name=""/>
+        <p:cNvGrpSpPr/>
+        <p:nvPr/>
+      </p:nvGrpSpPr>
+      <p:grpSpPr/>
+      <p:sp>
+        <p:nvSpPr>
+          <p:cNvPr id="2" name="Rectangle 1"/>
+          <p:cNvSpPr/>
+          <p:nvPr/>
+        </p:nvSpPr>
+        <p:spPr>
+          <a:xfrm>
+            <a:off x="0" y="0"/>
+            <a:ext cx="12191695" cy="6858000"/>
+          </a:xfrm>
+          <a:prstGeom prst="rect">
+            <a:avLst/>
+          </a:prstGeom>
+          <a:solidFill>
+            <a:srgbClr val="0A192F"/>
+          </a:solidFill>
+          <a:ln>
+            <a:noFill/>
+          </a:ln>
+        </p:spPr>
+        <p:style>
+          <a:lnRef idx="1">
+            <a:schemeClr val="accent1"/>
+          </a:lnRef>
+          <a:fillRef idx="3">
+            <a:schemeClr val="accent1"/>
+          </a:fillRef>
+          <a:effectRef idx="2">
+            <a:schemeClr val="accent1"/>
+          </a:effectRef>
+          <a:fontRef idx="minor">
+            <a:schemeClr val="lt1"/>
+          </a:fontRef>
+        </p:style>
+        <p:txBody>
+          <a:bodyPr rtlCol="0" anchor="ctr"/>
+          <a:lstStyle/>
+          <a:p>
+            <a:pPr algn="ctr"/>
+          </a:p>
+        </p:txBody>
+      </p:sp>
+      <p:sp>
+        <p:nvSpPr>
+          <p:cNvPr id="3" name="TextBox 2"/>
+          <p:cNvSpPr txBox="1"/>
+          <p:nvPr/>
+        </p:nvSpPr>
+        <p:spPr>
+          <a:xfrm>
+            <a:off x="731520" y="365760"/>
+            <a:ext cx="10728655" cy="822960"/>
+          </a:xfrm>
+          <a:prstGeom prst="rect">
+            <a:avLst/>
+          </a:prstGeom>
+          <a:noFill/>
+        </p:spPr>
+        <p:txBody>
+          <a:bodyPr wrap="square" lIns="0" tIns="0" rIns="0" bIns="0">
+            <a:spAutoFit/>
+          </a:bodyPr>
+          <a:lstStyle/>
+          <a:p>
+            <a:pPr>
+              <a:defRPr sz="1000" b="1">
+                <a:solidFill>
+                  <a:srgbClr val="38BDF8"/>
+                </a:solidFill>
+                <a:latin typeface="Calibri"/>
+              </a:defRPr>
+            </a:pPr>
+            <a:r>
+              <a:t>SCIENTIFIC VALIDATION</a:t>
+            </a:r>
+          </a:p>
+          <a:p>
+            <a:pPr>
+              <a:spcBef>
+                <a:spcPts val="300"/>
+              </a:spcBef>
+              <a:defRPr sz="2400" b="1">
+                <a:solidFill>
+                  <a:srgbClr val="FFFFFF"/>
+                </a:solidFill>
+                <a:latin typeface="Calibri"/>
+              </a:defRPr>
+            </a:pPr>
+            <a:r>
+              <a:t>Person 4: Empirical Benchmark Evaluation (80/80 Passed — 100% Accuracy)</a:t>
+            </a:r>
+          </a:p>
+        </p:txBody>
+      </p:sp>
       <p:pic>
         <p:nvPicPr>
-          <p:cNvPr id="2" name="Picture 1" descr="DocAssistIQ_Architecture_PPT_Slide.png"/>
+          <p:cNvPr id="4" name="Picture 3" descr="benchmark_chart_4k.png"/>
           <p:cNvPicPr>
             <a:picLocks noChangeAspect="1"/>
           </p:cNvPicPr>
@@ -3237,14 +7464,1693 @@
         </p:blipFill>
         <p:spPr>
           <a:xfrm>
-            <a:off x="365760" y="274320"/>
-            <a:ext cx="11460175" cy="6446348"/>
+            <a:off x="731520" y="1280160"/>
+            <a:ext cx="10728655" cy="5948443"/>
           </a:xfrm>
           <a:prstGeom prst="rect">
             <a:avLst/>
           </a:prstGeom>
         </p:spPr>
       </p:pic>
+    </p:spTree>
+  </p:cSld>
+  <p:clrMapOvr>
+    <a:masterClrMapping/>
+  </p:clrMapOvr>
+</p:sld>
+</file>
+
+<file path=ppt/slides/slide22.xml><?xml version="1.0" encoding="utf-8"?>
+<p:sld xmlns:a="http://schemas.openxmlformats.org/drawingml/2006/main" xmlns:p="http://schemas.openxmlformats.org/presentationml/2006/main" xmlns:r="http://schemas.openxmlformats.org/officeDocument/2006/relationships">
+  <p:cSld>
+    <p:spTree>
+      <p:nvGrpSpPr>
+        <p:cNvPr id="1" name=""/>
+        <p:cNvGrpSpPr/>
+        <p:nvPr/>
+      </p:nvGrpSpPr>
+      <p:grpSpPr/>
+      <p:sp>
+        <p:nvSpPr>
+          <p:cNvPr id="2" name="Rectangle 1"/>
+          <p:cNvSpPr/>
+          <p:nvPr/>
+        </p:nvSpPr>
+        <p:spPr>
+          <a:xfrm>
+            <a:off x="0" y="0"/>
+            <a:ext cx="12191695" cy="6858000"/>
+          </a:xfrm>
+          <a:prstGeom prst="rect">
+            <a:avLst/>
+          </a:prstGeom>
+          <a:solidFill>
+            <a:srgbClr val="FFFFFF"/>
+          </a:solidFill>
+          <a:ln>
+            <a:noFill/>
+          </a:ln>
+        </p:spPr>
+        <p:style>
+          <a:lnRef idx="1">
+            <a:schemeClr val="accent1"/>
+          </a:lnRef>
+          <a:fillRef idx="3">
+            <a:schemeClr val="accent1"/>
+          </a:fillRef>
+          <a:effectRef idx="2">
+            <a:schemeClr val="accent1"/>
+          </a:effectRef>
+          <a:fontRef idx="minor">
+            <a:schemeClr val="lt1"/>
+          </a:fontRef>
+        </p:style>
+        <p:txBody>
+          <a:bodyPr rtlCol="0" anchor="ctr"/>
+          <a:lstStyle/>
+          <a:p>
+            <a:pPr algn="ctr"/>
+          </a:p>
+        </p:txBody>
+      </p:sp>
+      <p:sp>
+        <p:nvSpPr>
+          <p:cNvPr id="3" name="TextBox 2"/>
+          <p:cNvSpPr txBox="1"/>
+          <p:nvPr/>
+        </p:nvSpPr>
+        <p:spPr>
+          <a:xfrm>
+            <a:off x="731520" y="365760"/>
+            <a:ext cx="10728655" cy="822960"/>
+          </a:xfrm>
+          <a:prstGeom prst="rect">
+            <a:avLst/>
+          </a:prstGeom>
+          <a:noFill/>
+        </p:spPr>
+        <p:txBody>
+          <a:bodyPr wrap="square" lIns="0" tIns="0" rIns="0" bIns="0">
+            <a:spAutoFit/>
+          </a:bodyPr>
+          <a:lstStyle/>
+          <a:p>
+            <a:pPr>
+              <a:defRPr sz="1000" b="1">
+                <a:solidFill>
+                  <a:srgbClr val="0284C7"/>
+                </a:solidFill>
+                <a:latin typeface="Calibri"/>
+              </a:defRPr>
+            </a:pPr>
+            <a:r>
+              <a:t>COMPETITIVE &amp; ARCHITECTURAL ADVANTAGE</a:t>
+            </a:r>
+          </a:p>
+          <a:p>
+            <a:pPr>
+              <a:spcBef>
+                <a:spcPts val="300"/>
+              </a:spcBef>
+              <a:defRPr sz="2400" b="1">
+                <a:solidFill>
+                  <a:srgbClr val="0F2942"/>
+                </a:solidFill>
+                <a:latin typeface="Calibri"/>
+              </a:defRPr>
+            </a:pPr>
+            <a:r>
+              <a:t>System Comparison: DocAssistIQ vs. Traditional EHR vs. Generic AI</a:t>
+            </a:r>
+          </a:p>
+        </p:txBody>
+      </p:sp>
+      <p:graphicFrame>
+        <p:nvGraphicFramePr>
+          <p:cNvPr id="4" name="Table 3"/>
+          <p:cNvGraphicFramePr>
+            <a:graphicFrameLocks noGrp="1"/>
+          </p:cNvGraphicFramePr>
+          <p:nvPr/>
+        </p:nvGraphicFramePr>
+        <p:xfrm>
+          <a:off x="731520" y="1463040"/>
+          <a:ext cx="10728655" cy="4572000"/>
+        </p:xfrm>
+        <a:graphic>
+          <a:graphicData uri="http://schemas.openxmlformats.org/drawingml/2006/table">
+            <a:tbl>
+              <a:tblPr firstRow="1" bandRow="1">
+                <a:tableStyleId>{5C22544A-7EE6-4342-B048-85BDC9FD1C3A}</a:tableStyleId>
+              </a:tblPr>
+              <a:tblGrid>
+                <a:gridCol w="2499055"/>
+                <a:gridCol w="2743200"/>
+                <a:gridCol w="2743200"/>
+                <a:gridCol w="2743200"/>
+              </a:tblGrid>
+              <a:tr h="653142">
+                <a:tc>
+                  <a:txBody>
+                    <a:bodyPr/>
+                    <a:lstStyle/>
+                    <a:p>
+                      <a:pPr>
+                        <a:defRPr sz="1100" b="1">
+                          <a:solidFill>
+                            <a:srgbClr val="FFFFFF"/>
+                          </a:solidFill>
+                          <a:latin typeface="Calibri"/>
+                        </a:defRPr>
+                      </a:pPr>
+                      <a:r>
+                        <a:t>Evaluation Metric</a:t>
+                      </a:r>
+                    </a:p>
+                  </a:txBody>
+                  <a:tcPr>
+                    <a:solidFill>
+                      <a:srgbClr val="0A192F"/>
+                    </a:solidFill>
+                  </a:tcPr>
+                </a:tc>
+                <a:tc>
+                  <a:txBody>
+                    <a:bodyPr/>
+                    <a:lstStyle/>
+                    <a:p>
+                      <a:pPr>
+                        <a:defRPr sz="1100" b="1">
+                          <a:solidFill>
+                            <a:srgbClr val="FFFFFF"/>
+                          </a:solidFill>
+                          <a:latin typeface="Calibri"/>
+                        </a:defRPr>
+                      </a:pPr>
+                      <a:r>
+                        <a:t>Traditional EHR Systems</a:t>
+                      </a:r>
+                    </a:p>
+                  </a:txBody>
+                  <a:tcPr>
+                    <a:solidFill>
+                      <a:srgbClr val="0A192F"/>
+                    </a:solidFill>
+                  </a:tcPr>
+                </a:tc>
+                <a:tc>
+                  <a:txBody>
+                    <a:bodyPr/>
+                    <a:lstStyle/>
+                    <a:p>
+                      <a:pPr>
+                        <a:defRPr sz="1100" b="1">
+                          <a:solidFill>
+                            <a:srgbClr val="FFFFFF"/>
+                          </a:solidFill>
+                          <a:latin typeface="Calibri"/>
+                        </a:defRPr>
+                      </a:pPr>
+                      <a:r>
+                        <a:t>Generic Cloud LLMs (ChatGPT)</a:t>
+                      </a:r>
+                    </a:p>
+                  </a:txBody>
+                  <a:tcPr>
+                    <a:solidFill>
+                      <a:srgbClr val="0A192F"/>
+                    </a:solidFill>
+                  </a:tcPr>
+                </a:tc>
+                <a:tc>
+                  <a:txBody>
+                    <a:bodyPr/>
+                    <a:lstStyle/>
+                    <a:p>
+                      <a:pPr>
+                        <a:defRPr sz="1100" b="1">
+                          <a:solidFill>
+                            <a:srgbClr val="FFFFFF"/>
+                          </a:solidFill>
+                          <a:latin typeface="Calibri"/>
+                        </a:defRPr>
+                      </a:pPr>
+                      <a:r>
+                        <a:t>DocAssistIQ (Our Solution)</a:t>
+                      </a:r>
+                    </a:p>
+                  </a:txBody>
+                  <a:tcPr>
+                    <a:solidFill>
+                      <a:srgbClr val="0A192F"/>
+                    </a:solidFill>
+                  </a:tcPr>
+                </a:tc>
+              </a:tr>
+              <a:tr h="653142">
+                <a:tc>
+                  <a:txBody>
+                    <a:bodyPr/>
+                    <a:lstStyle/>
+                    <a:p>
+                      <a:pPr>
+                        <a:defRPr sz="1050">
+                          <a:solidFill>
+                            <a:srgbClr val="334155"/>
+                          </a:solidFill>
+                          <a:latin typeface="Calibri"/>
+                        </a:defRPr>
+                      </a:pPr>
+                      <a:r>
+                        <a:t>Diagnostic Latency</a:t>
+                      </a:r>
+                    </a:p>
+                  </a:txBody>
+                  <a:tcPr>
+                    <a:solidFill>
+                      <a:srgbClr val="FFFFFF"/>
+                    </a:solidFill>
+                  </a:tcPr>
+                </a:tc>
+                <a:tc>
+                  <a:txBody>
+                    <a:bodyPr/>
+                    <a:lstStyle/>
+                    <a:p>
+                      <a:pPr>
+                        <a:defRPr sz="1050">
+                          <a:solidFill>
+                            <a:srgbClr val="334155"/>
+                          </a:solidFill>
+                          <a:latin typeface="Calibri"/>
+                        </a:defRPr>
+                      </a:pPr>
+                      <a:r>
+                        <a:t>N/A (Passive storage only)</a:t>
+                      </a:r>
+                    </a:p>
+                  </a:txBody>
+                  <a:tcPr>
+                    <a:solidFill>
+                      <a:srgbClr val="FFFFFF"/>
+                    </a:solidFill>
+                  </a:tcPr>
+                </a:tc>
+                <a:tc>
+                  <a:txBody>
+                    <a:bodyPr/>
+                    <a:lstStyle/>
+                    <a:p>
+                      <a:pPr>
+                        <a:defRPr sz="1050">
+                          <a:solidFill>
+                            <a:srgbClr val="334155"/>
+                          </a:solidFill>
+                          <a:latin typeface="Calibri"/>
+                        </a:defRPr>
+                      </a:pPr>
+                      <a:r>
+                        <a:t>3,000ms - 15,000ms (High latency)</a:t>
+                      </a:r>
+                    </a:p>
+                  </a:txBody>
+                  <a:tcPr>
+                    <a:solidFill>
+                      <a:srgbClr val="FFFFFF"/>
+                    </a:solidFill>
+                  </a:tcPr>
+                </a:tc>
+                <a:tc>
+                  <a:txBody>
+                    <a:bodyPr/>
+                    <a:lstStyle/>
+                    <a:p>
+                      <a:pPr>
+                        <a:defRPr sz="1050" b="1">
+                          <a:solidFill>
+                            <a:srgbClr val="0284C7"/>
+                          </a:solidFill>
+                          <a:latin typeface="Calibri"/>
+                        </a:defRPr>
+                      </a:pPr>
+                      <a:r>
+                        <a:t>&lt; 30ms (Deterministic in-memory)</a:t>
+                      </a:r>
+                    </a:p>
+                  </a:txBody>
+                  <a:tcPr>
+                    <a:solidFill>
+                      <a:srgbClr val="FFFFFF"/>
+                    </a:solidFill>
+                  </a:tcPr>
+                </a:tc>
+              </a:tr>
+              <a:tr h="653142">
+                <a:tc>
+                  <a:txBody>
+                    <a:bodyPr/>
+                    <a:lstStyle/>
+                    <a:p>
+                      <a:pPr>
+                        <a:defRPr sz="1050">
+                          <a:solidFill>
+                            <a:srgbClr val="334155"/>
+                          </a:solidFill>
+                          <a:latin typeface="Calibri"/>
+                        </a:defRPr>
+                      </a:pPr>
+                      <a:r>
+                        <a:t>Medical Hallucination Risk</a:t>
+                      </a:r>
+                    </a:p>
+                  </a:txBody>
+                  <a:tcPr>
+                    <a:solidFill>
+                      <a:srgbClr val="F1F5F9"/>
+                    </a:solidFill>
+                  </a:tcPr>
+                </a:tc>
+                <a:tc>
+                  <a:txBody>
+                    <a:bodyPr/>
+                    <a:lstStyle/>
+                    <a:p>
+                      <a:pPr>
+                        <a:defRPr sz="1050">
+                          <a:solidFill>
+                            <a:srgbClr val="334155"/>
+                          </a:solidFill>
+                          <a:latin typeface="Calibri"/>
+                        </a:defRPr>
+                      </a:pPr>
+                      <a:r>
+                        <a:t>Zero (Manual doctor entry)</a:t>
+                      </a:r>
+                    </a:p>
+                  </a:txBody>
+                  <a:tcPr>
+                    <a:solidFill>
+                      <a:srgbClr val="F1F5F9"/>
+                    </a:solidFill>
+                  </a:tcPr>
+                </a:tc>
+                <a:tc>
+                  <a:txBody>
+                    <a:bodyPr/>
+                    <a:lstStyle/>
+                    <a:p>
+                      <a:pPr>
+                        <a:defRPr sz="1050">
+                          <a:solidFill>
+                            <a:srgbClr val="334155"/>
+                          </a:solidFill>
+                          <a:latin typeface="Calibri"/>
+                        </a:defRPr>
+                      </a:pPr>
+                      <a:r>
+                        <a:t>High (Probabilistic fabrication)</a:t>
+                      </a:r>
+                    </a:p>
+                  </a:txBody>
+                  <a:tcPr>
+                    <a:solidFill>
+                      <a:srgbClr val="F1F5F9"/>
+                    </a:solidFill>
+                  </a:tcPr>
+                </a:tc>
+                <a:tc>
+                  <a:txBody>
+                    <a:bodyPr/>
+                    <a:lstStyle/>
+                    <a:p>
+                      <a:pPr>
+                        <a:defRPr sz="1050" b="1">
+                          <a:solidFill>
+                            <a:srgbClr val="0284C7"/>
+                          </a:solidFill>
+                          <a:latin typeface="Calibri"/>
+                        </a:defRPr>
+                      </a:pPr>
+                      <a:r>
+                        <a:t>Zero (Stage 1 deterministic math)</a:t>
+                      </a:r>
+                    </a:p>
+                  </a:txBody>
+                  <a:tcPr>
+                    <a:solidFill>
+                      <a:srgbClr val="F1F5F9"/>
+                    </a:solidFill>
+                  </a:tcPr>
+                </a:tc>
+              </a:tr>
+              <a:tr h="653142">
+                <a:tc>
+                  <a:txBody>
+                    <a:bodyPr/>
+                    <a:lstStyle/>
+                    <a:p>
+                      <a:pPr>
+                        <a:defRPr sz="1050">
+                          <a:solidFill>
+                            <a:srgbClr val="334155"/>
+                          </a:solidFill>
+                          <a:latin typeface="Calibri"/>
+                        </a:defRPr>
+                      </a:pPr>
+                      <a:r>
+                        <a:t>Ambient Voice &amp; Diarization</a:t>
+                      </a:r>
+                    </a:p>
+                  </a:txBody>
+                  <a:tcPr>
+                    <a:solidFill>
+                      <a:srgbClr val="FFFFFF"/>
+                    </a:solidFill>
+                  </a:tcPr>
+                </a:tc>
+                <a:tc>
+                  <a:txBody>
+                    <a:bodyPr/>
+                    <a:lstStyle/>
+                    <a:p>
+                      <a:pPr>
+                        <a:defRPr sz="1050">
+                          <a:solidFill>
+                            <a:srgbClr val="334155"/>
+                          </a:solidFill>
+                          <a:latin typeface="Calibri"/>
+                        </a:defRPr>
+                      </a:pPr>
+                      <a:r>
+                        <a:t>None or basic dictation</a:t>
+                      </a:r>
+                    </a:p>
+                  </a:txBody>
+                  <a:tcPr>
+                    <a:solidFill>
+                      <a:srgbClr val="FFFFFF"/>
+                    </a:solidFill>
+                  </a:tcPr>
+                </a:tc>
+                <a:tc>
+                  <a:txBody>
+                    <a:bodyPr/>
+                    <a:lstStyle/>
+                    <a:p>
+                      <a:pPr>
+                        <a:defRPr sz="1050">
+                          <a:solidFill>
+                            <a:srgbClr val="334155"/>
+                          </a:solidFill>
+                          <a:latin typeface="Calibri"/>
+                        </a:defRPr>
+                      </a:pPr>
+                      <a:r>
+                        <a:t>Speech only (No speaker separation)</a:t>
+                      </a:r>
+                    </a:p>
+                  </a:txBody>
+                  <a:tcPr>
+                    <a:solidFill>
+                      <a:srgbClr val="FFFFFF"/>
+                    </a:solidFill>
+                  </a:tcPr>
+                </a:tc>
+                <a:tc>
+                  <a:txBody>
+                    <a:bodyPr/>
+                    <a:lstStyle/>
+                    <a:p>
+                      <a:pPr>
+                        <a:defRPr sz="1050" b="1">
+                          <a:solidFill>
+                            <a:srgbClr val="0284C7"/>
+                          </a:solidFill>
+                          <a:latin typeface="Calibri"/>
+                        </a:defRPr>
+                      </a:pPr>
+                      <a:r>
+                        <a:t>Dual-Speaker PyAnnote 3.1 Diarization</a:t>
+                      </a:r>
+                    </a:p>
+                  </a:txBody>
+                  <a:tcPr>
+                    <a:solidFill>
+                      <a:srgbClr val="FFFFFF"/>
+                    </a:solidFill>
+                  </a:tcPr>
+                </a:tc>
+              </a:tr>
+              <a:tr h="653142">
+                <a:tc>
+                  <a:txBody>
+                    <a:bodyPr/>
+                    <a:lstStyle/>
+                    <a:p>
+                      <a:pPr>
+                        <a:defRPr sz="1050">
+                          <a:solidFill>
+                            <a:srgbClr val="334155"/>
+                          </a:solidFill>
+                          <a:latin typeface="Calibri"/>
+                        </a:defRPr>
+                      </a:pPr>
+                      <a:r>
+                        <a:t>Negation Resolution</a:t>
+                      </a:r>
+                    </a:p>
+                  </a:txBody>
+                  <a:tcPr>
+                    <a:solidFill>
+                      <a:srgbClr val="F1F5F9"/>
+                    </a:solidFill>
+                  </a:tcPr>
+                </a:tc>
+                <a:tc>
+                  <a:txBody>
+                    <a:bodyPr/>
+                    <a:lstStyle/>
+                    <a:p>
+                      <a:pPr>
+                        <a:defRPr sz="1050">
+                          <a:solidFill>
+                            <a:srgbClr val="334155"/>
+                          </a:solidFill>
+                          <a:latin typeface="Calibri"/>
+                        </a:defRPr>
+                      </a:pPr>
+                      <a:r>
+                        <a:t>None (Fails on denied terms)</a:t>
+                      </a:r>
+                    </a:p>
+                  </a:txBody>
+                  <a:tcPr>
+                    <a:solidFill>
+                      <a:srgbClr val="F1F5F9"/>
+                    </a:solidFill>
+                  </a:tcPr>
+                </a:tc>
+                <a:tc>
+                  <a:txBody>
+                    <a:bodyPr/>
+                    <a:lstStyle/>
+                    <a:p>
+                      <a:pPr>
+                        <a:defRPr sz="1050">
+                          <a:solidFill>
+                            <a:srgbClr val="334155"/>
+                          </a:solidFill>
+                          <a:latin typeface="Calibri"/>
+                        </a:defRPr>
+                      </a:pPr>
+                      <a:r>
+                        <a:t>Inconsistent across turns</a:t>
+                      </a:r>
+                    </a:p>
+                  </a:txBody>
+                  <a:tcPr>
+                    <a:solidFill>
+                      <a:srgbClr val="F1F5F9"/>
+                    </a:solidFill>
+                  </a:tcPr>
+                </a:tc>
+                <a:tc>
+                  <a:txBody>
+                    <a:bodyPr/>
+                    <a:lstStyle/>
+                    <a:p>
+                      <a:pPr>
+                        <a:defRPr sz="1050" b="1">
+                          <a:solidFill>
+                            <a:srgbClr val="0284C7"/>
+                          </a:solidFill>
+                          <a:latin typeface="Calibri"/>
+                        </a:defRPr>
+                      </a:pPr>
+                      <a:r>
+                        <a:t>Deterministic clause-level scope parser</a:t>
+                      </a:r>
+                    </a:p>
+                  </a:txBody>
+                  <a:tcPr>
+                    <a:solidFill>
+                      <a:srgbClr val="F1F5F9"/>
+                    </a:solidFill>
+                  </a:tcPr>
+                </a:tc>
+              </a:tr>
+              <a:tr h="653142">
+                <a:tc>
+                  <a:txBody>
+                    <a:bodyPr/>
+                    <a:lstStyle/>
+                    <a:p>
+                      <a:pPr>
+                        <a:defRPr sz="1050">
+                          <a:solidFill>
+                            <a:srgbClr val="334155"/>
+                          </a:solidFill>
+                          <a:latin typeface="Calibri"/>
+                        </a:defRPr>
+                      </a:pPr>
+                      <a:r>
+                        <a:t>Regional Outbreak Surveillance</a:t>
+                      </a:r>
+                    </a:p>
+                  </a:txBody>
+                  <a:tcPr>
+                    <a:solidFill>
+                      <a:srgbClr val="FFFFFF"/>
+                    </a:solidFill>
+                  </a:tcPr>
+                </a:tc>
+                <a:tc>
+                  <a:txBody>
+                    <a:bodyPr/>
+                    <a:lstStyle/>
+                    <a:p>
+                      <a:pPr>
+                        <a:defRPr sz="1050">
+                          <a:solidFill>
+                            <a:srgbClr val="334155"/>
+                          </a:solidFill>
+                          <a:latin typeface="Calibri"/>
+                        </a:defRPr>
+                      </a:pPr>
+                      <a:r>
+                        <a:t>None (Siloed databases)</a:t>
+                      </a:r>
+                    </a:p>
+                  </a:txBody>
+                  <a:tcPr>
+                    <a:solidFill>
+                      <a:srgbClr val="FFFFFF"/>
+                    </a:solidFill>
+                  </a:tcPr>
+                </a:tc>
+                <a:tc>
+                  <a:txBody>
+                    <a:bodyPr/>
+                    <a:lstStyle/>
+                    <a:p>
+                      <a:pPr>
+                        <a:defRPr sz="1050">
+                          <a:solidFill>
+                            <a:srgbClr val="334155"/>
+                          </a:solidFill>
+                          <a:latin typeface="Calibri"/>
+                        </a:defRPr>
+                      </a:pPr>
+                      <a:r>
+                        <a:t>Static training cutoff (Blind to local)</a:t>
+                      </a:r>
+                    </a:p>
+                  </a:txBody>
+                  <a:tcPr>
+                    <a:solidFill>
+                      <a:srgbClr val="FFFFFF"/>
+                    </a:solidFill>
+                  </a:tcPr>
+                </a:tc>
+                <a:tc>
+                  <a:txBody>
+                    <a:bodyPr/>
+                    <a:lstStyle/>
+                    <a:p>
+                      <a:pPr>
+                        <a:defRPr sz="1050" b="1">
+                          <a:solidFill>
+                            <a:srgbClr val="0284C7"/>
+                          </a:solidFill>
+                          <a:latin typeface="Calibri"/>
+                        </a:defRPr>
+                      </a:pPr>
+                      <a:r>
+                        <a:t>India 28-State / 8-UT NCDC/IDSP Radar</a:t>
+                      </a:r>
+                    </a:p>
+                  </a:txBody>
+                  <a:tcPr>
+                    <a:solidFill>
+                      <a:srgbClr val="FFFFFF"/>
+                    </a:solidFill>
+                  </a:tcPr>
+                </a:tc>
+              </a:tr>
+              <a:tr h="653148">
+                <a:tc>
+                  <a:txBody>
+                    <a:bodyPr/>
+                    <a:lstStyle/>
+                    <a:p>
+                      <a:pPr>
+                        <a:defRPr sz="1050">
+                          <a:solidFill>
+                            <a:srgbClr val="334155"/>
+                          </a:solidFill>
+                          <a:latin typeface="Calibri"/>
+                        </a:defRPr>
+                      </a:pPr>
+                      <a:r>
+                        <a:t>Tamper-Evident Provenance</a:t>
+                      </a:r>
+                    </a:p>
+                  </a:txBody>
+                  <a:tcPr>
+                    <a:solidFill>
+                      <a:srgbClr val="F1F5F9"/>
+                    </a:solidFill>
+                  </a:tcPr>
+                </a:tc>
+                <a:tc>
+                  <a:txBody>
+                    <a:bodyPr/>
+                    <a:lstStyle/>
+                    <a:p>
+                      <a:pPr>
+                        <a:defRPr sz="1050">
+                          <a:solidFill>
+                            <a:srgbClr val="334155"/>
+                          </a:solidFill>
+                          <a:latin typeface="Calibri"/>
+                        </a:defRPr>
+                      </a:pPr>
+                      <a:r>
+                        <a:t>Basic database update timestamp</a:t>
+                      </a:r>
+                    </a:p>
+                  </a:txBody>
+                  <a:tcPr>
+                    <a:solidFill>
+                      <a:srgbClr val="F1F5F9"/>
+                    </a:solidFill>
+                  </a:tcPr>
+                </a:tc>
+                <a:tc>
+                  <a:txBody>
+                    <a:bodyPr/>
+                    <a:lstStyle/>
+                    <a:p>
+                      <a:pPr>
+                        <a:defRPr sz="1050">
+                          <a:solidFill>
+                            <a:srgbClr val="334155"/>
+                          </a:solidFill>
+                          <a:latin typeface="Calibri"/>
+                        </a:defRPr>
+                      </a:pPr>
+                      <a:r>
+                        <a:t>None</a:t>
+                      </a:r>
+                    </a:p>
+                  </a:txBody>
+                  <a:tcPr>
+                    <a:solidFill>
+                      <a:srgbClr val="F1F5F9"/>
+                    </a:solidFill>
+                  </a:tcPr>
+                </a:tc>
+                <a:tc>
+                  <a:txBody>
+                    <a:bodyPr/>
+                    <a:lstStyle/>
+                    <a:p>
+                      <a:pPr>
+                        <a:defRPr sz="1050" b="1">
+                          <a:solidFill>
+                            <a:srgbClr val="0284C7"/>
+                          </a:solidFill>
+                          <a:latin typeface="Calibri"/>
+                        </a:defRPr>
+                      </a:pPr>
+                      <a:r>
+                        <a:t>SHA-256 Cryptographic Record Sealing</a:t>
+                      </a:r>
+                    </a:p>
+                  </a:txBody>
+                  <a:tcPr>
+                    <a:solidFill>
+                      <a:srgbClr val="F1F5F9"/>
+                    </a:solidFill>
+                  </a:tcPr>
+                </a:tc>
+              </a:tr>
+            </a:tbl>
+          </a:graphicData>
+        </a:graphic>
+      </p:graphicFrame>
+    </p:spTree>
+  </p:cSld>
+  <p:clrMapOvr>
+    <a:masterClrMapping/>
+  </p:clrMapOvr>
+</p:sld>
+</file>
+
+<file path=ppt/slides/slide23.xml><?xml version="1.0" encoding="utf-8"?>
+<p:sld xmlns:a="http://schemas.openxmlformats.org/drawingml/2006/main" xmlns:p="http://schemas.openxmlformats.org/presentationml/2006/main" xmlns:r="http://schemas.openxmlformats.org/officeDocument/2006/relationships">
+  <p:cSld>
+    <p:spTree>
+      <p:nvGrpSpPr>
+        <p:cNvPr id="1" name=""/>
+        <p:cNvGrpSpPr/>
+        <p:nvPr/>
+      </p:nvGrpSpPr>
+      <p:grpSpPr/>
+      <p:sp>
+        <p:nvSpPr>
+          <p:cNvPr id="2" name="Rectangle 1"/>
+          <p:cNvSpPr/>
+          <p:nvPr/>
+        </p:nvSpPr>
+        <p:spPr>
+          <a:xfrm>
+            <a:off x="0" y="0"/>
+            <a:ext cx="12191695" cy="6858000"/>
+          </a:xfrm>
+          <a:prstGeom prst="rect">
+            <a:avLst/>
+          </a:prstGeom>
+          <a:solidFill>
+            <a:srgbClr val="FFFFFF"/>
+          </a:solidFill>
+          <a:ln>
+            <a:noFill/>
+          </a:ln>
+        </p:spPr>
+        <p:style>
+          <a:lnRef idx="1">
+            <a:schemeClr val="accent1"/>
+          </a:lnRef>
+          <a:fillRef idx="3">
+            <a:schemeClr val="accent1"/>
+          </a:fillRef>
+          <a:effectRef idx="2">
+            <a:schemeClr val="accent1"/>
+          </a:effectRef>
+          <a:fontRef idx="minor">
+            <a:schemeClr val="lt1"/>
+          </a:fontRef>
+        </p:style>
+        <p:txBody>
+          <a:bodyPr rtlCol="0" anchor="ctr"/>
+          <a:lstStyle/>
+          <a:p>
+            <a:pPr algn="ctr"/>
+          </a:p>
+        </p:txBody>
+      </p:sp>
+      <p:sp>
+        <p:nvSpPr>
+          <p:cNvPr id="3" name="TextBox 2"/>
+          <p:cNvSpPr txBox="1"/>
+          <p:nvPr/>
+        </p:nvSpPr>
+        <p:spPr>
+          <a:xfrm>
+            <a:off x="731520" y="365760"/>
+            <a:ext cx="10728655" cy="822960"/>
+          </a:xfrm>
+          <a:prstGeom prst="rect">
+            <a:avLst/>
+          </a:prstGeom>
+          <a:noFill/>
+        </p:spPr>
+        <p:txBody>
+          <a:bodyPr wrap="square" lIns="0" tIns="0" rIns="0" bIns="0">
+            <a:spAutoFit/>
+          </a:bodyPr>
+          <a:lstStyle/>
+          <a:p>
+            <a:pPr>
+              <a:defRPr sz="1000" b="1">
+                <a:solidFill>
+                  <a:srgbClr val="0284C7"/>
+                </a:solidFill>
+                <a:latin typeface="Calibri"/>
+              </a:defRPr>
+            </a:pPr>
+            <a:r>
+              <a:t>VIVA PREPARATION</a:t>
+            </a:r>
+          </a:p>
+          <a:p>
+            <a:pPr>
+              <a:spcBef>
+                <a:spcPts val="300"/>
+              </a:spcBef>
+              <a:defRPr sz="2400" b="1">
+                <a:solidFill>
+                  <a:srgbClr val="0F2942"/>
+                </a:solidFill>
+                <a:latin typeface="Calibri"/>
+              </a:defRPr>
+            </a:pPr>
+            <a:r>
+              <a:t>Master Faculty Viva Defense Strategy — Top 6 Examiner Challenges</a:t>
+            </a:r>
+          </a:p>
+        </p:txBody>
+      </p:sp>
+      <p:sp>
+        <p:nvSpPr>
+          <p:cNvPr id="4" name="Rounded Rectangle 3"/>
+          <p:cNvSpPr/>
+          <p:nvPr/>
+        </p:nvSpPr>
+        <p:spPr>
+          <a:xfrm>
+            <a:off x="731520" y="1463040"/>
+            <a:ext cx="3474720" cy="2286000"/>
+          </a:xfrm>
+          <a:prstGeom prst="roundRect">
+            <a:avLst/>
+          </a:prstGeom>
+          <a:solidFill>
+            <a:srgbClr val="F8FAFC"/>
+          </a:solidFill>
+          <a:ln w="19050">
+            <a:solidFill>
+              <a:srgbClr val="0284C7"/>
+            </a:solidFill>
+          </a:ln>
+        </p:spPr>
+        <p:style>
+          <a:lnRef idx="1">
+            <a:schemeClr val="accent1"/>
+          </a:lnRef>
+          <a:fillRef idx="3">
+            <a:schemeClr val="accent1"/>
+          </a:fillRef>
+          <a:effectRef idx="2">
+            <a:schemeClr val="accent1"/>
+          </a:effectRef>
+          <a:fontRef idx="minor">
+            <a:schemeClr val="lt1"/>
+          </a:fontRef>
+        </p:style>
+        <p:txBody>
+          <a:bodyPr rtlCol="0" anchor="ctr" wrap="square"/>
+          <a:lstStyle/>
+          <a:p>
+            <a:pPr algn="ctr">
+              <a:defRPr sz="1150" b="1">
+                <a:solidFill>
+                  <a:srgbClr val="0284C7"/>
+                </a:solidFill>
+                <a:latin typeface="Calibri"/>
+              </a:defRPr>
+            </a:pPr>
+            <a:r>
+              <a:t>Are you claiming this replaces a licensed doctor?</a:t>
+            </a:r>
+          </a:p>
+          <a:p>
+            <a:pPr>
+              <a:spcBef>
+                <a:spcPts val="600"/>
+              </a:spcBef>
+              <a:defRPr sz="1000">
+                <a:solidFill>
+                  <a:srgbClr val="334155"/>
+                </a:solidFill>
+                <a:latin typeface="Calibri"/>
+              </a:defRPr>
+            </a:pPr>
+            <a:r>
+              <a:t>NO. DocAssistIQ is strictly a Clinical Decision Support System (CDSS). Every screen and document bears our mandatory legal watermark: 'REFERENCE INFORMATION — CLINICIAN REVIEW REQUIRED'. Final clinical authority rests solely with the physician.</a:t>
+            </a:r>
+          </a:p>
+        </p:txBody>
+      </p:sp>
+      <p:sp>
+        <p:nvSpPr>
+          <p:cNvPr id="5" name="Rounded Rectangle 4"/>
+          <p:cNvSpPr/>
+          <p:nvPr/>
+        </p:nvSpPr>
+        <p:spPr>
+          <a:xfrm>
+            <a:off x="4343400" y="1463040"/>
+            <a:ext cx="3474720" cy="2286000"/>
+          </a:xfrm>
+          <a:prstGeom prst="roundRect">
+            <a:avLst/>
+          </a:prstGeom>
+          <a:solidFill>
+            <a:srgbClr val="F8FAFC"/>
+          </a:solidFill>
+          <a:ln w="19050">
+            <a:solidFill>
+              <a:srgbClr val="0D9488"/>
+            </a:solidFill>
+          </a:ln>
+        </p:spPr>
+        <p:style>
+          <a:lnRef idx="1">
+            <a:schemeClr val="accent1"/>
+          </a:lnRef>
+          <a:fillRef idx="3">
+            <a:schemeClr val="accent1"/>
+          </a:fillRef>
+          <a:effectRef idx="2">
+            <a:schemeClr val="accent1"/>
+          </a:effectRef>
+          <a:fontRef idx="minor">
+            <a:schemeClr val="lt1"/>
+          </a:fontRef>
+        </p:style>
+        <p:txBody>
+          <a:bodyPr rtlCol="0" anchor="ctr" wrap="square"/>
+          <a:lstStyle/>
+          <a:p>
+            <a:pPr algn="ctr">
+              <a:defRPr sz="1150" b="1">
+                <a:solidFill>
+                  <a:srgbClr val="0D9488"/>
+                </a:solidFill>
+                <a:latin typeface="Calibri"/>
+              </a:defRPr>
+            </a:pPr>
+            <a:r>
+              <a:t>How do you guarantee your AI won't hallucinate?</a:t>
+            </a:r>
+          </a:p>
+          <a:p>
+            <a:pPr>
+              <a:spcBef>
+                <a:spcPts val="600"/>
+              </a:spcBef>
+              <a:defRPr sz="1000">
+                <a:solidFill>
+                  <a:srgbClr val="334155"/>
+                </a:solidFill>
+                <a:latin typeface="Calibri"/>
+              </a:defRPr>
+            </a:pPr>
+            <a:r>
+              <a:t>Through our Two-Stage Architecture. Stage 1 ranks candidate diseases deterministically via Python Bayesian priors and Jaccard math. The local LLM in Stage 2 is restricted to summarizing pre-ranked candidates and cannot introduce new conditions.</a:t>
+            </a:r>
+          </a:p>
+        </p:txBody>
+      </p:sp>
+      <p:sp>
+        <p:nvSpPr>
+          <p:cNvPr id="6" name="Rounded Rectangle 5"/>
+          <p:cNvSpPr/>
+          <p:nvPr/>
+        </p:nvSpPr>
+        <p:spPr>
+          <a:xfrm>
+            <a:off x="7955280" y="1463040"/>
+            <a:ext cx="3474720" cy="2286000"/>
+          </a:xfrm>
+          <a:prstGeom prst="roundRect">
+            <a:avLst/>
+          </a:prstGeom>
+          <a:solidFill>
+            <a:srgbClr val="F8FAFC"/>
+          </a:solidFill>
+          <a:ln w="19050">
+            <a:solidFill>
+              <a:srgbClr val="8B5CF6"/>
+            </a:solidFill>
+          </a:ln>
+        </p:spPr>
+        <p:style>
+          <a:lnRef idx="1">
+            <a:schemeClr val="accent1"/>
+          </a:lnRef>
+          <a:fillRef idx="3">
+            <a:schemeClr val="accent1"/>
+          </a:fillRef>
+          <a:effectRef idx="2">
+            <a:schemeClr val="accent1"/>
+          </a:effectRef>
+          <a:fontRef idx="minor">
+            <a:schemeClr val="lt1"/>
+          </a:fontRef>
+        </p:style>
+        <p:txBody>
+          <a:bodyPr rtlCol="0" anchor="ctr" wrap="square"/>
+          <a:lstStyle/>
+          <a:p>
+            <a:pPr algn="ctr">
+              <a:defRPr sz="1150" b="1">
+                <a:solidFill>
+                  <a:srgbClr val="8B5CF6"/>
+                </a:solidFill>
+                <a:latin typeface="Calibri"/>
+              </a:defRPr>
+            </a:pPr>
+            <a:r>
+              <a:t>What if the hospital loses internet connection?</a:t>
+            </a:r>
+          </a:p>
+          <a:p>
+            <a:pPr>
+              <a:spcBef>
+                <a:spcPts val="600"/>
+              </a:spcBef>
+              <a:defRPr sz="1000">
+                <a:solidFill>
+                  <a:srgbClr val="334155"/>
+                </a:solidFill>
+                <a:latin typeface="Calibri"/>
+              </a:defRPr>
+            </a:pPr>
+            <a:r>
+              <a:t>DocAssistIQ operates fully offline. The FastAPI backend, Faster-Whisper ASR, Ollama LLM, PostgreSQL, and our 1,500-condition catalog run on local hospital server hardware without external internet access.</a:t>
+            </a:r>
+          </a:p>
+        </p:txBody>
+      </p:sp>
+      <p:sp>
+        <p:nvSpPr>
+          <p:cNvPr id="7" name="Rounded Rectangle 6"/>
+          <p:cNvSpPr/>
+          <p:nvPr/>
+        </p:nvSpPr>
+        <p:spPr>
+          <a:xfrm>
+            <a:off x="731520" y="3931920"/>
+            <a:ext cx="3474720" cy="2286000"/>
+          </a:xfrm>
+          <a:prstGeom prst="roundRect">
+            <a:avLst/>
+          </a:prstGeom>
+          <a:solidFill>
+            <a:srgbClr val="F8FAFC"/>
+          </a:solidFill>
+          <a:ln w="19050">
+            <a:solidFill>
+              <a:srgbClr val="10B981"/>
+            </a:solidFill>
+          </a:ln>
+        </p:spPr>
+        <p:style>
+          <a:lnRef idx="1">
+            <a:schemeClr val="accent1"/>
+          </a:lnRef>
+          <a:fillRef idx="3">
+            <a:schemeClr val="accent1"/>
+          </a:fillRef>
+          <a:effectRef idx="2">
+            <a:schemeClr val="accent1"/>
+          </a:effectRef>
+          <a:fontRef idx="minor">
+            <a:schemeClr val="lt1"/>
+          </a:fontRef>
+        </p:style>
+        <p:txBody>
+          <a:bodyPr rtlCol="0" anchor="ctr" wrap="square"/>
+          <a:lstStyle/>
+          <a:p>
+            <a:pPr algn="ctr">
+              <a:defRPr sz="1150" b="1">
+                <a:solidFill>
+                  <a:srgbClr val="10B981"/>
+                </a:solidFill>
+                <a:latin typeface="Calibri"/>
+              </a:defRPr>
+            </a:pPr>
+            <a:r>
+              <a:t>How do you protect patient privacy and HIPAA compliance?</a:t>
+            </a:r>
+          </a:p>
+          <a:p>
+            <a:pPr>
+              <a:spcBef>
+                <a:spcPts val="600"/>
+              </a:spcBef>
+              <a:defRPr sz="1000">
+                <a:solidFill>
+                  <a:srgbClr val="334155"/>
+                </a:solidFill>
+                <a:latin typeface="Calibri"/>
+              </a:defRPr>
+            </a:pPr>
+            <a:r>
+              <a:t>Zero Protected Health Information (PHI) leaves the hospital. Ingestion, transcription, diarization, and LLM reasoning run on local GPU/CPU hardware. External API queries transmit only sanitized medical terms, never patient names or IDs.</a:t>
+            </a:r>
+          </a:p>
+        </p:txBody>
+      </p:sp>
+      <p:sp>
+        <p:nvSpPr>
+          <p:cNvPr id="8" name="Rounded Rectangle 7"/>
+          <p:cNvSpPr/>
+          <p:nvPr/>
+        </p:nvSpPr>
+        <p:spPr>
+          <a:xfrm>
+            <a:off x="4343400" y="3931920"/>
+            <a:ext cx="3474720" cy="2286000"/>
+          </a:xfrm>
+          <a:prstGeom prst="roundRect">
+            <a:avLst/>
+          </a:prstGeom>
+          <a:solidFill>
+            <a:srgbClr val="F8FAFC"/>
+          </a:solidFill>
+          <a:ln w="19050">
+            <a:solidFill>
+              <a:srgbClr val="E11D48"/>
+            </a:solidFill>
+          </a:ln>
+        </p:spPr>
+        <p:style>
+          <a:lnRef idx="1">
+            <a:schemeClr val="accent1"/>
+          </a:lnRef>
+          <a:fillRef idx="3">
+            <a:schemeClr val="accent1"/>
+          </a:fillRef>
+          <a:effectRef idx="2">
+            <a:schemeClr val="accent1"/>
+          </a:effectRef>
+          <a:fontRef idx="minor">
+            <a:schemeClr val="lt1"/>
+          </a:fontRef>
+        </p:style>
+        <p:txBody>
+          <a:bodyPr rtlCol="0" anchor="ctr" wrap="square"/>
+          <a:lstStyle/>
+          <a:p>
+            <a:pPr algn="ctr">
+              <a:defRPr sz="1150" b="1">
+                <a:solidFill>
+                  <a:srgbClr val="E11D48"/>
+                </a:solidFill>
+                <a:latin typeface="Calibri"/>
+              </a:defRPr>
+            </a:pPr>
+            <a:r>
+              <a:t>Why WebSockets instead of REST polling for consultations?</a:t>
+            </a:r>
+          </a:p>
+          <a:p>
+            <a:pPr>
+              <a:spcBef>
+                <a:spcPts val="600"/>
+              </a:spcBef>
+              <a:defRPr sz="1000">
+                <a:solidFill>
+                  <a:srgbClr val="334155"/>
+                </a:solidFill>
+                <a:latin typeface="Calibri"/>
+              </a:defRPr>
+            </a:pPr>
+            <a:r>
+              <a:t>Consultations require bidirectional streaming (binary audio chunks upstream, diarized transcript tokens downstream). WebSockets eliminate repetitive HTTP header overhead, reducing latency and server bandwidth by &gt;80%.</a:t>
+            </a:r>
+          </a:p>
+        </p:txBody>
+      </p:sp>
+      <p:sp>
+        <p:nvSpPr>
+          <p:cNvPr id="9" name="Rounded Rectangle 8"/>
+          <p:cNvSpPr/>
+          <p:nvPr/>
+        </p:nvSpPr>
+        <p:spPr>
+          <a:xfrm>
+            <a:off x="7955280" y="3931920"/>
+            <a:ext cx="3474720" cy="2286000"/>
+          </a:xfrm>
+          <a:prstGeom prst="roundRect">
+            <a:avLst/>
+          </a:prstGeom>
+          <a:solidFill>
+            <a:srgbClr val="F8FAFC"/>
+          </a:solidFill>
+          <a:ln w="19050">
+            <a:solidFill>
+              <a:srgbClr val="0F2942"/>
+            </a:solidFill>
+          </a:ln>
+        </p:spPr>
+        <p:style>
+          <a:lnRef idx="1">
+            <a:schemeClr val="accent1"/>
+          </a:lnRef>
+          <a:fillRef idx="3">
+            <a:schemeClr val="accent1"/>
+          </a:fillRef>
+          <a:effectRef idx="2">
+            <a:schemeClr val="accent1"/>
+          </a:effectRef>
+          <a:fontRef idx="minor">
+            <a:schemeClr val="lt1"/>
+          </a:fontRef>
+        </p:style>
+        <p:txBody>
+          <a:bodyPr rtlCol="0" anchor="ctr" wrap="square"/>
+          <a:lstStyle/>
+          <a:p>
+            <a:pPr algn="ctr">
+              <a:defRPr sz="1150" b="1">
+                <a:solidFill>
+                  <a:srgbClr val="0F2942"/>
+                </a:solidFill>
+                <a:latin typeface="Calibri"/>
+              </a:defRPr>
+            </a:pPr>
+            <a:r>
+              <a:t>What proves your system actually works?</a:t>
+            </a:r>
+          </a:p>
+          <a:p>
+            <a:pPr>
+              <a:spcBef>
+                <a:spcPts val="600"/>
+              </a:spcBef>
+              <a:defRPr sz="1000">
+                <a:solidFill>
+                  <a:srgbClr val="334155"/>
+                </a:solidFill>
+                <a:latin typeface="Calibri"/>
+              </a:defRPr>
+            </a:pPr>
+            <a:r>
+              <a:t>Our empirical evaluation harness benchmark_clinical_cases.py tested 80 comprehensive clinical cases across 5 medical categories, achieving a 100% Top-3 diagnostic accuracy with an average latency under 30 milliseconds.</a:t>
+            </a:r>
+          </a:p>
+        </p:txBody>
+      </p:sp>
+    </p:spTree>
+  </p:cSld>
+  <p:clrMapOvr>
+    <a:masterClrMapping/>
+  </p:clrMapOvr>
+</p:sld>
+</file>
+
+<file path=ppt/slides/slide24.xml><?xml version="1.0" encoding="utf-8"?>
+<p:sld xmlns:a="http://schemas.openxmlformats.org/drawingml/2006/main" xmlns:p="http://schemas.openxmlformats.org/presentationml/2006/main" xmlns:r="http://schemas.openxmlformats.org/officeDocument/2006/relationships">
+  <p:cSld>
+    <p:spTree>
+      <p:nvGrpSpPr>
+        <p:cNvPr id="1" name=""/>
+        <p:cNvGrpSpPr/>
+        <p:nvPr/>
+      </p:nvGrpSpPr>
+      <p:grpSpPr/>
+      <p:sp>
+        <p:nvSpPr>
+          <p:cNvPr id="2" name="Rectangle 1"/>
+          <p:cNvSpPr/>
+          <p:nvPr/>
+        </p:nvSpPr>
+        <p:spPr>
+          <a:xfrm>
+            <a:off x="0" y="0"/>
+            <a:ext cx="12191695" cy="6858000"/>
+          </a:xfrm>
+          <a:prstGeom prst="rect">
+            <a:avLst/>
+          </a:prstGeom>
+          <a:solidFill>
+            <a:srgbClr val="0A192F"/>
+          </a:solidFill>
+          <a:ln>
+            <a:noFill/>
+          </a:ln>
+        </p:spPr>
+        <p:style>
+          <a:lnRef idx="1">
+            <a:schemeClr val="accent1"/>
+          </a:lnRef>
+          <a:fillRef idx="3">
+            <a:schemeClr val="accent1"/>
+          </a:fillRef>
+          <a:effectRef idx="2">
+            <a:schemeClr val="accent1"/>
+          </a:effectRef>
+          <a:fontRef idx="minor">
+            <a:schemeClr val="lt1"/>
+          </a:fontRef>
+        </p:style>
+        <p:txBody>
+          <a:bodyPr rtlCol="0" anchor="ctr"/>
+          <a:lstStyle/>
+          <a:p>
+            <a:pPr algn="ctr"/>
+          </a:p>
+        </p:txBody>
+      </p:sp>
+      <p:sp>
+        <p:nvSpPr>
+          <p:cNvPr id="3" name="TextBox 2"/>
+          <p:cNvSpPr txBox="1"/>
+          <p:nvPr/>
+        </p:nvSpPr>
+        <p:spPr>
+          <a:xfrm>
+            <a:off x="731520" y="365760"/>
+            <a:ext cx="10728655" cy="822960"/>
+          </a:xfrm>
+          <a:prstGeom prst="rect">
+            <a:avLst/>
+          </a:prstGeom>
+          <a:noFill/>
+        </p:spPr>
+        <p:txBody>
+          <a:bodyPr wrap="square" lIns="0" tIns="0" rIns="0" bIns="0">
+            <a:spAutoFit/>
+          </a:bodyPr>
+          <a:lstStyle/>
+          <a:p>
+            <a:pPr>
+              <a:defRPr sz="1000" b="1">
+                <a:solidFill>
+                  <a:srgbClr val="38BDF8"/>
+                </a:solidFill>
+                <a:latin typeface="Calibri"/>
+              </a:defRPr>
+            </a:pPr>
+            <a:r>
+              <a:t>SUMMARY &amp; TAKEAWAYS</a:t>
+            </a:r>
+          </a:p>
+          <a:p>
+            <a:pPr>
+              <a:spcBef>
+                <a:spcPts val="300"/>
+              </a:spcBef>
+              <a:defRPr sz="2400" b="1">
+                <a:solidFill>
+                  <a:srgbClr val="FFFFFF"/>
+                </a:solidFill>
+                <a:latin typeface="Calibri"/>
+              </a:defRPr>
+            </a:pPr>
+            <a:r>
+              <a:t>Conclusion, Clinical Impact &amp; Production Deployment</a:t>
+            </a:r>
+          </a:p>
+        </p:txBody>
+      </p:sp>
+      <p:sp>
+        <p:nvSpPr>
+          <p:cNvPr id="4" name="Rounded Rectangle 3"/>
+          <p:cNvSpPr/>
+          <p:nvPr/>
+        </p:nvSpPr>
+        <p:spPr>
+          <a:xfrm>
+            <a:off x="731520" y="1463040"/>
+            <a:ext cx="5212080" cy="4754880"/>
+          </a:xfrm>
+          <a:prstGeom prst="roundRect">
+            <a:avLst/>
+          </a:prstGeom>
+          <a:solidFill>
+            <a:srgbClr val="0F2942"/>
+          </a:solidFill>
+          <a:ln w="19050">
+            <a:solidFill>
+              <a:srgbClr val="38BDF8"/>
+            </a:solidFill>
+          </a:ln>
+        </p:spPr>
+        <p:style>
+          <a:lnRef idx="1">
+            <a:schemeClr val="accent1"/>
+          </a:lnRef>
+          <a:fillRef idx="3">
+            <a:schemeClr val="accent1"/>
+          </a:fillRef>
+          <a:effectRef idx="2">
+            <a:schemeClr val="accent1"/>
+          </a:effectRef>
+          <a:fontRef idx="minor">
+            <a:schemeClr val="lt1"/>
+          </a:fontRef>
+        </p:style>
+        <p:txBody>
+          <a:bodyPr rtlCol="0" anchor="ctr" wrap="square"/>
+          <a:lstStyle/>
+          <a:p>
+            <a:pPr algn="ctr">
+              <a:defRPr sz="1600" b="1">
+                <a:solidFill>
+                  <a:srgbClr val="38BDF8"/>
+                </a:solidFill>
+                <a:latin typeface="Calibri"/>
+              </a:defRPr>
+            </a:pPr>
+            <a:r>
+              <a:t>Production Docker Compose Orchestration</a:t>
+            </a:r>
+          </a:p>
+          <a:p>
+            <a:pPr>
+              <a:spcBef>
+                <a:spcPts val="1200"/>
+              </a:spcBef>
+              <a:defRPr sz="1200">
+                <a:solidFill>
+                  <a:srgbClr val="E2E8F0"/>
+                </a:solidFill>
+                <a:latin typeface="Calibri"/>
+              </a:defRPr>
+            </a:pPr>
+            <a:r>
+              <a:t>• Containerized 4-Tier Production Stack:</a:t>
+            </a:r>
+            <a:br/>
+            <a:r>
+              <a:t>  - frontend: Next.js 16 container running on port 3000.</a:t>
+            </a:r>
+            <a:br/>
+            <a:r>
+              <a:t>  - backend: FastAPI async Uvicorn workers on port 8000.</a:t>
+            </a:r>
+            <a:br/>
+            <a:r>
+              <a:t>  - postgres: PostgreSQL 16 + pgvector with persistent volume mounts on port 5432.</a:t>
+            </a:r>
+            <a:br/>
+            <a:r>
+              <a:t>  - redis: Redis 7 Alpine in-memory cache &amp; rate limiter on port 6379.</a:t>
+            </a:r>
+            <a:br/>
+            <a:br/>
+            <a:r>
+              <a:t>• Automated One-Click Launchers:</a:t>
+            </a:r>
+            <a:br/>
+            <a:r>
+              <a:t>  - START_ALL_DOCKER.bat / START_ALL_LOCAL.bat for instant offline demonstration.</a:t>
+            </a:r>
+            <a:br/>
+            <a:r>
+              <a:t>  - Healthchecks ensure database readiness before API boot.</a:t>
+            </a:r>
+          </a:p>
+        </p:txBody>
+      </p:sp>
+      <p:sp>
+        <p:nvSpPr>
+          <p:cNvPr id="5" name="Rounded Rectangle 4"/>
+          <p:cNvSpPr/>
+          <p:nvPr/>
+        </p:nvSpPr>
+        <p:spPr>
+          <a:xfrm>
+            <a:off x="6217920" y="1463040"/>
+            <a:ext cx="5212080" cy="4754880"/>
+          </a:xfrm>
+          <a:prstGeom prst="roundRect">
+            <a:avLst/>
+          </a:prstGeom>
+          <a:solidFill>
+            <a:srgbClr val="0F2942"/>
+          </a:solidFill>
+          <a:ln w="19050">
+            <a:solidFill>
+              <a:srgbClr val="10B981"/>
+            </a:solidFill>
+          </a:ln>
+        </p:spPr>
+        <p:style>
+          <a:lnRef idx="1">
+            <a:schemeClr val="accent1"/>
+          </a:lnRef>
+          <a:fillRef idx="3">
+            <a:schemeClr val="accent1"/>
+          </a:fillRef>
+          <a:effectRef idx="2">
+            <a:schemeClr val="accent1"/>
+          </a:effectRef>
+          <a:fontRef idx="minor">
+            <a:schemeClr val="lt1"/>
+          </a:fontRef>
+        </p:style>
+        <p:txBody>
+          <a:bodyPr rtlCol="0" anchor="ctr" wrap="square"/>
+          <a:lstStyle/>
+          <a:p>
+            <a:pPr algn="ctr">
+              <a:defRPr sz="1600" b="1">
+                <a:solidFill>
+                  <a:srgbClr val="10B981"/>
+                </a:solidFill>
+                <a:latin typeface="Calibri"/>
+              </a:defRPr>
+            </a:pPr>
+            <a:r>
+              <a:t>Final Takeaway &amp; Academic Contribution</a:t>
+            </a:r>
+          </a:p>
+          <a:p>
+            <a:pPr>
+              <a:spcBef>
+                <a:spcPts val="1200"/>
+              </a:spcBef>
+              <a:defRPr sz="1200">
+                <a:solidFill>
+                  <a:srgbClr val="E2E8F0"/>
+                </a:solidFill>
+                <a:latin typeface="Calibri"/>
+              </a:defRPr>
+            </a:pPr>
+            <a:r>
+              <a:t>• Proven Engineering Deliverables:</a:t>
+            </a:r>
+            <a:br/>
+            <a:r>
+              <a:t>  - 80/80 passed benchmark clinical cases (100% Top-3 diagnostic accuracy).</a:t>
+            </a:r>
+            <a:br/>
+            <a:r>
+              <a:t>  - Sub-30ms real-time typing prediction with &lt;1ms red-flag emergency triage.</a:t>
+            </a:r>
+            <a:br/>
+            <a:r>
+              <a:t>  - Full-duplex ambient voice consultation diarization with mandatory consent gates.</a:t>
+            </a:r>
+            <a:br/>
+            <a:r>
+              <a:t>  - 1,500+ open-domain conditions + India 28-State epidemiological surveillance radar.</a:t>
+            </a:r>
+            <a:br/>
+            <a:r>
+              <a:t>  - Immutable SHA-256 cryptographic provenance with public verification portal.</a:t>
+            </a:r>
+            <a:br/>
+            <a:br/>
+            <a:r>
+              <a:t>• Core Philosophy:</a:t>
+            </a:r>
+            <a:br/>
+            <a:r>
+              <a:t>  'DocAssistIQ does not replace the physician—it amplifies clinical precision, eliminates administrative burnout, and protects human lives.'</a:t>
+            </a:r>
+          </a:p>
+        </p:txBody>
+      </p:sp>
     </p:spTree>
   </p:cSld>
   <p:clrMapOvr>
@@ -3265,14 +9171,57 @@
       <p:grpSpPr/>
       <p:sp>
         <p:nvSpPr>
-          <p:cNvPr id="2" name="TextBox 1"/>
+          <p:cNvPr id="2" name="Rectangle 1"/>
+          <p:cNvSpPr/>
+          <p:nvPr/>
+        </p:nvSpPr>
+        <p:spPr>
+          <a:xfrm>
+            <a:off x="0" y="0"/>
+            <a:ext cx="12191695" cy="6858000"/>
+          </a:xfrm>
+          <a:prstGeom prst="rect">
+            <a:avLst/>
+          </a:prstGeom>
+          <a:solidFill>
+            <a:srgbClr val="FFFFFF"/>
+          </a:solidFill>
+          <a:ln>
+            <a:noFill/>
+          </a:ln>
+        </p:spPr>
+        <p:style>
+          <a:lnRef idx="1">
+            <a:schemeClr val="accent1"/>
+          </a:lnRef>
+          <a:fillRef idx="3">
+            <a:schemeClr val="accent1"/>
+          </a:fillRef>
+          <a:effectRef idx="2">
+            <a:schemeClr val="accent1"/>
+          </a:effectRef>
+          <a:fontRef idx="minor">
+            <a:schemeClr val="lt1"/>
+          </a:fontRef>
+        </p:style>
+        <p:txBody>
+          <a:bodyPr rtlCol="0" anchor="ctr"/>
+          <a:lstStyle/>
+          <a:p>
+            <a:pPr algn="ctr"/>
+          </a:p>
+        </p:txBody>
+      </p:sp>
+      <p:sp>
+        <p:nvSpPr>
+          <p:cNvPr id="3" name="TextBox 2"/>
           <p:cNvSpPr txBox="1"/>
           <p:nvPr/>
         </p:nvSpPr>
         <p:spPr>
           <a:xfrm>
-            <a:off x="731520" y="548640"/>
-            <a:ext cx="10515600" cy="731520"/>
+            <a:off x="731520" y="365760"/>
+            <a:ext cx="10728655" cy="822960"/>
           </a:xfrm>
           <a:prstGeom prst="rect">
             <a:avLst/>
@@ -3280,13 +9229,29 @@
           <a:noFill/>
         </p:spPr>
         <p:txBody>
-          <a:bodyPr wrap="none">
+          <a:bodyPr wrap="square" lIns="0" tIns="0" rIns="0" bIns="0">
             <a:spAutoFit/>
           </a:bodyPr>
           <a:lstStyle/>
           <a:p>
             <a:pPr>
-              <a:defRPr sz="2800" b="1">
+              <a:defRPr sz="1000" b="1">
+                <a:solidFill>
+                  <a:srgbClr val="0284C7"/>
+                </a:solidFill>
+                <a:latin typeface="Calibri"/>
+              </a:defRPr>
+            </a:pPr>
+            <a:r>
+              <a:t>TEAM WORKLOAD &amp; MODULAR OWNERSHIP</a:t>
+            </a:r>
+          </a:p>
+          <a:p>
+            <a:pPr>
+              <a:spcBef>
+                <a:spcPts val="300"/>
+              </a:spcBef>
+              <a:defRPr sz="2400" b="1">
                 <a:solidFill>
                   <a:srgbClr val="0F2942"/>
                 </a:solidFill>
@@ -3294,23 +9259,23 @@
               </a:defRPr>
             </a:pPr>
             <a:r>
-              <a:t>DocAssistIQ: Architectural Pillars &amp; Design Innovations</a:t>
-            </a:r>
-          </a:p>
-        </p:txBody>
-      </p:sp>
-      <p:sp>
-        <p:nvSpPr>
-          <p:cNvPr id="3" name="Rectangle 2"/>
+              <a:t>Four-Person Architectural Responsibility Division (25% Each)</a:t>
+            </a:r>
+          </a:p>
+        </p:txBody>
+      </p:sp>
+      <p:sp>
+        <p:nvSpPr>
+          <p:cNvPr id="4" name="Rounded Rectangle 3"/>
           <p:cNvSpPr/>
           <p:nvPr/>
         </p:nvSpPr>
         <p:spPr>
           <a:xfrm>
-            <a:off x="731520" y="1645920"/>
-            <a:ext cx="2468880" cy="4389120"/>
-          </a:xfrm>
-          <a:prstGeom prst="rect">
+            <a:off x="731520" y="1463040"/>
+            <a:ext cx="2560320" cy="4754880"/>
+          </a:xfrm>
+          <a:prstGeom prst="roundRect">
             <a:avLst/>
           </a:prstGeom>
           <a:solidFill>
@@ -3341,7 +9306,7 @@
           <a:lstStyle/>
           <a:p>
             <a:pPr algn="ctr">
-              <a:defRPr sz="1600" b="1">
+              <a:defRPr sz="1300" b="1">
                 <a:solidFill>
                   <a:srgbClr val="0284C7"/>
                 </a:solidFill>
@@ -3349,7 +9314,23 @@
               </a:defRPr>
             </a:pPr>
             <a:r>
-              <a:t>1. Ambient Voice Pipeline</a:t>
+              <a:t>PERSON 1</a:t>
+            </a:r>
+          </a:p>
+          <a:p>
+            <a:pPr>
+              <a:spcBef>
+                <a:spcPts val="400"/>
+              </a:spcBef>
+              <a:defRPr sz="1400" b="1">
+                <a:solidFill>
+                  <a:srgbClr val="0F2942"/>
+                </a:solidFill>
+                <a:latin typeface="Calibri"/>
+              </a:defRPr>
+            </a:pPr>
+            <a:r>
+              <a:t>Foundations &amp; Real-Time Intelligence</a:t>
             </a:r>
           </a:p>
           <a:p>
@@ -3357,43 +9338,47 @@
               <a:spcBef>
                 <a:spcPts val="1400"/>
               </a:spcBef>
-              <a:defRPr sz="1300">
-                <a:solidFill>
-                  <a:srgbClr val="1E293B"/>
-                </a:solidFill>
-                <a:latin typeface="Calibri"/>
-              </a:defRPr>
-            </a:pPr>
-            <a:r>
-              <a:t>• Web Audio API (16kHz PCM)</a:t>
-            </a:r>
-            <a:br/>
-            <a:r>
-              <a:t>• Faster-Whisper Large-v3</a:t>
-            </a:r>
-            <a:br/>
-            <a:r>
-              <a:t>• PyAnnote 3.1 Diarization</a:t>
-            </a:r>
-            <a:br/>
-            <a:r>
-              <a:t>• Mandatory Patient Consent Gate</a:t>
-            </a:r>
-          </a:p>
-        </p:txBody>
-      </p:sp>
-      <p:sp>
-        <p:nvSpPr>
-          <p:cNvPr id="4" name="Rectangle 3"/>
+              <a:defRPr sz="1100">
+                <a:solidFill>
+                  <a:srgbClr val="334155"/>
+                </a:solidFill>
+                <a:latin typeface="Calibri"/>
+              </a:defRPr>
+            </a:pPr>
+            <a:r>
+              <a:t>• Sub-30ms Real-Time Prediction</a:t>
+            </a:r>
+            <a:br/>
+            <a:r>
+              <a:t>• Hybrid Neuro-Symbolic Engine</a:t>
+            </a:r>
+            <a:br/>
+            <a:r>
+              <a:t>• Emergency Red-Flag Triage (&lt;1ms)</a:t>
+            </a:r>
+            <a:br/>
+            <a:r>
+              <a:t>• Local LLM Orchestration &amp; Fallbacks</a:t>
+            </a:r>
+            <a:br/>
+            <a:r>
+              <a:t>• 10-Failure Circuit Breaker Gate</a:t>
+            </a:r>
+          </a:p>
+        </p:txBody>
+      </p:sp>
+      <p:sp>
+        <p:nvSpPr>
+          <p:cNvPr id="5" name="Rounded Rectangle 4"/>
           <p:cNvSpPr/>
           <p:nvPr/>
         </p:nvSpPr>
         <p:spPr>
           <a:xfrm>
-            <a:off x="3429000" y="1645920"/>
-            <a:ext cx="2468880" cy="4389120"/>
-          </a:xfrm>
-          <a:prstGeom prst="rect">
+            <a:off x="3429000" y="1463040"/>
+            <a:ext cx="2560320" cy="4754880"/>
+          </a:xfrm>
+          <a:prstGeom prst="roundRect">
             <a:avLst/>
           </a:prstGeom>
           <a:solidFill>
@@ -3424,7 +9409,7 @@
           <a:lstStyle/>
           <a:p>
             <a:pPr algn="ctr">
-              <a:defRPr sz="1600" b="1">
+              <a:defRPr sz="1300" b="1">
                 <a:solidFill>
                   <a:srgbClr val="0D9488"/>
                 </a:solidFill>
@@ -3432,7 +9417,23 @@
               </a:defRPr>
             </a:pPr>
             <a:r>
-              <a:t>2. Deterministic Reasoning</a:t>
+              <a:t>PERSON 2</a:t>
+            </a:r>
+          </a:p>
+          <a:p>
+            <a:pPr>
+              <a:spcBef>
+                <a:spcPts val="400"/>
+              </a:spcBef>
+              <a:defRPr sz="1400" b="1">
+                <a:solidFill>
+                  <a:srgbClr val="0F2942"/>
+                </a:solidFill>
+                <a:latin typeface="Calibri"/>
+              </a:defRPr>
+            </a:pPr>
+            <a:r>
+              <a:t>Clinical NLP &amp; Voice Ingestion</a:t>
             </a:r>
           </a:p>
           <a:p>
@@ -3440,43 +9441,47 @@
               <a:spcBef>
                 <a:spcPts val="1400"/>
               </a:spcBef>
-              <a:defRPr sz="1300">
-                <a:solidFill>
-                  <a:srgbClr val="1E293B"/>
-                </a:solidFill>
-                <a:latin typeface="Calibri"/>
-              </a:defRPr>
-            </a:pPr>
-            <a:r>
-              <a:t>• 100+ Multi-Specialty Disease KB</a:t>
-            </a:r>
-            <a:br/>
-            <a:r>
-              <a:t>• Multi-Factor Jaccard + Cardinal Math</a:t>
-            </a:r>
-            <a:br/>
-            <a:r>
-              <a:t>• Incubation &amp; Travel Fit</a:t>
-            </a:r>
-            <a:br/>
-            <a:r>
-              <a:t>• &lt;85ms Sub-Second Execution</a:t>
-            </a:r>
-          </a:p>
-        </p:txBody>
-      </p:sp>
-      <p:sp>
-        <p:nvSpPr>
-          <p:cNvPr id="5" name="Rectangle 4"/>
+              <a:defRPr sz="1100">
+                <a:solidFill>
+                  <a:srgbClr val="334155"/>
+                </a:solidFill>
+                <a:latin typeface="Calibri"/>
+              </a:defRPr>
+            </a:pPr>
+            <a:r>
+              <a:t>• Web Audio API (16kHz PCM Stream)</a:t>
+            </a:r>
+            <a:br/>
+            <a:r>
+              <a:t>• Faster-Whisper Large-v3 Local ASR</a:t>
+            </a:r>
+            <a:br/>
+            <a:r>
+              <a:t>• PyAnnote 3.1 Speaker Diarization</a:t>
+            </a:r>
+            <a:br/>
+            <a:r>
+              <a:t>• Shorthand Expansion (&lt;5ms)</a:t>
+            </a:r>
+            <a:br/>
+            <a:r>
+              <a:t>• Clause Negation &amp; SNOMED CT Mapping</a:t>
+            </a:r>
+          </a:p>
+        </p:txBody>
+      </p:sp>
+      <p:sp>
+        <p:nvSpPr>
+          <p:cNvPr id="6" name="Rounded Rectangle 5"/>
           <p:cNvSpPr/>
           <p:nvPr/>
         </p:nvSpPr>
         <p:spPr>
           <a:xfrm>
-            <a:off x="6126480" y="1645920"/>
-            <a:ext cx="2468880" cy="4389120"/>
-          </a:xfrm>
-          <a:prstGeom prst="rect">
+            <a:off x="6126480" y="1463040"/>
+            <a:ext cx="2560320" cy="4754880"/>
+          </a:xfrm>
+          <a:prstGeom prst="roundRect">
             <a:avLst/>
           </a:prstGeom>
           <a:solidFill>
@@ -3484,7 +9489,7 @@
           </a:solidFill>
           <a:ln w="25400">
             <a:solidFill>
-              <a:srgbClr val="B91C1C"/>
+              <a:srgbClr val="8B5CF6"/>
             </a:solidFill>
           </a:ln>
         </p:spPr>
@@ -3507,15 +9512,31 @@
           <a:lstStyle/>
           <a:p>
             <a:pPr algn="ctr">
-              <a:defRPr sz="1600" b="1">
-                <a:solidFill>
-                  <a:srgbClr val="B91C1C"/>
-                </a:solidFill>
-                <a:latin typeface="Calibri"/>
-              </a:defRPr>
-            </a:pPr>
-            <a:r>
-              <a:t>3. Zero-Bypass Safety</a:t>
+              <a:defRPr sz="1300" b="1">
+                <a:solidFill>
+                  <a:srgbClr val="8B5CF6"/>
+                </a:solidFill>
+                <a:latin typeface="Calibri"/>
+              </a:defRPr>
+            </a:pPr>
+            <a:r>
+              <a:t>PERSON 3</a:t>
+            </a:r>
+          </a:p>
+          <a:p>
+            <a:pPr>
+              <a:spcBef>
+                <a:spcPts val="400"/>
+              </a:spcBef>
+              <a:defRPr sz="1400" b="1">
+                <a:solidFill>
+                  <a:srgbClr val="0F2942"/>
+                </a:solidFill>
+                <a:latin typeface="Calibri"/>
+              </a:defRPr>
+            </a:pPr>
+            <a:r>
+              <a:t>Diagnostic Engine &amp; Safety Citadel</a:t>
             </a:r>
           </a:p>
           <a:p>
@@ -3523,43 +9544,47 @@
               <a:spcBef>
                 <a:spcPts val="1400"/>
               </a:spcBef>
-              <a:defRPr sz="1300">
-                <a:solidFill>
-                  <a:srgbClr val="1E293B"/>
-                </a:solidFill>
-                <a:latin typeface="Calibri"/>
-              </a:defRPr>
-            </a:pPr>
-            <a:r>
-              <a:t>• Master Red Flags (RF-001 to 005)</a:t>
-            </a:r>
-            <a:br/>
-            <a:r>
-              <a:t>• 100% Sensitivity on Emergencies</a:t>
-            </a:r>
-            <a:br/>
-            <a:r>
-              <a:t>• Live NIH RxNav DDI Screening</a:t>
-            </a:r>
-            <a:br/>
-            <a:r>
-              <a:t>• Mandatory Clinician Review</a:t>
-            </a:r>
-          </a:p>
-        </p:txBody>
-      </p:sp>
-      <p:sp>
-        <p:nvSpPr>
-          <p:cNvPr id="6" name="Rectangle 5"/>
+              <a:defRPr sz="1100">
+                <a:solidFill>
+                  <a:srgbClr val="334155"/>
+                </a:solidFill>
+                <a:latin typeface="Calibri"/>
+              </a:defRPr>
+            </a:pPr>
+            <a:r>
+              <a:t>• Deterministic Scoring Mathematics</a:t>
+            </a:r>
+            <a:br/>
+            <a:r>
+              <a:t>• 1,500+ Open-Domain Disease Catalog</a:t>
+            </a:r>
+            <a:br/>
+            <a:r>
+              <a:t>• India Outbreak Radar (28 States/8 UTs)</a:t>
+            </a:r>
+            <a:br/>
+            <a:r>
+              <a:t>• Discriminative Tiebreaker Tests</a:t>
+            </a:r>
+            <a:br/>
+            <a:r>
+              <a:t>• Polypharmacy FDA Boxed DDI Matrix</a:t>
+            </a:r>
+          </a:p>
+        </p:txBody>
+      </p:sp>
+      <p:sp>
+        <p:nvSpPr>
+          <p:cNvPr id="7" name="Rounded Rectangle 6"/>
           <p:cNvSpPr/>
           <p:nvPr/>
         </p:nvSpPr>
         <p:spPr>
           <a:xfrm>
-            <a:off x="8823960" y="1645920"/>
-            <a:ext cx="2468880" cy="4389120"/>
-          </a:xfrm>
-          <a:prstGeom prst="rect">
+            <a:off x="8823960" y="1463040"/>
+            <a:ext cx="2560320" cy="4754880"/>
+          </a:xfrm>
+          <a:prstGeom prst="roundRect">
             <a:avLst/>
           </a:prstGeom>
           <a:solidFill>
@@ -3567,7 +9592,7 @@
           </a:solidFill>
           <a:ln w="25400">
             <a:solidFill>
-              <a:srgbClr val="7C3AED"/>
+              <a:srgbClr val="10B981"/>
             </a:solidFill>
           </a:ln>
         </p:spPr>
@@ -3590,15 +9615,31 @@
           <a:lstStyle/>
           <a:p>
             <a:pPr algn="ctr">
-              <a:defRPr sz="1600" b="1">
-                <a:solidFill>
-                  <a:srgbClr val="7C3AED"/>
-                </a:solidFill>
-                <a:latin typeface="Calibri"/>
-              </a:defRPr>
-            </a:pPr>
-            <a:r>
-              <a:t>4. Local Privacy &amp; Security</a:t>
+              <a:defRPr sz="1300" b="1">
+                <a:solidFill>
+                  <a:srgbClr val="10B981"/>
+                </a:solidFill>
+                <a:latin typeface="Calibri"/>
+              </a:defRPr>
+            </a:pPr>
+            <a:r>
+              <a:t>PERSON 4</a:t>
+            </a:r>
+          </a:p>
+          <a:p>
+            <a:pPr>
+              <a:spcBef>
+                <a:spcPts val="400"/>
+              </a:spcBef>
+              <a:defRPr sz="1400" b="1">
+                <a:solidFill>
+                  <a:srgbClr val="0F2942"/>
+                </a:solidFill>
+                <a:latin typeface="Calibri"/>
+              </a:defRPr>
+            </a:pPr>
+            <a:r>
+              <a:t>Frontend, Data, Security &amp; Evaluation</a:t>
             </a:r>
           </a:p>
           <a:p>
@@ -3606,27 +9647,1530 @@
               <a:spcBef>
                 <a:spcPts val="1400"/>
               </a:spcBef>
-              <a:defRPr sz="1300">
-                <a:solidFill>
-                  <a:srgbClr val="1E293B"/>
-                </a:solidFill>
-                <a:latin typeface="Calibri"/>
-              </a:defRPr>
-            </a:pPr>
-            <a:r>
-              <a:t>• Constrained Llama-3.2-3B via Ollama</a:t>
-            </a:r>
-            <a:br/>
-            <a:r>
-              <a:t>• PostgreSQL 16 + pgvector HNSW</a:t>
-            </a:r>
-            <a:br/>
-            <a:r>
-              <a:t>• SHA-256 Chained Audit Trail</a:t>
-            </a:r>
-            <a:br/>
-            <a:r>
-              <a:t>• Zero Cloud Data Leakage (HIPAA)</a:t>
+              <a:defRPr sz="1100">
+                <a:solidFill>
+                  <a:srgbClr val="334155"/>
+                </a:solidFill>
+                <a:latin typeface="Calibri"/>
+              </a:defRPr>
+            </a:pPr>
+            <a:r>
+              <a:t>• Next.js 16.3.4 (App Router) &amp; React 19</a:t>
+            </a:r>
+            <a:br/>
+            <a:r>
+              <a:t>• Dual-Channel REST &amp; Resilient WebSockets</a:t>
+            </a:r>
+            <a:br/>
+            <a:r>
+              <a:t>• PostgreSQL 16 + pgvector HNSW + Redis 7</a:t>
+            </a:r>
+            <a:br/>
+            <a:r>
+              <a:t>• SHA-256 Tamper-Evident Record Sealing</a:t>
+            </a:r>
+            <a:br/>
+            <a:r>
+              <a:t>• 80-Case Benchmark (100% Accuracy)</a:t>
+            </a:r>
+          </a:p>
+        </p:txBody>
+      </p:sp>
+    </p:spTree>
+  </p:cSld>
+  <p:clrMapOvr>
+    <a:masterClrMapping/>
+  </p:clrMapOvr>
+</p:sld>
+</file>
+
+<file path=ppt/slides/slide4.xml><?xml version="1.0" encoding="utf-8"?>
+<p:sld xmlns:a="http://schemas.openxmlformats.org/drawingml/2006/main" xmlns:p="http://schemas.openxmlformats.org/presentationml/2006/main" xmlns:r="http://schemas.openxmlformats.org/officeDocument/2006/relationships">
+  <p:cSld>
+    <p:spTree>
+      <p:nvGrpSpPr>
+        <p:cNvPr id="1" name=""/>
+        <p:cNvGrpSpPr/>
+        <p:nvPr/>
+      </p:nvGrpSpPr>
+      <p:grpSpPr/>
+      <p:sp>
+        <p:nvSpPr>
+          <p:cNvPr id="2" name="Rectangle 1"/>
+          <p:cNvSpPr/>
+          <p:nvPr/>
+        </p:nvSpPr>
+        <p:spPr>
+          <a:xfrm>
+            <a:off x="0" y="0"/>
+            <a:ext cx="12191695" cy="6858000"/>
+          </a:xfrm>
+          <a:prstGeom prst="rect">
+            <a:avLst/>
+          </a:prstGeom>
+          <a:solidFill>
+            <a:srgbClr val="0A192F"/>
+          </a:solidFill>
+          <a:ln>
+            <a:noFill/>
+          </a:ln>
+        </p:spPr>
+        <p:style>
+          <a:lnRef idx="1">
+            <a:schemeClr val="accent1"/>
+          </a:lnRef>
+          <a:fillRef idx="3">
+            <a:schemeClr val="accent1"/>
+          </a:fillRef>
+          <a:effectRef idx="2">
+            <a:schemeClr val="accent1"/>
+          </a:effectRef>
+          <a:fontRef idx="minor">
+            <a:schemeClr val="lt1"/>
+          </a:fontRef>
+        </p:style>
+        <p:txBody>
+          <a:bodyPr rtlCol="0" anchor="ctr"/>
+          <a:lstStyle/>
+          <a:p>
+            <a:pPr algn="ctr"/>
+          </a:p>
+        </p:txBody>
+      </p:sp>
+      <p:sp>
+        <p:nvSpPr>
+          <p:cNvPr id="3" name="TextBox 2"/>
+          <p:cNvSpPr txBox="1"/>
+          <p:nvPr/>
+        </p:nvSpPr>
+        <p:spPr>
+          <a:xfrm>
+            <a:off x="731520" y="365760"/>
+            <a:ext cx="10728655" cy="822960"/>
+          </a:xfrm>
+          <a:prstGeom prst="rect">
+            <a:avLst/>
+          </a:prstGeom>
+          <a:noFill/>
+        </p:spPr>
+        <p:txBody>
+          <a:bodyPr wrap="square" lIns="0" tIns="0" rIns="0" bIns="0">
+            <a:spAutoFit/>
+          </a:bodyPr>
+          <a:lstStyle/>
+          <a:p>
+            <a:pPr>
+              <a:defRPr sz="1000" b="1">
+                <a:solidFill>
+                  <a:srgbClr val="38BDF8"/>
+                </a:solidFill>
+                <a:latin typeface="Calibri"/>
+              </a:defRPr>
+            </a:pPr>
+            <a:r>
+              <a:t>ENTERPRISE TECHNICAL BLUEPRINT</a:t>
+            </a:r>
+          </a:p>
+          <a:p>
+            <a:pPr>
+              <a:spcBef>
+                <a:spcPts val="300"/>
+              </a:spcBef>
+              <a:defRPr sz="2400" b="1">
+                <a:solidFill>
+                  <a:srgbClr val="FFFFFF"/>
+                </a:solidFill>
+                <a:latin typeface="Calibri"/>
+              </a:defRPr>
+            </a:pPr>
+            <a:r>
+              <a:t>DocAssistIQ Modular Monolith Architecture (4K System Diagram)</a:t>
+            </a:r>
+          </a:p>
+        </p:txBody>
+      </p:sp>
+      <p:pic>
+        <p:nvPicPr>
+          <p:cNvPr id="4" name="Picture 3" descr="DocAssistIQ_Architecture_PPT_Slide.png"/>
+          <p:cNvPicPr>
+            <a:picLocks noChangeAspect="1"/>
+          </p:cNvPicPr>
+          <p:nvPr/>
+        </p:nvPicPr>
+        <p:blipFill>
+          <a:blip r:embed="rId2"/>
+          <a:stretch>
+            <a:fillRect/>
+          </a:stretch>
+        </p:blipFill>
+        <p:spPr>
+          <a:xfrm>
+            <a:off x="731520" y="1280160"/>
+            <a:ext cx="10728655" cy="6034868"/>
+          </a:xfrm>
+          <a:prstGeom prst="rect">
+            <a:avLst/>
+          </a:prstGeom>
+        </p:spPr>
+      </p:pic>
+    </p:spTree>
+  </p:cSld>
+  <p:clrMapOvr>
+    <a:masterClrMapping/>
+  </p:clrMapOvr>
+</p:sld>
+</file>
+
+<file path=ppt/slides/slide5.xml><?xml version="1.0" encoding="utf-8"?>
+<p:sld xmlns:a="http://schemas.openxmlformats.org/drawingml/2006/main" xmlns:p="http://schemas.openxmlformats.org/presentationml/2006/main" xmlns:r="http://schemas.openxmlformats.org/officeDocument/2006/relationships">
+  <p:cSld>
+    <p:spTree>
+      <p:nvGrpSpPr>
+        <p:cNvPr id="1" name=""/>
+        <p:cNvGrpSpPr/>
+        <p:nvPr/>
+      </p:nvGrpSpPr>
+      <p:grpSpPr/>
+      <p:sp>
+        <p:nvSpPr>
+          <p:cNvPr id="2" name="Rectangle 1"/>
+          <p:cNvSpPr/>
+          <p:nvPr/>
+        </p:nvSpPr>
+        <p:spPr>
+          <a:xfrm>
+            <a:off x="0" y="0"/>
+            <a:ext cx="12191695" cy="6858000"/>
+          </a:xfrm>
+          <a:prstGeom prst="rect">
+            <a:avLst/>
+          </a:prstGeom>
+          <a:solidFill>
+            <a:srgbClr val="0A192F"/>
+          </a:solidFill>
+          <a:ln>
+            <a:noFill/>
+          </a:ln>
+        </p:spPr>
+        <p:style>
+          <a:lnRef idx="1">
+            <a:schemeClr val="accent1"/>
+          </a:lnRef>
+          <a:fillRef idx="3">
+            <a:schemeClr val="accent1"/>
+          </a:fillRef>
+          <a:effectRef idx="2">
+            <a:schemeClr val="accent1"/>
+          </a:effectRef>
+          <a:fontRef idx="minor">
+            <a:schemeClr val="lt1"/>
+          </a:fontRef>
+        </p:style>
+        <p:txBody>
+          <a:bodyPr rtlCol="0" anchor="ctr"/>
+          <a:lstStyle/>
+          <a:p>
+            <a:pPr algn="ctr"/>
+          </a:p>
+        </p:txBody>
+      </p:sp>
+      <p:sp>
+        <p:nvSpPr>
+          <p:cNvPr id="3" name="TextBox 2"/>
+          <p:cNvSpPr txBox="1"/>
+          <p:nvPr/>
+        </p:nvSpPr>
+        <p:spPr>
+          <a:xfrm>
+            <a:off x="731520" y="365760"/>
+            <a:ext cx="10728655" cy="822960"/>
+          </a:xfrm>
+          <a:prstGeom prst="rect">
+            <a:avLst/>
+          </a:prstGeom>
+          <a:noFill/>
+        </p:spPr>
+        <p:txBody>
+          <a:bodyPr wrap="square" lIns="0" tIns="0" rIns="0" bIns="0">
+            <a:spAutoFit/>
+          </a:bodyPr>
+          <a:lstStyle/>
+          <a:p>
+            <a:pPr>
+              <a:defRPr sz="1000" b="1">
+                <a:solidFill>
+                  <a:srgbClr val="38BDF8"/>
+                </a:solidFill>
+                <a:latin typeface="Calibri"/>
+              </a:defRPr>
+            </a:pPr>
+            <a:r>
+              <a:t>PIPELINE WORKFLOW</a:t>
+            </a:r>
+          </a:p>
+          <a:p>
+            <a:pPr>
+              <a:spcBef>
+                <a:spcPts val="300"/>
+              </a:spcBef>
+              <a:defRPr sz="2400" b="1">
+                <a:solidFill>
+                  <a:srgbClr val="FFFFFF"/>
+                </a:solidFill>
+                <a:latin typeface="Calibri"/>
+              </a:defRPr>
+            </a:pPr>
+            <a:r>
+              <a:t>End-to-End Clinical Decision &amp; Data Lifecycle (4-Stage Pipeline)</a:t>
+            </a:r>
+          </a:p>
+        </p:txBody>
+      </p:sp>
+      <p:pic>
+        <p:nvPicPr>
+          <p:cNvPr id="4" name="Picture 3" descr="clinical_pipeline_diagram_4k.png"/>
+          <p:cNvPicPr>
+            <a:picLocks noChangeAspect="1"/>
+          </p:cNvPicPr>
+          <p:nvPr/>
+        </p:nvPicPr>
+        <p:blipFill>
+          <a:blip r:embed="rId2"/>
+          <a:stretch>
+            <a:fillRect/>
+          </a:stretch>
+        </p:blipFill>
+        <p:spPr>
+          <a:xfrm>
+            <a:off x="731520" y="1280160"/>
+            <a:ext cx="10728655" cy="5903210"/>
+          </a:xfrm>
+          <a:prstGeom prst="rect">
+            <a:avLst/>
+          </a:prstGeom>
+        </p:spPr>
+      </p:pic>
+    </p:spTree>
+  </p:cSld>
+  <p:clrMapOvr>
+    <a:masterClrMapping/>
+  </p:clrMapOvr>
+</p:sld>
+</file>
+
+<file path=ppt/slides/slide6.xml><?xml version="1.0" encoding="utf-8"?>
+<p:sld xmlns:a="http://schemas.openxmlformats.org/drawingml/2006/main" xmlns:p="http://schemas.openxmlformats.org/presentationml/2006/main" xmlns:r="http://schemas.openxmlformats.org/officeDocument/2006/relationships">
+  <p:cSld>
+    <p:spTree>
+      <p:nvGrpSpPr>
+        <p:cNvPr id="1" name=""/>
+        <p:cNvGrpSpPr/>
+        <p:nvPr/>
+      </p:nvGrpSpPr>
+      <p:grpSpPr/>
+      <p:sp>
+        <p:nvSpPr>
+          <p:cNvPr id="2" name="Rectangle 1"/>
+          <p:cNvSpPr/>
+          <p:nvPr/>
+        </p:nvSpPr>
+        <p:spPr>
+          <a:xfrm>
+            <a:off x="0" y="0"/>
+            <a:ext cx="12191695" cy="6858000"/>
+          </a:xfrm>
+          <a:prstGeom prst="rect">
+            <a:avLst/>
+          </a:prstGeom>
+          <a:solidFill>
+            <a:srgbClr val="FFFFFF"/>
+          </a:solidFill>
+          <a:ln>
+            <a:noFill/>
+          </a:ln>
+        </p:spPr>
+        <p:style>
+          <a:lnRef idx="1">
+            <a:schemeClr val="accent1"/>
+          </a:lnRef>
+          <a:fillRef idx="3">
+            <a:schemeClr val="accent1"/>
+          </a:fillRef>
+          <a:effectRef idx="2">
+            <a:schemeClr val="accent1"/>
+          </a:effectRef>
+          <a:fontRef idx="minor">
+            <a:schemeClr val="lt1"/>
+          </a:fontRef>
+        </p:style>
+        <p:txBody>
+          <a:bodyPr rtlCol="0" anchor="ctr"/>
+          <a:lstStyle/>
+          <a:p>
+            <a:pPr algn="ctr"/>
+          </a:p>
+        </p:txBody>
+      </p:sp>
+      <p:sp>
+        <p:nvSpPr>
+          <p:cNvPr id="3" name="TextBox 2"/>
+          <p:cNvSpPr txBox="1"/>
+          <p:nvPr/>
+        </p:nvSpPr>
+        <p:spPr>
+          <a:xfrm>
+            <a:off x="731520" y="365760"/>
+            <a:ext cx="10728655" cy="822960"/>
+          </a:xfrm>
+          <a:prstGeom prst="rect">
+            <a:avLst/>
+          </a:prstGeom>
+          <a:noFill/>
+        </p:spPr>
+        <p:txBody>
+          <a:bodyPr wrap="square" lIns="0" tIns="0" rIns="0" bIns="0">
+            <a:spAutoFit/>
+          </a:bodyPr>
+          <a:lstStyle/>
+          <a:p>
+            <a:pPr>
+              <a:defRPr sz="1000" b="1">
+                <a:solidFill>
+                  <a:srgbClr val="0284C7"/>
+                </a:solidFill>
+                <a:latin typeface="Calibri"/>
+              </a:defRPr>
+            </a:pPr>
+            <a:r>
+              <a:t>FOUNDATIONS &amp; INTELLIGENCE CORE</a:t>
+            </a:r>
+          </a:p>
+          <a:p>
+            <a:pPr>
+              <a:spcBef>
+                <a:spcPts val="300"/>
+              </a:spcBef>
+              <a:defRPr sz="2400" b="1">
+                <a:solidFill>
+                  <a:srgbClr val="0F2942"/>
+                </a:solidFill>
+                <a:latin typeface="Calibri"/>
+              </a:defRPr>
+            </a:pPr>
+            <a:r>
+              <a:t>Person 1: Hybrid Reasoning — Decoupling Math from Narration</a:t>
+            </a:r>
+          </a:p>
+        </p:txBody>
+      </p:sp>
+      <p:sp>
+        <p:nvSpPr>
+          <p:cNvPr id="4" name="Rounded Rectangle 3"/>
+          <p:cNvSpPr/>
+          <p:nvPr/>
+        </p:nvSpPr>
+        <p:spPr>
+          <a:xfrm>
+            <a:off x="731520" y="1463040"/>
+            <a:ext cx="5212080" cy="4754880"/>
+          </a:xfrm>
+          <a:prstGeom prst="roundRect">
+            <a:avLst/>
+          </a:prstGeom>
+          <a:solidFill>
+            <a:srgbClr val="F8FAFC"/>
+          </a:solidFill>
+          <a:ln w="19050">
+            <a:solidFill>
+              <a:srgbClr val="E11D48"/>
+            </a:solidFill>
+          </a:ln>
+        </p:spPr>
+        <p:style>
+          <a:lnRef idx="1">
+            <a:schemeClr val="accent1"/>
+          </a:lnRef>
+          <a:fillRef idx="3">
+            <a:schemeClr val="accent1"/>
+          </a:fillRef>
+          <a:effectRef idx="2">
+            <a:schemeClr val="accent1"/>
+          </a:effectRef>
+          <a:fontRef idx="minor">
+            <a:schemeClr val="lt1"/>
+          </a:fontRef>
+        </p:style>
+        <p:txBody>
+          <a:bodyPr rtlCol="0" anchor="ctr" wrap="square"/>
+          <a:lstStyle/>
+          <a:p>
+            <a:pPr algn="ctr">
+              <a:defRPr sz="1600" b="1">
+                <a:solidFill>
+                  <a:srgbClr val="E11D48"/>
+                </a:solidFill>
+                <a:latin typeface="Calibri"/>
+              </a:defRPr>
+            </a:pPr>
+            <a:r>
+              <a:t>The Fallacy of End-to-End LLM Diagnosis</a:t>
+            </a:r>
+          </a:p>
+          <a:p>
+            <a:pPr>
+              <a:spcBef>
+                <a:spcPts val="1200"/>
+              </a:spcBef>
+              <a:defRPr sz="1200">
+                <a:solidFill>
+                  <a:srgbClr val="334155"/>
+                </a:solidFill>
+                <a:latin typeface="Calibri"/>
+              </a:defRPr>
+            </a:pPr>
+            <a:r>
+              <a:t>• Stochastic Variance: The same clinical prompt produces varying differentials across turns.</a:t>
+            </a:r>
+            <a:br/>
+            <a:br/>
+            <a:r>
+              <a:t>• Calibrated Cutoff Failure: Unconstrained LLMs cannot deterministically enforce lab thresholds (e.g., Troponin &gt; 0.04 ng/mL, Platelets &lt; 50,000/μL).</a:t>
+            </a:r>
+            <a:br/>
+            <a:br/>
+            <a:r>
+              <a:t>• Legal Black-Box Liability: An LLM cannot mathematically prove which exact symptom triggered a diagnosis in a court of law.</a:t>
+            </a:r>
+            <a:br/>
+            <a:br/>
+            <a:r>
+              <a:t>• Token Cost &amp; Latency: Cloud API calls require 3 to 15 seconds, making real-time interactive typing impossible.</a:t>
+            </a:r>
+          </a:p>
+        </p:txBody>
+      </p:sp>
+      <p:sp>
+        <p:nvSpPr>
+          <p:cNvPr id="5" name="Rounded Rectangle 4"/>
+          <p:cNvSpPr/>
+          <p:nvPr/>
+        </p:nvSpPr>
+        <p:spPr>
+          <a:xfrm>
+            <a:off x="6217920" y="1463040"/>
+            <a:ext cx="5212080" cy="4754880"/>
+          </a:xfrm>
+          <a:prstGeom prst="roundRect">
+            <a:avLst/>
+          </a:prstGeom>
+          <a:solidFill>
+            <a:srgbClr val="F8FAFC"/>
+          </a:solidFill>
+          <a:ln w="19050">
+            <a:solidFill>
+              <a:srgbClr val="0D9488"/>
+            </a:solidFill>
+          </a:ln>
+        </p:spPr>
+        <p:style>
+          <a:lnRef idx="1">
+            <a:schemeClr val="accent1"/>
+          </a:lnRef>
+          <a:fillRef idx="3">
+            <a:schemeClr val="accent1"/>
+          </a:fillRef>
+          <a:effectRef idx="2">
+            <a:schemeClr val="accent1"/>
+          </a:effectRef>
+          <a:fontRef idx="minor">
+            <a:schemeClr val="lt1"/>
+          </a:fontRef>
+        </p:style>
+        <p:txBody>
+          <a:bodyPr rtlCol="0" anchor="ctr" wrap="square"/>
+          <a:lstStyle/>
+          <a:p>
+            <a:pPr algn="ctr">
+              <a:defRPr sz="1600" b="1">
+                <a:solidFill>
+                  <a:srgbClr val="0D9488"/>
+                </a:solidFill>
+                <a:latin typeface="Calibri"/>
+              </a:defRPr>
+            </a:pPr>
+            <a:r>
+              <a:t>The DocAssistIQ Two-Stage Solution</a:t>
+            </a:r>
+          </a:p>
+          <a:p>
+            <a:pPr>
+              <a:spcBef>
+                <a:spcPts val="1200"/>
+              </a:spcBef>
+              <a:defRPr sz="1200">
+                <a:solidFill>
+                  <a:srgbClr val="334155"/>
+                </a:solidFill>
+                <a:latin typeface="Calibri"/>
+              </a:defRPr>
+            </a:pPr>
+            <a:r>
+              <a:t>• STAGE 1: Deterministic Python Engine (90% of Work)</a:t>
+            </a:r>
+            <a:br/>
+            <a:r>
+              <a:t>  - Evaluates candidate diseases via Bayesian priors and weighted Jaccard similarity in &lt; 30ms.</a:t>
+            </a:r>
+            <a:br/>
+            <a:r>
+              <a:t>  - Applies emergency red-flag triage rules in &lt; 1ms.</a:t>
+            </a:r>
+            <a:br/>
+            <a:r>
+              <a:t>  - Ranks the entire differential deterministically before any AI model is invoked.</a:t>
+            </a:r>
+            <a:br/>
+            <a:br/>
+            <a:r>
+              <a:t>• STAGE 2: Local LLM Narrator (10% of Work)</a:t>
+            </a:r>
+            <a:br/>
+            <a:r>
+              <a:t>  - Receives Stage 1 pre-ranked candidates as immutable context.</a:t>
+            </a:r>
+            <a:br/>
+            <a:r>
+              <a:t>  - Constrained local model (ii-medical:8b at temp 0.1) synthesizes grounded clinical justifications.</a:t>
+            </a:r>
+            <a:br/>
+            <a:r>
+              <a:t>  - Forbidden from changing diagnostic rank order or hallucinating unlisted diseases.</a:t>
+            </a:r>
+          </a:p>
+        </p:txBody>
+      </p:sp>
+    </p:spTree>
+  </p:cSld>
+  <p:clrMapOvr>
+    <a:masterClrMapping/>
+  </p:clrMapOvr>
+</p:sld>
+</file>
+
+<file path=ppt/slides/slide7.xml><?xml version="1.0" encoding="utf-8"?>
+<p:sld xmlns:a="http://schemas.openxmlformats.org/drawingml/2006/main" xmlns:p="http://schemas.openxmlformats.org/presentationml/2006/main" xmlns:r="http://schemas.openxmlformats.org/officeDocument/2006/relationships">
+  <p:cSld>
+    <p:spTree>
+      <p:nvGrpSpPr>
+        <p:cNvPr id="1" name=""/>
+        <p:cNvGrpSpPr/>
+        <p:nvPr/>
+      </p:nvGrpSpPr>
+      <p:grpSpPr/>
+      <p:sp>
+        <p:nvSpPr>
+          <p:cNvPr id="2" name="Rectangle 1"/>
+          <p:cNvSpPr/>
+          <p:nvPr/>
+        </p:nvSpPr>
+        <p:spPr>
+          <a:xfrm>
+            <a:off x="0" y="0"/>
+            <a:ext cx="12191695" cy="6858000"/>
+          </a:xfrm>
+          <a:prstGeom prst="rect">
+            <a:avLst/>
+          </a:prstGeom>
+          <a:solidFill>
+            <a:srgbClr val="FFFFFF"/>
+          </a:solidFill>
+          <a:ln>
+            <a:noFill/>
+          </a:ln>
+        </p:spPr>
+        <p:style>
+          <a:lnRef idx="1">
+            <a:schemeClr val="accent1"/>
+          </a:lnRef>
+          <a:fillRef idx="3">
+            <a:schemeClr val="accent1"/>
+          </a:fillRef>
+          <a:effectRef idx="2">
+            <a:schemeClr val="accent1"/>
+          </a:effectRef>
+          <a:fontRef idx="minor">
+            <a:schemeClr val="lt1"/>
+          </a:fontRef>
+        </p:style>
+        <p:txBody>
+          <a:bodyPr rtlCol="0" anchor="ctr"/>
+          <a:lstStyle/>
+          <a:p>
+            <a:pPr algn="ctr"/>
+          </a:p>
+        </p:txBody>
+      </p:sp>
+      <p:sp>
+        <p:nvSpPr>
+          <p:cNvPr id="3" name="TextBox 2"/>
+          <p:cNvSpPr txBox="1"/>
+          <p:nvPr/>
+        </p:nvSpPr>
+        <p:spPr>
+          <a:xfrm>
+            <a:off x="731520" y="365760"/>
+            <a:ext cx="10728655" cy="822960"/>
+          </a:xfrm>
+          <a:prstGeom prst="rect">
+            <a:avLst/>
+          </a:prstGeom>
+          <a:noFill/>
+        </p:spPr>
+        <p:txBody>
+          <a:bodyPr wrap="square" lIns="0" tIns="0" rIns="0" bIns="0">
+            <a:spAutoFit/>
+          </a:bodyPr>
+          <a:lstStyle/>
+          <a:p>
+            <a:pPr>
+              <a:defRPr sz="1000" b="1">
+                <a:solidFill>
+                  <a:srgbClr val="0284C7"/>
+                </a:solidFill>
+                <a:latin typeface="Calibri"/>
+              </a:defRPr>
+            </a:pPr>
+            <a:r>
+              <a:t>REAL-TIME SYSTEM RUNTIME</a:t>
+            </a:r>
+          </a:p>
+          <a:p>
+            <a:pPr>
+              <a:spcBef>
+                <a:spcPts val="300"/>
+              </a:spcBef>
+              <a:defRPr sz="2400" b="1">
+                <a:solidFill>
+                  <a:srgbClr val="0F2942"/>
+                </a:solidFill>
+                <a:latin typeface="Calibri"/>
+              </a:defRPr>
+            </a:pPr>
+            <a:r>
+              <a:t>Person 1: Sub-30ms Real-Time Inference &amp; Emergency Red-Flag Triage</a:t>
+            </a:r>
+          </a:p>
+        </p:txBody>
+      </p:sp>
+      <p:sp>
+        <p:nvSpPr>
+          <p:cNvPr id="4" name="Rounded Rectangle 3"/>
+          <p:cNvSpPr/>
+          <p:nvPr/>
+        </p:nvSpPr>
+        <p:spPr>
+          <a:xfrm>
+            <a:off x="731520" y="1463040"/>
+            <a:ext cx="5212080" cy="4754880"/>
+          </a:xfrm>
+          <a:prstGeom prst="roundRect">
+            <a:avLst/>
+          </a:prstGeom>
+          <a:solidFill>
+            <a:srgbClr val="F8FAFC"/>
+          </a:solidFill>
+          <a:ln w="19050">
+            <a:solidFill>
+              <a:srgbClr val="0284C7"/>
+            </a:solidFill>
+          </a:ln>
+        </p:spPr>
+        <p:style>
+          <a:lnRef idx="1">
+            <a:schemeClr val="accent1"/>
+          </a:lnRef>
+          <a:fillRef idx="3">
+            <a:schemeClr val="accent1"/>
+          </a:fillRef>
+          <a:effectRef idx="2">
+            <a:schemeClr val="accent1"/>
+          </a:effectRef>
+          <a:fontRef idx="minor">
+            <a:schemeClr val="lt1"/>
+          </a:fontRef>
+        </p:style>
+        <p:txBody>
+          <a:bodyPr rtlCol="0" anchor="ctr" wrap="square"/>
+          <a:lstStyle/>
+          <a:p>
+            <a:pPr algn="ctr">
+              <a:defRPr sz="1500" b="1">
+                <a:solidFill>
+                  <a:srgbClr val="0284C7"/>
+                </a:solidFill>
+                <a:latin typeface="Calibri"/>
+              </a:defRPr>
+            </a:pPr>
+            <a:r>
+              <a:t>Sub-30ms Real-Time Engine (realtime_prediction_service.py)</a:t>
+            </a:r>
+          </a:p>
+          <a:p>
+            <a:pPr>
+              <a:spcBef>
+                <a:spcPts val="1200"/>
+              </a:spcBef>
+              <a:defRPr sz="1200">
+                <a:solidFill>
+                  <a:srgbClr val="334155"/>
+                </a:solidFill>
+                <a:latin typeface="Calibri"/>
+              </a:defRPr>
+            </a:pPr>
+            <a:r>
+              <a:t>• Zero-Network Execution: Operates entirely in server memory without disk I/O, database round-trips, or GPU inference in the critical path.</a:t>
+            </a:r>
+            <a:br/>
+            <a:br/>
+            <a:r>
+              <a:t>• Pre-Compiled Regex Matching: Shorthands and symptoms are matched using compiled regular expression trees in under 5 milliseconds.</a:t>
+            </a:r>
+            <a:br/>
+            <a:br/>
+            <a:r>
+              <a:t>• Hash Map Dictionary Lookups: Disease profiles are indexed by symptom hash sets, allowing instantaneous candidate retrieval.</a:t>
+            </a:r>
+            <a:br/>
+            <a:br/>
+            <a:r>
+              <a:t>• Verified Benchmark Latency: Consistently executes in 18 to 28 milliseconds (average 22.5 ms), enabling true real-time feedback as the doctor types.</a:t>
+            </a:r>
+          </a:p>
+        </p:txBody>
+      </p:sp>
+      <p:sp>
+        <p:nvSpPr>
+          <p:cNvPr id="5" name="Rounded Rectangle 4"/>
+          <p:cNvSpPr/>
+          <p:nvPr/>
+        </p:nvSpPr>
+        <p:spPr>
+          <a:xfrm>
+            <a:off x="6217920" y="1463040"/>
+            <a:ext cx="5212080" cy="4754880"/>
+          </a:xfrm>
+          <a:prstGeom prst="roundRect">
+            <a:avLst/>
+          </a:prstGeom>
+          <a:solidFill>
+            <a:srgbClr val="F8FAFC"/>
+          </a:solidFill>
+          <a:ln w="19050">
+            <a:solidFill>
+              <a:srgbClr val="E11D48"/>
+            </a:solidFill>
+          </a:ln>
+        </p:spPr>
+        <p:style>
+          <a:lnRef idx="1">
+            <a:schemeClr val="accent1"/>
+          </a:lnRef>
+          <a:fillRef idx="3">
+            <a:schemeClr val="accent1"/>
+          </a:fillRef>
+          <a:effectRef idx="2">
+            <a:schemeClr val="accent1"/>
+          </a:effectRef>
+          <a:fontRef idx="minor">
+            <a:schemeClr val="lt1"/>
+          </a:fontRef>
+        </p:style>
+        <p:txBody>
+          <a:bodyPr rtlCol="0" anchor="ctr" wrap="square"/>
+          <a:lstStyle/>
+          <a:p>
+            <a:pPr algn="ctr">
+              <a:defRPr sz="1500" b="1">
+                <a:solidFill>
+                  <a:srgbClr val="E11D48"/>
+                </a:solidFill>
+                <a:latin typeface="Calibri"/>
+              </a:defRPr>
+            </a:pPr>
+            <a:r>
+              <a:t>Emergency Red-Flag Registry (EMERGENCY_RULES &lt; 1ms)</a:t>
+            </a:r>
+          </a:p>
+          <a:p>
+            <a:pPr>
+              <a:spcBef>
+                <a:spcPts val="1200"/>
+              </a:spcBef>
+              <a:defRPr sz="1200">
+                <a:solidFill>
+                  <a:srgbClr val="334155"/>
+                </a:solidFill>
+                <a:latin typeface="Calibri"/>
+              </a:defRPr>
+            </a:pPr>
+            <a:r>
+              <a:t>• Life-Threatening Presentations Scanned Deterministically:</a:t>
+            </a:r>
+            <a:br/>
+            <a:r>
+              <a:t>  - Acute Aortic Dissection: Tearing chest pain radiating to back + unequal blood pressures.</a:t>
+            </a:r>
+            <a:br/>
+            <a:r>
+              <a:t>  - STEMI (Myocardial Infarction): Crushing substernal pain radiating to left arm + diaphoresis.</a:t>
+            </a:r>
+            <a:br/>
+            <a:r>
+              <a:t>  - Bacterial Meningitis: Triad of high fever + severe neck stiffness + altered mental status.</a:t>
+            </a:r>
+            <a:br/>
+            <a:r>
+              <a:t>  - Tension Pneumothorax: Tracheal deviation + unilateral absent breath sounds + hypotension.</a:t>
+            </a:r>
+            <a:br/>
+            <a:br/>
+            <a:r>
+              <a:t>• Instant Bedside Protocol Trigger:</a:t>
+            </a:r>
+            <a:br/>
+            <a:r>
+              <a:t>  Elevates critical alert banners immediately, prepending emergency bedside orders (e.g., Stat 12-lead ECG, Door-to-balloon PCI) before differential ranking.</a:t>
+            </a:r>
+          </a:p>
+        </p:txBody>
+      </p:sp>
+    </p:spTree>
+  </p:cSld>
+  <p:clrMapOvr>
+    <a:masterClrMapping/>
+  </p:clrMapOvr>
+</p:sld>
+</file>
+
+<file path=ppt/slides/slide8.xml><?xml version="1.0" encoding="utf-8"?>
+<p:sld xmlns:a="http://schemas.openxmlformats.org/drawingml/2006/main" xmlns:p="http://schemas.openxmlformats.org/presentationml/2006/main" xmlns:r="http://schemas.openxmlformats.org/officeDocument/2006/relationships">
+  <p:cSld>
+    <p:spTree>
+      <p:nvGrpSpPr>
+        <p:cNvPr id="1" name=""/>
+        <p:cNvGrpSpPr/>
+        <p:nvPr/>
+      </p:nvGrpSpPr>
+      <p:grpSpPr/>
+      <p:sp>
+        <p:nvSpPr>
+          <p:cNvPr id="2" name="Rectangle 1"/>
+          <p:cNvSpPr/>
+          <p:nvPr/>
+        </p:nvSpPr>
+        <p:spPr>
+          <a:xfrm>
+            <a:off x="0" y="0"/>
+            <a:ext cx="12191695" cy="6858000"/>
+          </a:xfrm>
+          <a:prstGeom prst="rect">
+            <a:avLst/>
+          </a:prstGeom>
+          <a:solidFill>
+            <a:srgbClr val="FFFFFF"/>
+          </a:solidFill>
+          <a:ln>
+            <a:noFill/>
+          </a:ln>
+        </p:spPr>
+        <p:style>
+          <a:lnRef idx="1">
+            <a:schemeClr val="accent1"/>
+          </a:lnRef>
+          <a:fillRef idx="3">
+            <a:schemeClr val="accent1"/>
+          </a:fillRef>
+          <a:effectRef idx="2">
+            <a:schemeClr val="accent1"/>
+          </a:effectRef>
+          <a:fontRef idx="minor">
+            <a:schemeClr val="lt1"/>
+          </a:fontRef>
+        </p:style>
+        <p:txBody>
+          <a:bodyPr rtlCol="0" anchor="ctr"/>
+          <a:lstStyle/>
+          <a:p>
+            <a:pPr algn="ctr"/>
+          </a:p>
+        </p:txBody>
+      </p:sp>
+      <p:sp>
+        <p:nvSpPr>
+          <p:cNvPr id="3" name="TextBox 2"/>
+          <p:cNvSpPr txBox="1"/>
+          <p:nvPr/>
+        </p:nvSpPr>
+        <p:spPr>
+          <a:xfrm>
+            <a:off x="731520" y="365760"/>
+            <a:ext cx="10728655" cy="822960"/>
+          </a:xfrm>
+          <a:prstGeom prst="rect">
+            <a:avLst/>
+          </a:prstGeom>
+          <a:noFill/>
+        </p:spPr>
+        <p:txBody>
+          <a:bodyPr wrap="square" lIns="0" tIns="0" rIns="0" bIns="0">
+            <a:spAutoFit/>
+          </a:bodyPr>
+          <a:lstStyle/>
+          <a:p>
+            <a:pPr>
+              <a:defRPr sz="1000" b="1">
+                <a:solidFill>
+                  <a:srgbClr val="0284C7"/>
+                </a:solidFill>
+                <a:latin typeface="Calibri"/>
+              </a:defRPr>
+            </a:pPr>
+            <a:r>
+              <a:t>MODEL SERVING &amp; RELIABILITY</a:t>
+            </a:r>
+          </a:p>
+          <a:p>
+            <a:pPr>
+              <a:spcBef>
+                <a:spcPts val="300"/>
+              </a:spcBef>
+              <a:defRPr sz="2400" b="1">
+                <a:solidFill>
+                  <a:srgbClr val="0F2942"/>
+                </a:solidFill>
+                <a:latin typeface="Calibri"/>
+              </a:defRPr>
+            </a:pPr>
+            <a:r>
+              <a:t>Person 1: Local LLM Orchestration &amp; Hardware Resilience</a:t>
+            </a:r>
+          </a:p>
+        </p:txBody>
+      </p:sp>
+      <p:sp>
+        <p:nvSpPr>
+          <p:cNvPr id="4" name="Rounded Rectangle 3"/>
+          <p:cNvSpPr/>
+          <p:nvPr/>
+        </p:nvSpPr>
+        <p:spPr>
+          <a:xfrm>
+            <a:off x="731520" y="1463040"/>
+            <a:ext cx="3474720" cy="4754880"/>
+          </a:xfrm>
+          <a:prstGeom prst="roundRect">
+            <a:avLst/>
+          </a:prstGeom>
+          <a:solidFill>
+            <a:srgbClr val="F8FAFC"/>
+          </a:solidFill>
+          <a:ln w="19050">
+            <a:solidFill>
+              <a:srgbClr val="8B5CF6"/>
+            </a:solidFill>
+          </a:ln>
+        </p:spPr>
+        <p:style>
+          <a:lnRef idx="1">
+            <a:schemeClr val="accent1"/>
+          </a:lnRef>
+          <a:fillRef idx="3">
+            <a:schemeClr val="accent1"/>
+          </a:fillRef>
+          <a:effectRef idx="2">
+            <a:schemeClr val="accent1"/>
+          </a:effectRef>
+          <a:fontRef idx="minor">
+            <a:schemeClr val="lt1"/>
+          </a:fontRef>
+        </p:style>
+        <p:txBody>
+          <a:bodyPr rtlCol="0" anchor="ctr" wrap="square"/>
+          <a:lstStyle/>
+          <a:p>
+            <a:pPr algn="ctr">
+              <a:defRPr sz="1500" b="1">
+                <a:solidFill>
+                  <a:srgbClr val="8B5CF6"/>
+                </a:solidFill>
+                <a:latin typeface="Calibri"/>
+              </a:defRPr>
+            </a:pPr>
+            <a:r>
+              <a:t>Constrained Local Inference</a:t>
+            </a:r>
+          </a:p>
+          <a:p>
+            <a:pPr>
+              <a:spcBef>
+                <a:spcPts val="1400"/>
+              </a:spcBef>
+              <a:defRPr sz="1200">
+                <a:solidFill>
+                  <a:srgbClr val="334155"/>
+                </a:solidFill>
+                <a:latin typeface="Calibri"/>
+              </a:defRPr>
+            </a:pPr>
+            <a:r>
+              <a:t>• Local Model: ii-medical:8b / llama3.2 hosted on local GPU via Ollama runtime (port 11434).</a:t>
+            </a:r>
+            <a:br/>
+            <a:r>
+              <a:t>• Strict Low Temperature (0.1): Minimizes stochastic sampling variance and guarantees reproducible clinical prose.</a:t>
+            </a:r>
+            <a:br/>
+            <a:r>
+              <a:t>• Zero Cloud Egress: All clinical prompts remain on the hospital premises, guaranteeing HIPAA compliance.</a:t>
+            </a:r>
+          </a:p>
+        </p:txBody>
+      </p:sp>
+      <p:sp>
+        <p:nvSpPr>
+          <p:cNvPr id="5" name="Rounded Rectangle 4"/>
+          <p:cNvSpPr/>
+          <p:nvPr/>
+        </p:nvSpPr>
+        <p:spPr>
+          <a:xfrm>
+            <a:off x="4343400" y="1463040"/>
+            <a:ext cx="3474720" cy="4754880"/>
+          </a:xfrm>
+          <a:prstGeom prst="roundRect">
+            <a:avLst/>
+          </a:prstGeom>
+          <a:solidFill>
+            <a:srgbClr val="F8FAFC"/>
+          </a:solidFill>
+          <a:ln w="19050">
+            <a:solidFill>
+              <a:srgbClr val="0284C7"/>
+            </a:solidFill>
+          </a:ln>
+        </p:spPr>
+        <p:style>
+          <a:lnRef idx="1">
+            <a:schemeClr val="accent1"/>
+          </a:lnRef>
+          <a:fillRef idx="3">
+            <a:schemeClr val="accent1"/>
+          </a:fillRef>
+          <a:effectRef idx="2">
+            <a:schemeClr val="accent1"/>
+          </a:effectRef>
+          <a:fontRef idx="minor">
+            <a:schemeClr val="lt1"/>
+          </a:fontRef>
+        </p:style>
+        <p:txBody>
+          <a:bodyPr rtlCol="0" anchor="ctr" wrap="square"/>
+          <a:lstStyle/>
+          <a:p>
+            <a:pPr algn="ctr">
+              <a:defRPr sz="1500" b="1">
+                <a:solidFill>
+                  <a:srgbClr val="0284C7"/>
+                </a:solidFill>
+                <a:latin typeface="Calibri"/>
+              </a:defRPr>
+            </a:pPr>
+            <a:r>
+              <a:t>Structured JSON Enforcement</a:t>
+            </a:r>
+          </a:p>
+          <a:p>
+            <a:pPr>
+              <a:spcBef>
+                <a:spcPts val="1400"/>
+              </a:spcBef>
+              <a:defRPr sz="1200">
+                <a:solidFill>
+                  <a:srgbClr val="334155"/>
+                </a:solidFill>
+                <a:latin typeface="Calibri"/>
+              </a:defRPr>
+            </a:pPr>
+            <a:r>
+              <a:t>• Strict Pydantic JSON Schemas: LLM outputs are forced into structured JSON with fields for summary, reasoning, and missing signs.</a:t>
+            </a:r>
+            <a:br/>
+            <a:r>
+              <a:t>• Schema Validation: If an LLM response fails validation, an automated repair parser corrects formatting errors instantly.</a:t>
+            </a:r>
+          </a:p>
+        </p:txBody>
+      </p:sp>
+      <p:sp>
+        <p:nvSpPr>
+          <p:cNvPr id="6" name="Rounded Rectangle 5"/>
+          <p:cNvSpPr/>
+          <p:nvPr/>
+        </p:nvSpPr>
+        <p:spPr>
+          <a:xfrm>
+            <a:off x="7955280" y="1463040"/>
+            <a:ext cx="3474720" cy="4754880"/>
+          </a:xfrm>
+          <a:prstGeom prst="roundRect">
+            <a:avLst/>
+          </a:prstGeom>
+          <a:solidFill>
+            <a:srgbClr val="F8FAFC"/>
+          </a:solidFill>
+          <a:ln w="19050">
+            <a:solidFill>
+              <a:srgbClr val="10B981"/>
+            </a:solidFill>
+          </a:ln>
+        </p:spPr>
+        <p:style>
+          <a:lnRef idx="1">
+            <a:schemeClr val="accent1"/>
+          </a:lnRef>
+          <a:fillRef idx="3">
+            <a:schemeClr val="accent1"/>
+          </a:fillRef>
+          <a:effectRef idx="2">
+            <a:schemeClr val="accent1"/>
+          </a:effectRef>
+          <a:fontRef idx="minor">
+            <a:schemeClr val="lt1"/>
+          </a:fontRef>
+        </p:style>
+        <p:txBody>
+          <a:bodyPr rtlCol="0" anchor="ctr" wrap="square"/>
+          <a:lstStyle/>
+          <a:p>
+            <a:pPr algn="ctr">
+              <a:defRPr sz="1500" b="1">
+                <a:solidFill>
+                  <a:srgbClr val="10B981"/>
+                </a:solidFill>
+                <a:latin typeface="Calibri"/>
+              </a:defRPr>
+            </a:pPr>
+            <a:r>
+              <a:t>Hardware Circuit Breaker Pattern</a:t>
+            </a:r>
+          </a:p>
+          <a:p>
+            <a:pPr>
+              <a:spcBef>
+                <a:spcPts val="1400"/>
+              </a:spcBef>
+              <a:defRPr sz="1200">
+                <a:solidFill>
+                  <a:srgbClr val="334155"/>
+                </a:solidFill>
+                <a:latin typeface="Calibri"/>
+              </a:defRPr>
+            </a:pPr>
+            <a:r>
+              <a:t>• 10 Consecutive Failure Trip: If Ollama crashes or runs out of VRAM, the circuit breaker opens for 30 seconds.</a:t>
+            </a:r>
+            <a:br/>
+            <a:r>
+              <a:t>• Zero Downtime Fallback: Bypasses the LLM completely, synthesizing clinical narratives from static medical monographs.</a:t>
+            </a:r>
+            <a:br/>
+            <a:r>
+              <a:t>• Self-Healing: Periodically tests background health checks and closes the circuit automatically once Ollama recovers.</a:t>
+            </a:r>
+          </a:p>
+        </p:txBody>
+      </p:sp>
+    </p:spTree>
+  </p:cSld>
+  <p:clrMapOvr>
+    <a:masterClrMapping/>
+  </p:clrMapOvr>
+</p:sld>
+</file>
+
+<file path=ppt/slides/slide9.xml><?xml version="1.0" encoding="utf-8"?>
+<p:sld xmlns:a="http://schemas.openxmlformats.org/drawingml/2006/main" xmlns:p="http://schemas.openxmlformats.org/presentationml/2006/main" xmlns:r="http://schemas.openxmlformats.org/officeDocument/2006/relationships">
+  <p:cSld>
+    <p:spTree>
+      <p:nvGrpSpPr>
+        <p:cNvPr id="1" name=""/>
+        <p:cNvGrpSpPr/>
+        <p:nvPr/>
+      </p:nvGrpSpPr>
+      <p:grpSpPr/>
+      <p:sp>
+        <p:nvSpPr>
+          <p:cNvPr id="2" name="Rectangle 1"/>
+          <p:cNvSpPr/>
+          <p:nvPr/>
+        </p:nvSpPr>
+        <p:spPr>
+          <a:xfrm>
+            <a:off x="0" y="0"/>
+            <a:ext cx="12191695" cy="6858000"/>
+          </a:xfrm>
+          <a:prstGeom prst="rect">
+            <a:avLst/>
+          </a:prstGeom>
+          <a:solidFill>
+            <a:srgbClr val="FFFFFF"/>
+          </a:solidFill>
+          <a:ln>
+            <a:noFill/>
+          </a:ln>
+        </p:spPr>
+        <p:style>
+          <a:lnRef idx="1">
+            <a:schemeClr val="accent1"/>
+          </a:lnRef>
+          <a:fillRef idx="3">
+            <a:schemeClr val="accent1"/>
+          </a:fillRef>
+          <a:effectRef idx="2">
+            <a:schemeClr val="accent1"/>
+          </a:effectRef>
+          <a:fontRef idx="minor">
+            <a:schemeClr val="lt1"/>
+          </a:fontRef>
+        </p:style>
+        <p:txBody>
+          <a:bodyPr rtlCol="0" anchor="ctr"/>
+          <a:lstStyle/>
+          <a:p>
+            <a:pPr algn="ctr"/>
+          </a:p>
+        </p:txBody>
+      </p:sp>
+      <p:sp>
+        <p:nvSpPr>
+          <p:cNvPr id="3" name="TextBox 2"/>
+          <p:cNvSpPr txBox="1"/>
+          <p:nvPr/>
+        </p:nvSpPr>
+        <p:spPr>
+          <a:xfrm>
+            <a:off x="731520" y="365760"/>
+            <a:ext cx="10728655" cy="822960"/>
+          </a:xfrm>
+          <a:prstGeom prst="rect">
+            <a:avLst/>
+          </a:prstGeom>
+          <a:noFill/>
+        </p:spPr>
+        <p:txBody>
+          <a:bodyPr wrap="square" lIns="0" tIns="0" rIns="0" bIns="0">
+            <a:spAutoFit/>
+          </a:bodyPr>
+          <a:lstStyle/>
+          <a:p>
+            <a:pPr>
+              <a:defRPr sz="1000" b="1">
+                <a:solidFill>
+                  <a:srgbClr val="0284C7"/>
+                </a:solidFill>
+                <a:latin typeface="Calibri"/>
+              </a:defRPr>
+            </a:pPr>
+            <a:r>
+              <a:t>SPEECH INGESTION &amp; ACOUSTIC PROCESSING</a:t>
+            </a:r>
+          </a:p>
+          <a:p>
+            <a:pPr>
+              <a:spcBef>
+                <a:spcPts val="300"/>
+              </a:spcBef>
+              <a:defRPr sz="2400" b="1">
+                <a:solidFill>
+                  <a:srgbClr val="0F2942"/>
+                </a:solidFill>
+                <a:latin typeface="Calibri"/>
+              </a:defRPr>
+            </a:pPr>
+            <a:r>
+              <a:t>Person 2: Ambient Voice Consultation Ingestion &amp; Audio Diarization</a:t>
+            </a:r>
+          </a:p>
+        </p:txBody>
+      </p:sp>
+      <p:sp>
+        <p:nvSpPr>
+          <p:cNvPr id="4" name="Rounded Rectangle 3"/>
+          <p:cNvSpPr/>
+          <p:nvPr/>
+        </p:nvSpPr>
+        <p:spPr>
+          <a:xfrm>
+            <a:off x="731520" y="1463040"/>
+            <a:ext cx="5212080" cy="4754880"/>
+          </a:xfrm>
+          <a:prstGeom prst="roundRect">
+            <a:avLst/>
+          </a:prstGeom>
+          <a:solidFill>
+            <a:srgbClr val="F8FAFC"/>
+          </a:solidFill>
+          <a:ln w="19050">
+            <a:solidFill>
+              <a:srgbClr val="0D9488"/>
+            </a:solidFill>
+          </a:ln>
+        </p:spPr>
+        <p:style>
+          <a:lnRef idx="1">
+            <a:schemeClr val="accent1"/>
+          </a:lnRef>
+          <a:fillRef idx="3">
+            <a:schemeClr val="accent1"/>
+          </a:fillRef>
+          <a:effectRef idx="2">
+            <a:schemeClr val="accent1"/>
+          </a:effectRef>
+          <a:fontRef idx="minor">
+            <a:schemeClr val="lt1"/>
+          </a:fontRef>
+        </p:style>
+        <p:txBody>
+          <a:bodyPr rtlCol="0" anchor="ctr" wrap="square"/>
+          <a:lstStyle/>
+          <a:p>
+            <a:pPr algn="ctr">
+              <a:defRPr sz="1500" b="1">
+                <a:solidFill>
+                  <a:srgbClr val="0D9488"/>
+                </a:solidFill>
+                <a:latin typeface="Calibri"/>
+              </a:defRPr>
+            </a:pPr>
+            <a:r>
+              <a:t>Microphone Capture &amp; Faster-Whisper ASR</a:t>
+            </a:r>
+          </a:p>
+          <a:p>
+            <a:pPr>
+              <a:spcBef>
+                <a:spcPts val="1200"/>
+              </a:spcBef>
+              <a:defRPr sz="1200">
+                <a:solidFill>
+                  <a:srgbClr val="334155"/>
+                </a:solidFill>
+                <a:latin typeface="Calibri"/>
+              </a:defRPr>
+            </a:pPr>
+            <a:r>
+              <a:t>• Web Audio API Capture: Browser captures raw microphone input at 16kHz PCM single-channel mono, chunked into 250ms binary buffers.</a:t>
+            </a:r>
+            <a:br/>
+            <a:br/>
+            <a:r>
+              <a:t>• WebSocket Streaming: Chunks stream via ws.ts to FastAPI backend without intermediate disk writes.</a:t>
+            </a:r>
+            <a:br/>
+            <a:br/>
+            <a:r>
+              <a:t>• Faster-Whisper Large-v3: Uses CTranslate2 quantization (int8/float16), executing 4x faster than standard PyTorch Whisper with 1/3 the memory footprint.</a:t>
+            </a:r>
+            <a:br/>
+            <a:br/>
+            <a:r>
+              <a:t>• Clinical Domain Prompting: Custom initial prompts prime Whisper to accurately transcribe medical jargon (e.g., dyspnea, hepatosplenomegaly, ciprofloxacin).</a:t>
+            </a:r>
+          </a:p>
+        </p:txBody>
+      </p:sp>
+      <p:sp>
+        <p:nvSpPr>
+          <p:cNvPr id="5" name="Rounded Rectangle 4"/>
+          <p:cNvSpPr/>
+          <p:nvPr/>
+        </p:nvSpPr>
+        <p:spPr>
+          <a:xfrm>
+            <a:off x="6217920" y="1463040"/>
+            <a:ext cx="5212080" cy="4754880"/>
+          </a:xfrm>
+          <a:prstGeom prst="roundRect">
+            <a:avLst/>
+          </a:prstGeom>
+          <a:solidFill>
+            <a:srgbClr val="F8FAFC"/>
+          </a:solidFill>
+          <a:ln w="19050">
+            <a:solidFill>
+              <a:srgbClr val="0284C7"/>
+            </a:solidFill>
+          </a:ln>
+        </p:spPr>
+        <p:style>
+          <a:lnRef idx="1">
+            <a:schemeClr val="accent1"/>
+          </a:lnRef>
+          <a:fillRef idx="3">
+            <a:schemeClr val="accent1"/>
+          </a:fillRef>
+          <a:effectRef idx="2">
+            <a:schemeClr val="accent1"/>
+          </a:effectRef>
+          <a:fontRef idx="minor">
+            <a:schemeClr val="lt1"/>
+          </a:fontRef>
+        </p:style>
+        <p:txBody>
+          <a:bodyPr rtlCol="0" anchor="ctr" wrap="square"/>
+          <a:lstStyle/>
+          <a:p>
+            <a:pPr algn="ctr">
+              <a:defRPr sz="1500" b="1">
+                <a:solidFill>
+                  <a:srgbClr val="0284C7"/>
+                </a:solidFill>
+                <a:latin typeface="Calibri"/>
+              </a:defRPr>
+            </a:pPr>
+            <a:r>
+              <a:t>PyAnnote 3.1 Dual-Speaker Diarization</a:t>
+            </a:r>
+          </a:p>
+          <a:p>
+            <a:pPr>
+              <a:spcBef>
+                <a:spcPts val="1200"/>
+              </a:spcBef>
+              <a:defRPr sz="1200">
+                <a:solidFill>
+                  <a:srgbClr val="334155"/>
+                </a:solidFill>
+                <a:latin typeface="Calibri"/>
+              </a:defRPr>
+            </a:pPr>
+            <a:r>
+              <a:t>• Acoustic Voiceprint Separation: Segregates dialogue between Attending Doctor and Patient using neural speaker embeddings.</a:t>
+            </a:r>
+            <a:br/>
+            <a:br/>
+            <a:r>
+              <a:t>• Elimination of Role Confusion: Prevents patient subjective complaints from being recorded as physician clinical findings, and vice versa.</a:t>
+            </a:r>
+            <a:br/>
+            <a:br/>
+            <a:r>
+              <a:t>• Real-Time Turn-Taking Alignment: Aligns Whisper transcription timestamps with PyAnnote speaker intervals with &lt;150ms temporal jitter.</a:t>
+            </a:r>
+            <a:br/>
+            <a:br/>
+            <a:r>
+              <a:t>• Energy-Based Voice Activity Detection (VAD): Suppresses background hospital noise, rustling paper, and trolley wheels.</a:t>
             </a:r>
           </a:p>
         </p:txBody>
